--- a/MysticAI_Presentation [Autosaved].pptx
+++ b/MysticAI_Presentation [Autosaved].pptx
@@ -12,6 +12,9 @@
     <p:sldId id="260" r:id="rId11"/>
     <p:sldId id="261" r:id="rId12"/>
     <p:sldId id="262" r:id="rId13"/>
+    <p:sldId id="263" r:id="rId14"/>
+    <p:sldId id="264" r:id="rId15"/>
+    <p:sldId id="265" r:id="rId16"/>
   </p:sldIdLst>
   <p:sldSz cx="12191695" cy="6858000" type="screen4x3"/>
   <p:notesSz cx="6858000" cy="9144000"/>
@@ -3182,6 +3185,683 @@
       </p:sp>
       <p:sp>
         <p:nvSpPr>
+          <p:cNvPr id="4" name="Rounded Rectangle 3"/>
+          <p:cNvSpPr/>
+          <p:nvPr/>
+        </p:nvSpPr>
+        <p:spPr>
+          <a:xfrm>
+            <a:off x="731520" y="1097280"/>
+            <a:ext cx="4389120" cy="347472"/>
+          </a:xfrm>
+          <a:prstGeom prst="roundRect">
+            <a:avLst/>
+          </a:prstGeom>
+          <a:solidFill>
+            <a:srgbClr val="131D31"/>
+          </a:solidFill>
+          <a:ln>
+            <a:solidFill>
+              <a:srgbClr val="38BDF8"/>
+            </a:solidFill>
+          </a:ln>
+        </p:spPr>
+        <p:style>
+          <a:lnRef idx="1">
+            <a:schemeClr val="accent1"/>
+          </a:lnRef>
+          <a:fillRef idx="3">
+            <a:schemeClr val="accent1"/>
+          </a:fillRef>
+          <a:effectRef idx="2">
+            <a:schemeClr val="accent1"/>
+          </a:effectRef>
+          <a:fontRef idx="minor">
+            <a:schemeClr val="lt1"/>
+          </a:fontRef>
+        </p:style>
+        <p:txBody>
+          <a:bodyPr rtlCol="0" anchor="ctr"/>
+          <a:lstStyle/>
+          <a:p>
+            <a:pPr algn="ctr">
+              <a:defRPr sz="1050" b="1">
+                <a:solidFill>
+                  <a:srgbClr val="38BDF8"/>
+                </a:solidFill>
+              </a:defRPr>
+            </a:pPr>
+            <a:r>
+              <a:t>✦ INFOSYS SPRINGBOARD INTERNSHIP 2026</a:t>
+            </a:r>
+          </a:p>
+        </p:txBody>
+      </p:sp>
+      <p:sp>
+        <p:nvSpPr>
+          <p:cNvPr id="5" name="TextBox 4"/>
+          <p:cNvSpPr txBox="1"/>
+          <p:nvPr/>
+        </p:nvSpPr>
+        <p:spPr>
+          <a:xfrm>
+            <a:off x="731520" y="1645920"/>
+            <a:ext cx="10515600" cy="1463040"/>
+          </a:xfrm>
+          <a:prstGeom prst="rect">
+            <a:avLst/>
+          </a:prstGeom>
+          <a:noFill/>
+        </p:spPr>
+        <p:txBody>
+          <a:bodyPr wrap="square" lIns="0" tIns="0">
+            <a:spAutoFit/>
+          </a:bodyPr>
+          <a:lstStyle/>
+          <a:p>
+            <a:pPr>
+              <a:defRPr sz="4000" b="1">
+                <a:solidFill>
+                  <a:srgbClr val="F8FAFC"/>
+                </a:solidFill>
+              </a:defRPr>
+            </a:pPr>
+            <a:r>
+              <a:t>MysticAI Platform</a:t>
+            </a:r>
+          </a:p>
+          <a:p>
+            <a:pPr>
+              <a:defRPr sz="2000" b="1">
+                <a:solidFill>
+                  <a:srgbClr val="F59E0B"/>
+                </a:solidFill>
+              </a:defRPr>
+            </a:pPr>
+            <a:r>
+              <a:t>AI-Powered Palmistry &amp; Tarot Multimodal Intelligence System</a:t>
+            </a:r>
+          </a:p>
+          <a:p>
+            <a:pPr>
+              <a:defRPr sz="1300">
+                <a:solidFill>
+                  <a:srgbClr val="CBD5E1"/>
+                </a:solidFill>
+              </a:defRPr>
+            </a:pPr>
+            <a:r>
+              <a:t>Synthesizing Computer Vision, 78-Card Symbolic Mechanics &amp; 5-Factor Confidence Scoring</a:t>
+            </a:r>
+          </a:p>
+        </p:txBody>
+      </p:sp>
+      <p:sp>
+        <p:nvSpPr>
+          <p:cNvPr id="6" name="Rounded Rectangle 5"/>
+          <p:cNvSpPr/>
+          <p:nvPr/>
+        </p:nvSpPr>
+        <p:spPr>
+          <a:xfrm>
+            <a:off x="731520" y="3566160"/>
+            <a:ext cx="2560320" cy="1280160"/>
+          </a:xfrm>
+          <a:prstGeom prst="roundRect">
+            <a:avLst/>
+          </a:prstGeom>
+          <a:solidFill>
+            <a:srgbClr val="131D31"/>
+          </a:solidFill>
+          <a:ln w="12700">
+            <a:solidFill>
+              <a:srgbClr val="38BDF8"/>
+            </a:solidFill>
+          </a:ln>
+        </p:spPr>
+        <p:style>
+          <a:lnRef idx="1">
+            <a:schemeClr val="accent1"/>
+          </a:lnRef>
+          <a:fillRef idx="3">
+            <a:schemeClr val="accent1"/>
+          </a:fillRef>
+          <a:effectRef idx="2">
+            <a:schemeClr val="accent1"/>
+          </a:effectRef>
+          <a:fontRef idx="minor">
+            <a:schemeClr val="lt1"/>
+          </a:fontRef>
+        </p:style>
+        <p:txBody>
+          <a:bodyPr rtlCol="0" anchor="ctr"/>
+          <a:lstStyle/>
+          <a:p>
+            <a:pPr algn="ctr"/>
+          </a:p>
+        </p:txBody>
+      </p:sp>
+      <p:sp>
+        <p:nvSpPr>
+          <p:cNvPr id="7" name="TextBox 6"/>
+          <p:cNvSpPr txBox="1"/>
+          <p:nvPr/>
+        </p:nvSpPr>
+        <p:spPr>
+          <a:xfrm>
+            <a:off x="914400" y="3703320"/>
+            <a:ext cx="2194560" cy="1005840"/>
+          </a:xfrm>
+          <a:prstGeom prst="rect">
+            <a:avLst/>
+          </a:prstGeom>
+          <a:noFill/>
+        </p:spPr>
+        <p:txBody>
+          <a:bodyPr wrap="square" lIns="0" tIns="0">
+            <a:spAutoFit/>
+          </a:bodyPr>
+          <a:lstStyle/>
+          <a:p>
+            <a:pPr>
+              <a:defRPr sz="1200" b="1">
+                <a:solidFill>
+                  <a:srgbClr val="38BDF8"/>
+                </a:solidFill>
+              </a:defRPr>
+            </a:pPr>
+            <a:r>
+              <a:t>100% MILESTONES</a:t>
+            </a:r>
+          </a:p>
+          <a:p>
+            <a:pPr>
+              <a:defRPr sz="1000">
+                <a:solidFill>
+                  <a:srgbClr val="CBD5E1"/>
+                </a:solidFill>
+              </a:defRPr>
+            </a:pPr>
+            <a:r>
+              <a:t>All 4 Phases Complete</a:t>
+            </a:r>
+          </a:p>
+        </p:txBody>
+      </p:sp>
+      <p:sp>
+        <p:nvSpPr>
+          <p:cNvPr id="8" name="Rounded Rectangle 7"/>
+          <p:cNvSpPr/>
+          <p:nvPr/>
+        </p:nvSpPr>
+        <p:spPr>
+          <a:xfrm>
+            <a:off x="3456432" y="3566160"/>
+            <a:ext cx="2560320" cy="1280160"/>
+          </a:xfrm>
+          <a:prstGeom prst="roundRect">
+            <a:avLst/>
+          </a:prstGeom>
+          <a:solidFill>
+            <a:srgbClr val="131D31"/>
+          </a:solidFill>
+          <a:ln w="12700">
+            <a:solidFill>
+              <a:srgbClr val="10B981"/>
+            </a:solidFill>
+          </a:ln>
+        </p:spPr>
+        <p:style>
+          <a:lnRef idx="1">
+            <a:schemeClr val="accent1"/>
+          </a:lnRef>
+          <a:fillRef idx="3">
+            <a:schemeClr val="accent1"/>
+          </a:fillRef>
+          <a:effectRef idx="2">
+            <a:schemeClr val="accent1"/>
+          </a:effectRef>
+          <a:fontRef idx="minor">
+            <a:schemeClr val="lt1"/>
+          </a:fontRef>
+        </p:style>
+        <p:txBody>
+          <a:bodyPr rtlCol="0" anchor="ctr"/>
+          <a:lstStyle/>
+          <a:p>
+            <a:pPr algn="ctr"/>
+          </a:p>
+        </p:txBody>
+      </p:sp>
+      <p:sp>
+        <p:nvSpPr>
+          <p:cNvPr id="9" name="TextBox 8"/>
+          <p:cNvSpPr txBox="1"/>
+          <p:nvPr/>
+        </p:nvSpPr>
+        <p:spPr>
+          <a:xfrm>
+            <a:off x="3639312" y="3703320"/>
+            <a:ext cx="2194560" cy="1005840"/>
+          </a:xfrm>
+          <a:prstGeom prst="rect">
+            <a:avLst/>
+          </a:prstGeom>
+          <a:noFill/>
+        </p:spPr>
+        <p:txBody>
+          <a:bodyPr wrap="square" lIns="0" tIns="0">
+            <a:spAutoFit/>
+          </a:bodyPr>
+          <a:lstStyle/>
+          <a:p>
+            <a:pPr>
+              <a:defRPr sz="1200" b="1">
+                <a:solidFill>
+                  <a:srgbClr val="10B981"/>
+                </a:solidFill>
+              </a:defRPr>
+            </a:pPr>
+            <a:r>
+              <a:t>63 UNIT TESTS</a:t>
+            </a:r>
+          </a:p>
+          <a:p>
+            <a:pPr>
+              <a:defRPr sz="1000">
+                <a:solidFill>
+                  <a:srgbClr val="CBD5E1"/>
+                </a:solidFill>
+              </a:defRPr>
+            </a:pPr>
+            <a:r>
+              <a:t>100% Pass Rate</a:t>
+            </a:r>
+          </a:p>
+        </p:txBody>
+      </p:sp>
+      <p:sp>
+        <p:nvSpPr>
+          <p:cNvPr id="10" name="Rounded Rectangle 9"/>
+          <p:cNvSpPr/>
+          <p:nvPr/>
+        </p:nvSpPr>
+        <p:spPr>
+          <a:xfrm>
+            <a:off x="6181344" y="3566160"/>
+            <a:ext cx="2560320" cy="1280160"/>
+          </a:xfrm>
+          <a:prstGeom prst="roundRect">
+            <a:avLst/>
+          </a:prstGeom>
+          <a:solidFill>
+            <a:srgbClr val="131D31"/>
+          </a:solidFill>
+          <a:ln w="12700">
+            <a:solidFill>
+              <a:srgbClr val="A855F7"/>
+            </a:solidFill>
+          </a:ln>
+        </p:spPr>
+        <p:style>
+          <a:lnRef idx="1">
+            <a:schemeClr val="accent1"/>
+          </a:lnRef>
+          <a:fillRef idx="3">
+            <a:schemeClr val="accent1"/>
+          </a:fillRef>
+          <a:effectRef idx="2">
+            <a:schemeClr val="accent1"/>
+          </a:effectRef>
+          <a:fontRef idx="minor">
+            <a:schemeClr val="lt1"/>
+          </a:fontRef>
+        </p:style>
+        <p:txBody>
+          <a:bodyPr rtlCol="0" anchor="ctr"/>
+          <a:lstStyle/>
+          <a:p>
+            <a:pPr algn="ctr"/>
+          </a:p>
+        </p:txBody>
+      </p:sp>
+      <p:sp>
+        <p:nvSpPr>
+          <p:cNvPr id="11" name="TextBox 10"/>
+          <p:cNvSpPr txBox="1"/>
+          <p:nvPr/>
+        </p:nvSpPr>
+        <p:spPr>
+          <a:xfrm>
+            <a:off x="6364224" y="3703320"/>
+            <a:ext cx="2194560" cy="1005840"/>
+          </a:xfrm>
+          <a:prstGeom prst="rect">
+            <a:avLst/>
+          </a:prstGeom>
+          <a:noFill/>
+        </p:spPr>
+        <p:txBody>
+          <a:bodyPr wrap="square" lIns="0" tIns="0">
+            <a:spAutoFit/>
+          </a:bodyPr>
+          <a:lstStyle/>
+          <a:p>
+            <a:pPr>
+              <a:defRPr sz="1200" b="1">
+                <a:solidFill>
+                  <a:srgbClr val="A855F7"/>
+                </a:solidFill>
+              </a:defRPr>
+            </a:pPr>
+            <a:r>
+              <a:t>30+ REST APIS</a:t>
+            </a:r>
+          </a:p>
+          <a:p>
+            <a:pPr>
+              <a:defRPr sz="1000">
+                <a:solidFill>
+                  <a:srgbClr val="CBD5E1"/>
+                </a:solidFill>
+              </a:defRPr>
+            </a:pPr>
+            <a:r>
+              <a:t>FastAPI Asynchronous</a:t>
+            </a:r>
+          </a:p>
+        </p:txBody>
+      </p:sp>
+      <p:sp>
+        <p:nvSpPr>
+          <p:cNvPr id="12" name="Rounded Rectangle 11"/>
+          <p:cNvSpPr/>
+          <p:nvPr/>
+        </p:nvSpPr>
+        <p:spPr>
+          <a:xfrm>
+            <a:off x="8906256" y="3566160"/>
+            <a:ext cx="2560320" cy="1280160"/>
+          </a:xfrm>
+          <a:prstGeom prst="roundRect">
+            <a:avLst/>
+          </a:prstGeom>
+          <a:solidFill>
+            <a:srgbClr val="131D31"/>
+          </a:solidFill>
+          <a:ln w="12700">
+            <a:solidFill>
+              <a:srgbClr val="F59E0B"/>
+            </a:solidFill>
+          </a:ln>
+        </p:spPr>
+        <p:style>
+          <a:lnRef idx="1">
+            <a:schemeClr val="accent1"/>
+          </a:lnRef>
+          <a:fillRef idx="3">
+            <a:schemeClr val="accent1"/>
+          </a:fillRef>
+          <a:effectRef idx="2">
+            <a:schemeClr val="accent1"/>
+          </a:effectRef>
+          <a:fontRef idx="minor">
+            <a:schemeClr val="lt1"/>
+          </a:fontRef>
+        </p:style>
+        <p:txBody>
+          <a:bodyPr rtlCol="0" anchor="ctr"/>
+          <a:lstStyle/>
+          <a:p>
+            <a:pPr algn="ctr"/>
+          </a:p>
+        </p:txBody>
+      </p:sp>
+      <p:sp>
+        <p:nvSpPr>
+          <p:cNvPr id="13" name="TextBox 12"/>
+          <p:cNvSpPr txBox="1"/>
+          <p:nvPr/>
+        </p:nvSpPr>
+        <p:spPr>
+          <a:xfrm>
+            <a:off x="9089136" y="3703320"/>
+            <a:ext cx="2194560" cy="1005840"/>
+          </a:xfrm>
+          <a:prstGeom prst="rect">
+            <a:avLst/>
+          </a:prstGeom>
+          <a:noFill/>
+        </p:spPr>
+        <p:txBody>
+          <a:bodyPr wrap="square" lIns="0" tIns="0">
+            <a:spAutoFit/>
+          </a:bodyPr>
+          <a:lstStyle/>
+          <a:p>
+            <a:pPr>
+              <a:defRPr sz="1200" b="1">
+                <a:solidFill>
+                  <a:srgbClr val="F59E0B"/>
+                </a:solidFill>
+              </a:defRPr>
+            </a:pPr>
+            <a:r>
+              <a:t>4 ROLE PORTALS</a:t>
+            </a:r>
+          </a:p>
+          <a:p>
+            <a:pPr>
+              <a:defRPr sz="1000">
+                <a:solidFill>
+                  <a:srgbClr val="CBD5E1"/>
+                </a:solidFill>
+              </a:defRPr>
+            </a:pPr>
+            <a:r>
+              <a:t>Seeker / Reader / Consultant / Admin</a:t>
+            </a:r>
+          </a:p>
+        </p:txBody>
+      </p:sp>
+      <p:sp>
+        <p:nvSpPr>
+          <p:cNvPr id="14" name="Rounded Rectangle 13"/>
+          <p:cNvSpPr/>
+          <p:nvPr/>
+        </p:nvSpPr>
+        <p:spPr>
+          <a:xfrm>
+            <a:off x="731520" y="5212080"/>
+            <a:ext cx="10728655" cy="822960"/>
+          </a:xfrm>
+          <a:prstGeom prst="roundRect">
+            <a:avLst/>
+          </a:prstGeom>
+          <a:solidFill>
+            <a:srgbClr val="1C2944"/>
+          </a:solidFill>
+          <a:ln w="12700">
+            <a:solidFill>
+              <a:srgbClr val="283854"/>
+            </a:solidFill>
+          </a:ln>
+        </p:spPr>
+        <p:style>
+          <a:lnRef idx="1">
+            <a:schemeClr val="accent1"/>
+          </a:lnRef>
+          <a:fillRef idx="3">
+            <a:schemeClr val="accent1"/>
+          </a:fillRef>
+          <a:effectRef idx="2">
+            <a:schemeClr val="accent1"/>
+          </a:effectRef>
+          <a:fontRef idx="minor">
+            <a:schemeClr val="lt1"/>
+          </a:fontRef>
+        </p:style>
+        <p:txBody>
+          <a:bodyPr rtlCol="0" anchor="ctr"/>
+          <a:lstStyle/>
+          <a:p>
+            <a:pPr algn="ctr"/>
+          </a:p>
+        </p:txBody>
+      </p:sp>
+      <p:sp>
+        <p:nvSpPr>
+          <p:cNvPr id="15" name="TextBox 14"/>
+          <p:cNvSpPr txBox="1"/>
+          <p:nvPr/>
+        </p:nvSpPr>
+        <p:spPr>
+          <a:xfrm>
+            <a:off x="1005840" y="5321808"/>
+            <a:ext cx="10149840" cy="640080"/>
+          </a:xfrm>
+          <a:prstGeom prst="rect">
+            <a:avLst/>
+          </a:prstGeom>
+          <a:noFill/>
+        </p:spPr>
+        <p:txBody>
+          <a:bodyPr wrap="square" lIns="0" tIns="0">
+            <a:spAutoFit/>
+          </a:bodyPr>
+          <a:lstStyle/>
+          <a:p>
+            <a:pPr>
+              <a:defRPr sz="1100" b="1">
+                <a:solidFill>
+                  <a:srgbClr val="F8FAFC"/>
+                </a:solidFill>
+              </a:defRPr>
+            </a:pPr>
+            <a:r>
+              <a:t>Author: Ayush Manore   |   Project Track: Full-Stack AI &amp; Intelligent Systems   |   Mentor: Infosys Technical Review Board</a:t>
+            </a:r>
+          </a:p>
+          <a:p>
+            <a:pPr>
+              <a:defRPr sz="1000">
+                <a:solidFill>
+                  <a:srgbClr val="38BDF8"/>
+                </a:solidFill>
+              </a:defRPr>
+            </a:pPr>
+            <a:r>
+              <a:t>Stack: Next.js 14 (React) · FastAPI (Python) · PostgreSQL / SQLite · MongoDB Motor · Redis · Docker</a:t>
+            </a:r>
+          </a:p>
+        </p:txBody>
+      </p:sp>
+    </p:spTree>
+  </p:cSld>
+  <p:clrMapOvr>
+    <a:masterClrMapping/>
+  </p:clrMapOvr>
+</p:sld>
+</file>
+
+<file path=ppt/slides/slide10.xml><?xml version="1.0" encoding="utf-8"?>
+<p:sld xmlns:a="http://schemas.openxmlformats.org/drawingml/2006/main" xmlns:p="http://schemas.openxmlformats.org/presentationml/2006/main" xmlns:r="http://schemas.openxmlformats.org/officeDocument/2006/relationships">
+  <p:cSld>
+    <p:spTree>
+      <p:nvGrpSpPr>
+        <p:cNvPr id="1" name=""/>
+        <p:cNvGrpSpPr/>
+        <p:nvPr/>
+      </p:nvGrpSpPr>
+      <p:grpSpPr/>
+      <p:sp>
+        <p:nvSpPr>
+          <p:cNvPr id="2" name="Rectangle 1"/>
+          <p:cNvSpPr/>
+          <p:nvPr/>
+        </p:nvSpPr>
+        <p:spPr>
+          <a:xfrm>
+            <a:off x="0" y="0"/>
+            <a:ext cx="12191695" cy="6858000"/>
+          </a:xfrm>
+          <a:prstGeom prst="rect">
+            <a:avLst/>
+          </a:prstGeom>
+          <a:solidFill>
+            <a:srgbClr val="0A0F1D"/>
+          </a:solidFill>
+          <a:ln>
+            <a:noFill/>
+          </a:ln>
+        </p:spPr>
+        <p:style>
+          <a:lnRef idx="1">
+            <a:schemeClr val="accent1"/>
+          </a:lnRef>
+          <a:fillRef idx="3">
+            <a:schemeClr val="accent1"/>
+          </a:fillRef>
+          <a:effectRef idx="2">
+            <a:schemeClr val="accent1"/>
+          </a:effectRef>
+          <a:fontRef idx="minor">
+            <a:schemeClr val="lt1"/>
+          </a:fontRef>
+        </p:style>
+        <p:txBody>
+          <a:bodyPr rtlCol="0" anchor="ctr"/>
+          <a:lstStyle/>
+          <a:p>
+            <a:pPr algn="ctr"/>
+          </a:p>
+        </p:txBody>
+      </p:sp>
+      <p:sp>
+        <p:nvSpPr>
+          <p:cNvPr id="3" name="Rectangle 2"/>
+          <p:cNvSpPr/>
+          <p:nvPr/>
+        </p:nvSpPr>
+        <p:spPr>
+          <a:xfrm>
+            <a:off x="0" y="0"/>
+            <a:ext cx="12191695" cy="73152"/>
+          </a:xfrm>
+          <a:prstGeom prst="rect">
+            <a:avLst/>
+          </a:prstGeom>
+          <a:solidFill>
+            <a:srgbClr val="38BDF8"/>
+          </a:solidFill>
+          <a:ln>
+            <a:noFill/>
+          </a:ln>
+        </p:spPr>
+        <p:style>
+          <a:lnRef idx="1">
+            <a:schemeClr val="accent1"/>
+          </a:lnRef>
+          <a:fillRef idx="3">
+            <a:schemeClr val="accent1"/>
+          </a:fillRef>
+          <a:effectRef idx="2">
+            <a:schemeClr val="accent1"/>
+          </a:effectRef>
+          <a:fontRef idx="minor">
+            <a:schemeClr val="lt1"/>
+          </a:fontRef>
+        </p:style>
+        <p:txBody>
+          <a:bodyPr rtlCol="0" anchor="ctr"/>
+          <a:lstStyle/>
+          <a:p>
+            <a:pPr algn="ctr"/>
+          </a:p>
+        </p:txBody>
+      </p:sp>
+      <p:sp>
+        <p:nvSpPr>
           <p:cNvPr id="4" name="TextBox 3"/>
           <p:cNvSpPr txBox="1"/>
           <p:nvPr/>
@@ -3205,12 +3885,12 @@
             <a:pPr>
               <a:defRPr sz="1050" b="1">
                 <a:solidFill>
-                  <a:srgbClr val="38BDF8"/>
-                </a:solidFill>
-              </a:defRPr>
-            </a:pPr>
-            <a:r>
-              <a:t>INFOSYS SPRINGBOARD CAPSTONE</a:t>
+                  <a:srgbClr val="F59E0B"/>
+                </a:solidFill>
+              </a:defRPr>
+            </a:pPr>
+            <a:r>
+              <a:t>09. SUMMARY &amp; DEMO</a:t>
             </a:r>
           </a:p>
         </p:txBody>
@@ -3238,14 +3918,14 @@
           <a:lstStyle/>
           <a:p>
             <a:pPr>
-              <a:defRPr sz="2100" b="1">
+              <a:defRPr sz="2200" b="1">
                 <a:solidFill>
                   <a:srgbClr val="F8FAFC"/>
                 </a:solidFill>
               </a:defRPr>
             </a:pPr>
             <a:r>
-              <a:t>MysticAI: Next-Gen Palmistry &amp; Tarot Intelligence</a:t>
+              <a:t>Project Conclusion, Impact &amp; Future Roadmap</a:t>
             </a:r>
           </a:p>
         </p:txBody>
@@ -3258,8 +3938,8 @@
         </p:nvSpPr>
         <p:spPr>
           <a:xfrm>
-            <a:off x="10332720" y="411480"/>
-            <a:ext cx="1097280" cy="365760"/>
+            <a:off x="10241280" y="365760"/>
+            <a:ext cx="1188720" cy="320040"/>
           </a:xfrm>
           <a:prstGeom prst="rect">
             <a:avLst/>
@@ -3267,20 +3947,20 @@
           <a:noFill/>
         </p:spPr>
         <p:txBody>
-          <a:bodyPr wrap="none">
+          <a:bodyPr wrap="none" rIns="0">
             <a:spAutoFit/>
           </a:bodyPr>
           <a:lstStyle/>
           <a:p>
             <a:pPr algn="r">
-              <a:defRPr sz="1300" b="1">
+              <a:defRPr sz="1100" b="1">
                 <a:solidFill>
                   <a:srgbClr val="94A3B8"/>
                 </a:solidFill>
               </a:defRPr>
             </a:pPr>
             <a:r>
-              <a:t>01 / 07</a:t>
+              <a:t>10 / 10</a:t>
             </a:r>
           </a:p>
         </p:txBody>
@@ -3293,8 +3973,8 @@
         </p:nvSpPr>
         <p:spPr>
           <a:xfrm>
-            <a:off x="731520" y="1188720"/>
-            <a:ext cx="10728655" cy="18288"/>
+            <a:off x="731520" y="1234440"/>
+            <a:ext cx="10728655" cy="13716"/>
           </a:xfrm>
           <a:prstGeom prst="rect">
             <a:avLst/>
@@ -3336,8 +4016,8 @@
         </p:nvSpPr>
         <p:spPr>
           <a:xfrm>
-            <a:off x="731520" y="1371600"/>
-            <a:ext cx="5303520" cy="1508760"/>
+            <a:off x="731520" y="1463040"/>
+            <a:ext cx="5212080" cy="4754880"/>
           </a:xfrm>
           <a:prstGeom prst="roundRect">
             <a:avLst/>
@@ -3345,9 +4025,9 @@
           <a:solidFill>
             <a:srgbClr val="131D31"/>
           </a:solidFill>
-          <a:ln w="19050">
+          <a:ln w="12700">
             <a:solidFill>
-              <a:srgbClr val="283854"/>
+              <a:srgbClr val="10B981"/>
             </a:solidFill>
           </a:ln>
         </p:spPr>
@@ -3381,100 +4061,8 @@
         </p:nvSpPr>
         <p:spPr>
           <a:xfrm>
-            <a:off x="914400" y="1481328"/>
-            <a:ext cx="4937760" cy="1280160"/>
-          </a:xfrm>
-          <a:prstGeom prst="rect">
-            <a:avLst/>
-          </a:prstGeom>
-          <a:noFill/>
-        </p:spPr>
-        <p:txBody>
-          <a:bodyPr wrap="square">
-            <a:spAutoFit/>
-          </a:bodyPr>
-          <a:lstStyle/>
-          <a:p>
-            <a:pPr>
-              <a:defRPr sz="1500" b="1">
-                <a:solidFill>
-                  <a:srgbClr val="F59E0B"/>
-                </a:solidFill>
-              </a:defRPr>
-            </a:pPr>
-            <a:r>
-              <a:t>Multimodal AI Spiritual Intelligence Platform</a:t>
-            </a:r>
-          </a:p>
-          <a:p>
-            <a:pPr>
-              <a:defRPr sz="1100">
-                <a:solidFill>
-                  <a:srgbClr val="CBD5E1"/>
-                </a:solidFill>
-              </a:defRPr>
-            </a:pPr>
-            <a:r>
-              <a:t>Bridging ancient esoteric divination (Tarot &amp; Palmistry) with modern Computer Vision, Google Gemini 2.0 Flash LLM, and full-stack reactive microservices.</a:t>
-            </a:r>
-          </a:p>
-        </p:txBody>
-      </p:sp>
-      <p:sp>
-        <p:nvSpPr>
-          <p:cNvPr id="10" name="Rounded Rectangle 9"/>
-          <p:cNvSpPr/>
-          <p:nvPr/>
-        </p:nvSpPr>
-        <p:spPr>
-          <a:xfrm>
-            <a:off x="731520" y="3017520"/>
-            <a:ext cx="5303520" cy="804672"/>
-          </a:xfrm>
-          <a:prstGeom prst="roundRect">
-            <a:avLst/>
-          </a:prstGeom>
-          <a:solidFill>
-            <a:srgbClr val="131D31"/>
-          </a:solidFill>
-          <a:ln w="12700">
-            <a:solidFill>
-              <a:srgbClr val="283854"/>
-            </a:solidFill>
-          </a:ln>
-        </p:spPr>
-        <p:style>
-          <a:lnRef idx="1">
-            <a:schemeClr val="accent1"/>
-          </a:lnRef>
-          <a:fillRef idx="3">
-            <a:schemeClr val="accent1"/>
-          </a:fillRef>
-          <a:effectRef idx="2">
-            <a:schemeClr val="accent1"/>
-          </a:effectRef>
-          <a:fontRef idx="minor">
-            <a:schemeClr val="lt1"/>
-          </a:fontRef>
-        </p:style>
-        <p:txBody>
-          <a:bodyPr rtlCol="0" anchor="ctr"/>
-          <a:lstStyle/>
-          <a:p>
-            <a:pPr algn="ctr"/>
-          </a:p>
-        </p:txBody>
-      </p:sp>
-      <p:sp>
-        <p:nvSpPr>
-          <p:cNvPr id="11" name="TextBox 10"/>
-          <p:cNvSpPr txBox="1"/>
-          <p:nvPr/>
-        </p:nvSpPr>
-        <p:spPr>
-          <a:xfrm>
-            <a:off x="896112" y="3090672"/>
-            <a:ext cx="4983480" cy="658368"/>
+            <a:off x="1005840" y="1691640"/>
+            <a:ext cx="4663440" cy="4297680"/>
           </a:xfrm>
           <a:prstGeom prst="rect">
             <a:avLst/>
@@ -3488,461 +4076,130 @@
           <a:lstStyle/>
           <a:p>
             <a:pPr>
-              <a:defRPr sz="1150" b="1">
-                <a:solidFill>
-                  <a:srgbClr val="38BDF8"/>
-                </a:solidFill>
-              </a:defRPr>
-            </a:pPr>
-            <a:r>
-              <a:t>🃏 3D Interactive Card Draw</a:t>
-            </a:r>
-          </a:p>
-          <a:p>
-            <a:pPr>
-              <a:defRPr sz="1000">
+              <a:defRPr sz="1300" b="1">
+                <a:solidFill>
+                  <a:srgbClr val="10B981"/>
+                </a:solidFill>
+              </a:defRPr>
+            </a:pPr>
+            <a:r>
+              <a:t>MILESTONES DELIVERED (100%)</a:t>
+            </a:r>
+          </a:p>
+          <a:p>
+            <a:pPr>
+              <a:defRPr sz="1050" b="1">
+                <a:solidFill>
+                  <a:srgbClr val="F8FAFC"/>
+                </a:solidFill>
+              </a:defRPr>
+            </a:pPr>
+            <a:r>
+              <a:t>✔ Milestone 1: Foundations &amp; Architecture</a:t>
+            </a:r>
+          </a:p>
+          <a:p>
+            <a:pPr>
+              <a:defRPr sz="900">
                 <a:solidFill>
                   <a:srgbClr val="CBD5E1"/>
                 </a:solidFill>
               </a:defRPr>
             </a:pPr>
             <a:r>
-              <a:t>Physics-driven visual shuffle, fanning &amp; real-time 3D flip card picks</a:t>
-            </a:r>
-          </a:p>
-        </p:txBody>
-      </p:sp>
-      <p:sp>
-        <p:nvSpPr>
-          <p:cNvPr id="12" name="Rounded Rectangle 11"/>
+              <a:t>FastAPI backend, Next.js frontend, hybrid database models, full auth scaffolding.</a:t>
+            </a:r>
+          </a:p>
+          <a:p>
+            <a:pPr>
+              <a:defRPr sz="1050" b="1">
+                <a:solidFill>
+                  <a:srgbClr val="F8FAFC"/>
+                </a:solidFill>
+              </a:defRPr>
+            </a:pPr>
+            <a:r>
+              <a:t>✔ Milestone 2: Palmistry &amp; Tarot Engines</a:t>
+            </a:r>
+          </a:p>
+          <a:p>
+            <a:pPr>
+              <a:defRPr sz="900">
+                <a:solidFill>
+                  <a:srgbClr val="CBD5E1"/>
+                </a:solidFill>
+              </a:defRPr>
+            </a:pPr>
+            <a:r>
+              <a:t>5 palm line extraction algorithms, 78-card tarot deck, 6 spread layouts.</a:t>
+            </a:r>
+          </a:p>
+          <a:p>
+            <a:pPr>
+              <a:defRPr sz="1050" b="1">
+                <a:solidFill>
+                  <a:srgbClr val="F8FAFC"/>
+                </a:solidFill>
+              </a:defRPr>
+            </a:pPr>
+            <a:r>
+              <a:t>✔ Milestone 3: AI Synthesis &amp; RBAC</a:t>
+            </a:r>
+          </a:p>
+          <a:p>
+            <a:pPr>
+              <a:defRPr sz="900">
+                <a:solidFill>
+                  <a:srgbClr val="CBD5E1"/>
+                </a:solidFill>
+              </a:defRPr>
+            </a:pPr>
+            <a:r>
+              <a:t>5-factor confidence scoring model, 4 role-based user portals, report generation.</a:t>
+            </a:r>
+          </a:p>
+          <a:p>
+            <a:pPr>
+              <a:defRPr sz="1050" b="1">
+                <a:solidFill>
+                  <a:srgbClr val="F8FAFC"/>
+                </a:solidFill>
+              </a:defRPr>
+            </a:pPr>
+            <a:r>
+              <a:t>✔ Milestone 4: Testing, Export &amp; Polish</a:t>
+            </a:r>
+          </a:p>
+          <a:p>
+            <a:pPr>
+              <a:defRPr sz="900">
+                <a:solidFill>
+                  <a:srgbClr val="CBD5E1"/>
+                </a:solidFill>
+              </a:defRPr>
+            </a:pPr>
+            <a:r>
+              <a:t>63 passing automated tests, CSV/JSON export, performance optimization.</a:t>
+            </a:r>
+          </a:p>
+        </p:txBody>
+      </p:sp>
+      <p:sp>
+        <p:nvSpPr>
+          <p:cNvPr id="10" name="Rounded Rectangle 9"/>
           <p:cNvSpPr/>
           <p:nvPr/>
         </p:nvSpPr>
         <p:spPr>
           <a:xfrm>
-            <a:off x="731520" y="3913631"/>
-            <a:ext cx="5303520" cy="804672"/>
+            <a:off x="6248095" y="1463040"/>
+            <a:ext cx="5212080" cy="4754880"/>
           </a:xfrm>
           <a:prstGeom prst="roundRect">
             <a:avLst/>
           </a:prstGeom>
           <a:solidFill>
             <a:srgbClr val="131D31"/>
-          </a:solidFill>
-          <a:ln w="12700">
-            <a:solidFill>
-              <a:srgbClr val="283854"/>
-            </a:solidFill>
-          </a:ln>
-        </p:spPr>
-        <p:style>
-          <a:lnRef idx="1">
-            <a:schemeClr val="accent1"/>
-          </a:lnRef>
-          <a:fillRef idx="3">
-            <a:schemeClr val="accent1"/>
-          </a:fillRef>
-          <a:effectRef idx="2">
-            <a:schemeClr val="accent1"/>
-          </a:effectRef>
-          <a:fontRef idx="minor">
-            <a:schemeClr val="lt1"/>
-          </a:fontRef>
-        </p:style>
-        <p:txBody>
-          <a:bodyPr rtlCol="0" anchor="ctr"/>
-          <a:lstStyle/>
-          <a:p>
-            <a:pPr algn="ctr"/>
-          </a:p>
-        </p:txBody>
-      </p:sp>
-      <p:sp>
-        <p:nvSpPr>
-          <p:cNvPr id="13" name="TextBox 12"/>
-          <p:cNvSpPr txBox="1"/>
-          <p:nvPr/>
-        </p:nvSpPr>
-        <p:spPr>
-          <a:xfrm>
-            <a:off x="896112" y="3986783"/>
-            <a:ext cx="4983480" cy="658368"/>
-          </a:xfrm>
-          <a:prstGeom prst="rect">
-            <a:avLst/>
-          </a:prstGeom>
-          <a:noFill/>
-        </p:spPr>
-        <p:txBody>
-          <a:bodyPr wrap="square" lIns="0" tIns="0">
-            <a:spAutoFit/>
-          </a:bodyPr>
-          <a:lstStyle/>
-          <a:p>
-            <a:pPr>
-              <a:defRPr sz="1150" b="1">
-                <a:solidFill>
-                  <a:srgbClr val="A855F7"/>
-                </a:solidFill>
-              </a:defRPr>
-            </a:pPr>
-            <a:r>
-              <a:t>🤖 Gemini Conversational AI</a:t>
-            </a:r>
-          </a:p>
-          <a:p>
-            <a:pPr>
-              <a:defRPr sz="1000">
-                <a:solidFill>
-                  <a:srgbClr val="CBD5E1"/>
-                </a:solidFill>
-              </a:defRPr>
-            </a:pPr>
-            <a:r>
-              <a:t>Context-aware spiritual chatbot with domain-tuned guidance prompts</a:t>
-            </a:r>
-          </a:p>
-        </p:txBody>
-      </p:sp>
-      <p:sp>
-        <p:nvSpPr>
-          <p:cNvPr id="14" name="Rounded Rectangle 13"/>
-          <p:cNvSpPr/>
-          <p:nvPr/>
-        </p:nvSpPr>
-        <p:spPr>
-          <a:xfrm>
-            <a:off x="731520" y="4809744"/>
-            <a:ext cx="5303520" cy="804672"/>
-          </a:xfrm>
-          <a:prstGeom prst="roundRect">
-            <a:avLst/>
-          </a:prstGeom>
-          <a:solidFill>
-            <a:srgbClr val="131D31"/>
-          </a:solidFill>
-          <a:ln w="12700">
-            <a:solidFill>
-              <a:srgbClr val="283854"/>
-            </a:solidFill>
-          </a:ln>
-        </p:spPr>
-        <p:style>
-          <a:lnRef idx="1">
-            <a:schemeClr val="accent1"/>
-          </a:lnRef>
-          <a:fillRef idx="3">
-            <a:schemeClr val="accent1"/>
-          </a:fillRef>
-          <a:effectRef idx="2">
-            <a:schemeClr val="accent1"/>
-          </a:effectRef>
-          <a:fontRef idx="minor">
-            <a:schemeClr val="lt1"/>
-          </a:fontRef>
-        </p:style>
-        <p:txBody>
-          <a:bodyPr rtlCol="0" anchor="ctr"/>
-          <a:lstStyle/>
-          <a:p>
-            <a:pPr algn="ctr"/>
-          </a:p>
-        </p:txBody>
-      </p:sp>
-      <p:sp>
-        <p:nvSpPr>
-          <p:cNvPr id="15" name="TextBox 14"/>
-          <p:cNvSpPr txBox="1"/>
-          <p:nvPr/>
-        </p:nvSpPr>
-        <p:spPr>
-          <a:xfrm>
-            <a:off x="896112" y="4882896"/>
-            <a:ext cx="4983480" cy="658368"/>
-          </a:xfrm>
-          <a:prstGeom prst="rect">
-            <a:avLst/>
-          </a:prstGeom>
-          <a:noFill/>
-        </p:spPr>
-        <p:txBody>
-          <a:bodyPr wrap="square" lIns="0" tIns="0">
-            <a:spAutoFit/>
-          </a:bodyPr>
-          <a:lstStyle/>
-          <a:p>
-            <a:pPr>
-              <a:defRPr sz="1150" b="1">
-                <a:solidFill>
-                  <a:srgbClr val="10B981"/>
-                </a:solidFill>
-              </a:defRPr>
-            </a:pPr>
-            <a:r>
-              <a:t>✋ CV Palm Line Intelligence</a:t>
-            </a:r>
-          </a:p>
-          <a:p>
-            <a:pPr>
-              <a:defRPr sz="1000">
-                <a:solidFill>
-                  <a:srgbClr val="CBD5E1"/>
-                </a:solidFill>
-              </a:defRPr>
-            </a:pPr>
-            <a:r>
-              <a:t>Automated line detection, feature extraction &amp; Big Five personality mapping</a:t>
-            </a:r>
-          </a:p>
-        </p:txBody>
-      </p:sp>
-      <p:sp>
-        <p:nvSpPr>
-          <p:cNvPr id="16" name="Rounded Rectangle 15"/>
-          <p:cNvSpPr/>
-          <p:nvPr/>
-        </p:nvSpPr>
-        <p:spPr>
-          <a:xfrm>
-            <a:off x="731520" y="5705856"/>
-            <a:ext cx="5303520" cy="804672"/>
-          </a:xfrm>
-          <a:prstGeom prst="roundRect">
-            <a:avLst/>
-          </a:prstGeom>
-          <a:solidFill>
-            <a:srgbClr val="131D31"/>
-          </a:solidFill>
-          <a:ln w="12700">
-            <a:solidFill>
-              <a:srgbClr val="283854"/>
-            </a:solidFill>
-          </a:ln>
-        </p:spPr>
-        <p:style>
-          <a:lnRef idx="1">
-            <a:schemeClr val="accent1"/>
-          </a:lnRef>
-          <a:fillRef idx="3">
-            <a:schemeClr val="accent1"/>
-          </a:fillRef>
-          <a:effectRef idx="2">
-            <a:schemeClr val="accent1"/>
-          </a:effectRef>
-          <a:fontRef idx="minor">
-            <a:schemeClr val="lt1"/>
-          </a:fontRef>
-        </p:style>
-        <p:txBody>
-          <a:bodyPr rtlCol="0" anchor="ctr"/>
-          <a:lstStyle/>
-          <a:p>
-            <a:pPr algn="ctr"/>
-          </a:p>
-        </p:txBody>
-      </p:sp>
-      <p:sp>
-        <p:nvSpPr>
-          <p:cNvPr id="17" name="TextBox 16"/>
-          <p:cNvSpPr txBox="1"/>
-          <p:nvPr/>
-        </p:nvSpPr>
-        <p:spPr>
-          <a:xfrm>
-            <a:off x="896112" y="5779008"/>
-            <a:ext cx="4983480" cy="658368"/>
-          </a:xfrm>
-          <a:prstGeom prst="rect">
-            <a:avLst/>
-          </a:prstGeom>
-          <a:noFill/>
-        </p:spPr>
-        <p:txBody>
-          <a:bodyPr wrap="square" lIns="0" tIns="0">
-            <a:spAutoFit/>
-          </a:bodyPr>
-          <a:lstStyle/>
-          <a:p>
-            <a:pPr>
-              <a:defRPr sz="1150" b="1">
-                <a:solidFill>
-                  <a:srgbClr val="F43F5E"/>
-                </a:solidFill>
-              </a:defRPr>
-            </a:pPr>
-            <a:r>
-              <a:t>🛡️ Enterprise Polyglot Core</a:t>
-            </a:r>
-          </a:p>
-          <a:p>
-            <a:pPr>
-              <a:defRPr sz="1000">
-                <a:solidFill>
-                  <a:srgbClr val="CBD5E1"/>
-                </a:solidFill>
-              </a:defRPr>
-            </a:pPr>
-            <a:r>
-              <a:t>FastAPI async engine + Next.js 14 + PostgreSQL, MongoDB &amp; Redis</a:t>
-            </a:r>
-          </a:p>
-        </p:txBody>
-      </p:sp>
-      <p:sp>
-        <p:nvSpPr>
-          <p:cNvPr id="18" name="Rounded Rectangle 17"/>
-          <p:cNvSpPr/>
-          <p:nvPr/>
-        </p:nvSpPr>
-        <p:spPr>
-          <a:xfrm>
-            <a:off x="6236208" y="1298448"/>
-            <a:ext cx="5266944" cy="4434840"/>
-          </a:xfrm>
-          <a:prstGeom prst="roundRect">
-            <a:avLst/>
-          </a:prstGeom>
-          <a:solidFill>
-            <a:srgbClr val="131D31"/>
-          </a:solidFill>
-          <a:ln w="19050">
-            <a:solidFill>
-              <a:srgbClr val="283854"/>
-            </a:solidFill>
-          </a:ln>
-        </p:spPr>
-        <p:style>
-          <a:lnRef idx="1">
-            <a:schemeClr val="accent1"/>
-          </a:lnRef>
-          <a:fillRef idx="3">
-            <a:schemeClr val="accent1"/>
-          </a:fillRef>
-          <a:effectRef idx="2">
-            <a:schemeClr val="accent1"/>
-          </a:effectRef>
-          <a:fontRef idx="minor">
-            <a:schemeClr val="lt1"/>
-          </a:fontRef>
-        </p:style>
-        <p:txBody>
-          <a:bodyPr rtlCol="0" anchor="ctr"/>
-          <a:lstStyle/>
-          <a:p>
-            <a:pPr algn="ctr"/>
-          </a:p>
-        </p:txBody>
-      </p:sp>
-      <p:sp>
-        <p:nvSpPr>
-          <p:cNvPr id="19" name="TextBox 18"/>
-          <p:cNvSpPr txBox="1"/>
-          <p:nvPr/>
-        </p:nvSpPr>
-        <p:spPr>
-          <a:xfrm>
-            <a:off x="6309360" y="1353312"/>
-            <a:ext cx="3584447" cy="274320"/>
-          </a:xfrm>
-          <a:prstGeom prst="rect">
-            <a:avLst/>
-          </a:prstGeom>
-          <a:noFill/>
-        </p:spPr>
-        <p:txBody>
-          <a:bodyPr wrap="none" lIns="0" tIns="0">
-            <a:spAutoFit/>
-          </a:bodyPr>
-          <a:lstStyle/>
-          <a:p>
-            <a:pPr>
-              <a:defRPr sz="950" b="1">
-                <a:solidFill>
-                  <a:srgbClr val="38BDF8"/>
-                </a:solidFill>
-              </a:defRPr>
-            </a:pPr>
-            <a:r>
-              <a:t>🖥️  LIVE PLATFORM HERO &amp; INTERACTION PORTAL</a:t>
-            </a:r>
-          </a:p>
-        </p:txBody>
-      </p:sp>
-      <p:sp>
-        <p:nvSpPr>
-          <p:cNvPr id="20" name="TextBox 19"/>
-          <p:cNvSpPr txBox="1"/>
-          <p:nvPr/>
-        </p:nvSpPr>
-        <p:spPr>
-          <a:xfrm>
-            <a:off x="9966960" y="1353312"/>
-            <a:ext cx="1463040" cy="274320"/>
-          </a:xfrm>
-          <a:prstGeom prst="rect">
-            <a:avLst/>
-          </a:prstGeom>
-          <a:noFill/>
-        </p:spPr>
-        <p:txBody>
-          <a:bodyPr wrap="none" rIns="0" tIns="0">
-            <a:spAutoFit/>
-          </a:bodyPr>
-          <a:lstStyle/>
-          <a:p>
-            <a:pPr algn="r">
-              <a:defRPr sz="900" b="1">
-                <a:solidFill>
-                  <a:srgbClr val="10B981"/>
-                </a:solidFill>
-              </a:defRPr>
-            </a:pPr>
-            <a:r>
-              <a:t>● PRODUCTION READY</a:t>
-            </a:r>
-          </a:p>
-        </p:txBody>
-      </p:sp>
-      <p:pic>
-        <p:nvPicPr>
-          <p:cNvPr id="21" name="Picture 20" descr="website_hero_landing.jpg"/>
-          <p:cNvPicPr>
-            <a:picLocks noChangeAspect="1"/>
-          </p:cNvPicPr>
-          <p:nvPr/>
-        </p:nvPicPr>
-        <p:blipFill>
-          <a:blip r:embed="rId2"/>
-          <a:stretch>
-            <a:fillRect/>
-          </a:stretch>
-        </p:blipFill>
-        <p:spPr>
-          <a:xfrm>
-            <a:off x="6309360" y="1645920"/>
-            <a:ext cx="5120640" cy="3886200"/>
-          </a:xfrm>
-          <a:prstGeom prst="rect">
-            <a:avLst/>
-          </a:prstGeom>
-        </p:spPr>
-      </p:pic>
-      <p:sp>
-        <p:nvSpPr>
-          <p:cNvPr id="22" name="Rounded Rectangle 21"/>
-          <p:cNvSpPr/>
-          <p:nvPr/>
-        </p:nvSpPr>
-        <p:spPr>
-          <a:xfrm>
-            <a:off x="6309360" y="5687568"/>
-            <a:ext cx="2450592" cy="868680"/>
-          </a:xfrm>
-          <a:prstGeom prst="roundRect">
-            <a:avLst/>
-          </a:prstGeom>
-          <a:solidFill>
-            <a:srgbClr val="1C2944"/>
           </a:solidFill>
           <a:ln w="12700">
             <a:solidFill>
@@ -3974,14 +4231,14 @@
       </p:sp>
       <p:sp>
         <p:nvSpPr>
-          <p:cNvPr id="23" name="TextBox 22"/>
+          <p:cNvPr id="11" name="TextBox 10"/>
           <p:cNvSpPr txBox="1"/>
           <p:nvPr/>
         </p:nvSpPr>
         <p:spPr>
           <a:xfrm>
-            <a:off x="6400800" y="5742432"/>
-            <a:ext cx="2267712" cy="731520"/>
+            <a:off x="6522415" y="1691640"/>
+            <a:ext cx="4663440" cy="4297680"/>
           </a:xfrm>
           <a:prstGeom prst="rect">
             <a:avLst/>
@@ -3989,7 +4246,7 @@
           <a:noFill/>
         </p:spPr>
         <p:txBody>
-          <a:bodyPr wrap="square">
+          <a:bodyPr wrap="square" lIns="0" tIns="0">
             <a:spAutoFit/>
           </a:bodyPr>
           <a:lstStyle/>
@@ -4002,111 +4259,127 @@
               </a:defRPr>
             </a:pPr>
             <a:r>
-              <a:t>78 Cards · 6 Spreads</a:t>
-            </a:r>
-          </a:p>
-          <a:p>
-            <a:pPr>
-              <a:defRPr sz="950">
+              <a:t>FUTURE ROADMAP &amp; LIVE DEMO</a:t>
+            </a:r>
+          </a:p>
+          <a:p>
+            <a:pPr>
+              <a:defRPr sz="1050" b="1">
+                <a:solidFill>
+                  <a:srgbClr val="F59E0B"/>
+                </a:solidFill>
+              </a:defRPr>
+            </a:pPr>
+            <a:r>
+              <a:t>🚀 On-Device Edge MediaPipe</a:t>
+            </a:r>
+          </a:p>
+          <a:p>
+            <a:pPr>
+              <a:defRPr sz="900">
                 <a:solidFill>
                   <a:srgbClr val="CBD5E1"/>
                 </a:solidFill>
               </a:defRPr>
             </a:pPr>
             <a:r>
-              <a:t>Full Major &amp; Minor Arcana graph</a:t>
-            </a:r>
-          </a:p>
-        </p:txBody>
-      </p:sp>
-      <p:sp>
-        <p:nvSpPr>
-          <p:cNvPr id="24" name="Rounded Rectangle 23"/>
-          <p:cNvSpPr/>
-          <p:nvPr/>
-        </p:nvSpPr>
-        <p:spPr>
-          <a:xfrm>
-            <a:off x="8979408" y="5687568"/>
-            <a:ext cx="2450592" cy="868680"/>
-          </a:xfrm>
-          <a:prstGeom prst="roundRect">
-            <a:avLst/>
-          </a:prstGeom>
-          <a:solidFill>
-            <a:srgbClr val="1C2944"/>
-          </a:solidFill>
-          <a:ln w="12700">
-            <a:solidFill>
-              <a:srgbClr val="A855F7"/>
-            </a:solidFill>
-          </a:ln>
-        </p:spPr>
-        <p:style>
-          <a:lnRef idx="1">
-            <a:schemeClr val="accent1"/>
-          </a:lnRef>
-          <a:fillRef idx="3">
-            <a:schemeClr val="accent1"/>
-          </a:fillRef>
-          <a:effectRef idx="2">
-            <a:schemeClr val="accent1"/>
-          </a:effectRef>
-          <a:fontRef idx="minor">
-            <a:schemeClr val="lt1"/>
-          </a:fontRef>
-        </p:style>
-        <p:txBody>
-          <a:bodyPr rtlCol="0" anchor="ctr"/>
-          <a:lstStyle/>
-          <a:p>
-            <a:pPr algn="ctr"/>
-          </a:p>
-        </p:txBody>
-      </p:sp>
-      <p:sp>
-        <p:nvSpPr>
-          <p:cNvPr id="25" name="TextBox 24"/>
-          <p:cNvSpPr txBox="1"/>
-          <p:nvPr/>
-        </p:nvSpPr>
-        <p:spPr>
-          <a:xfrm>
-            <a:off x="9070848" y="5742432"/>
-            <a:ext cx="2267712" cy="731520"/>
-          </a:xfrm>
-          <a:prstGeom prst="rect">
-            <a:avLst/>
-          </a:prstGeom>
-          <a:noFill/>
-        </p:spPr>
-        <p:txBody>
-          <a:bodyPr wrap="square">
-            <a:spAutoFit/>
-          </a:bodyPr>
-          <a:lstStyle/>
-          <a:p>
-            <a:pPr>
-              <a:defRPr sz="1300" b="1">
-                <a:solidFill>
-                  <a:srgbClr val="A855F7"/>
-                </a:solidFill>
-              </a:defRPr>
-            </a:pPr>
-            <a:r>
-              <a:t>4-Tier RBAC &amp; JWT</a:t>
-            </a:r>
-          </a:p>
-          <a:p>
-            <a:pPr>
-              <a:defRPr sz="950">
+              <a:t>Client-side WebAssembly computer vision for offline palm landmark inference.</a:t>
+            </a:r>
+          </a:p>
+          <a:p>
+            <a:pPr>
+              <a:defRPr sz="1050" b="1">
+                <a:solidFill>
+                  <a:srgbClr val="F59E0B"/>
+                </a:solidFill>
+              </a:defRPr>
+            </a:pPr>
+            <a:r>
+              <a:t>🚀 Cross-Platform Mobile App</a:t>
+            </a:r>
+          </a:p>
+          <a:p>
+            <a:pPr>
+              <a:defRPr sz="900">
                 <a:solidFill>
                   <a:srgbClr val="CBD5E1"/>
                 </a:solidFill>
               </a:defRPr>
             </a:pPr>
             <a:r>
-              <a:t>Enterprise security &amp; audit logging</a:t>
+              <a:t>React Native iOS &amp; Android apps with haptic feedback tarot shuffling.</a:t>
+            </a:r>
+          </a:p>
+          <a:p>
+            <a:pPr>
+              <a:defRPr sz="1050" b="1">
+                <a:solidFill>
+                  <a:srgbClr val="F59E0B"/>
+                </a:solidFill>
+              </a:defRPr>
+            </a:pPr>
+            <a:r>
+              <a:t>🚀 Multilingual Neural Voice</a:t>
+            </a:r>
+          </a:p>
+          <a:p>
+            <a:pPr>
+              <a:defRPr sz="900">
+                <a:solidFill>
+                  <a:srgbClr val="CBD5E1"/>
+                </a:solidFill>
+              </a:defRPr>
+            </a:pPr>
+            <a:r>
+              <a:t>Real-time AI voice-guided consultations in 10+ global languages.</a:t>
+            </a:r>
+          </a:p>
+          <a:p>
+            <a:pPr>
+              <a:defRPr sz="1050" b="1">
+                <a:solidFill>
+                  <a:srgbClr val="F59E0B"/>
+                </a:solidFill>
+              </a:defRPr>
+            </a:pPr>
+            <a:r>
+              <a:t>🚀 WebXR 3D Sanctum</a:t>
+            </a:r>
+          </a:p>
+          <a:p>
+            <a:pPr>
+              <a:defRPr sz="900">
+                <a:solidFill>
+                  <a:srgbClr val="CBD5E1"/>
+                </a:solidFill>
+              </a:defRPr>
+            </a:pPr>
+            <a:r>
+              <a:t>Immersive virtual reality spiritual consultation environment.</a:t>
+            </a:r>
+          </a:p>
+          <a:p>
+            <a:pPr>
+              <a:defRPr sz="800">
+                <a:solidFill>
+                  <a:srgbClr val="283854"/>
+                </a:solidFill>
+              </a:defRPr>
+            </a:pPr>
+            <a:r>
+              <a:t>──────────────────────────────</a:t>
+            </a:r>
+          </a:p>
+          <a:p>
+            <a:pPr>
+              <a:defRPr sz="1400" b="1">
+                <a:solidFill>
+                  <a:srgbClr val="F8FAFC"/>
+                </a:solidFill>
+              </a:defRPr>
+            </a:pPr>
+            <a:r>
+              <a:t>Thank you! Ready for Live Demo &amp; Q&amp;A.</a:t>
             </a:r>
           </a:p>
         </p:txBody>
@@ -4240,12 +4513,12 @@
             <a:pPr>
               <a:defRPr sz="1050" b="1">
                 <a:solidFill>
-                  <a:srgbClr val="A855F7"/>
-                </a:solidFill>
-              </a:defRPr>
-            </a:pPr>
-            <a:r>
-              <a:t>SYSTEM DESIGN &amp; DATA FLOW</a:t>
+                  <a:srgbClr val="38BDF8"/>
+                </a:solidFill>
+              </a:defRPr>
+            </a:pPr>
+            <a:r>
+              <a:t>01. CONTEXT &amp; MOTIVATION</a:t>
             </a:r>
           </a:p>
         </p:txBody>
@@ -4273,14 +4546,14 @@
           <a:lstStyle/>
           <a:p>
             <a:pPr>
-              <a:defRPr sz="2100" b="1">
+              <a:defRPr sz="2200" b="1">
                 <a:solidFill>
                   <a:srgbClr val="F8FAFC"/>
                 </a:solidFill>
               </a:defRPr>
             </a:pPr>
             <a:r>
-              <a:t>System Architecture: Dual-Database Polyglot Engine</a:t>
+              <a:t>Problem Statement &amp; Strategic Value</a:t>
             </a:r>
           </a:p>
         </p:txBody>
@@ -4293,8 +4566,8 @@
         </p:nvSpPr>
         <p:spPr>
           <a:xfrm>
-            <a:off x="10332720" y="411480"/>
-            <a:ext cx="1097280" cy="365760"/>
+            <a:off x="10241280" y="365760"/>
+            <a:ext cx="1188720" cy="320040"/>
           </a:xfrm>
           <a:prstGeom prst="rect">
             <a:avLst/>
@@ -4302,20 +4575,20 @@
           <a:noFill/>
         </p:spPr>
         <p:txBody>
-          <a:bodyPr wrap="none">
+          <a:bodyPr wrap="none" rIns="0">
             <a:spAutoFit/>
           </a:bodyPr>
           <a:lstStyle/>
           <a:p>
             <a:pPr algn="r">
-              <a:defRPr sz="1300" b="1">
+              <a:defRPr sz="1100" b="1">
                 <a:solidFill>
                   <a:srgbClr val="94A3B8"/>
                 </a:solidFill>
               </a:defRPr>
             </a:pPr>
             <a:r>
-              <a:t>02 / 07</a:t>
+              <a:t>02 / 10</a:t>
             </a:r>
           </a:p>
         </p:txBody>
@@ -4328,8 +4601,8 @@
         </p:nvSpPr>
         <p:spPr>
           <a:xfrm>
-            <a:off x="731520" y="1188720"/>
-            <a:ext cx="10728655" cy="18288"/>
+            <a:off x="731520" y="1234440"/>
+            <a:ext cx="10728655" cy="13716"/>
           </a:xfrm>
           <a:prstGeom prst="rect">
             <a:avLst/>
@@ -4371,8 +4644,8 @@
         </p:nvSpPr>
         <p:spPr>
           <a:xfrm>
-            <a:off x="731520" y="1371600"/>
-            <a:ext cx="5303520" cy="1554480"/>
+            <a:off x="731520" y="1463040"/>
+            <a:ext cx="5212080" cy="4754880"/>
           </a:xfrm>
           <a:prstGeom prst="roundRect">
             <a:avLst/>
@@ -4382,7 +4655,7 @@
           </a:solidFill>
           <a:ln w="12700">
             <a:solidFill>
-              <a:srgbClr val="283854"/>
+              <a:srgbClr val="F43F5E"/>
             </a:solidFill>
           </a:ln>
         </p:spPr>
@@ -4416,8 +4689,8 @@
         </p:nvSpPr>
         <p:spPr>
           <a:xfrm>
-            <a:off x="896112" y="1463040"/>
-            <a:ext cx="4983480" cy="1371600"/>
+            <a:off x="1005840" y="1691640"/>
+            <a:ext cx="4663440" cy="4297680"/>
           </a:xfrm>
           <a:prstGeom prst="rect">
             <a:avLst/>
@@ -4431,50 +4704,110 @@
           <a:lstStyle/>
           <a:p>
             <a:pPr>
-              <a:defRPr sz="1200" b="1">
-                <a:solidFill>
-                  <a:srgbClr val="38BDF8"/>
-                </a:solidFill>
-              </a:defRPr>
-            </a:pPr>
-            <a:r>
-              <a:t>⚡ Frontend Client Layer (Next.js 14)</a:t>
-            </a:r>
-          </a:p>
-          <a:p>
-            <a:pPr>
-              <a:defRPr sz="950">
+              <a:defRPr sz="1400" b="1">
+                <a:solidFill>
+                  <a:srgbClr val="F43F5E"/>
+                </a:solidFill>
+              </a:defRPr>
+            </a:pPr>
+            <a:r>
+              <a:t>CURRENT INDUSTRY CHALLENGES</a:t>
+            </a:r>
+          </a:p>
+          <a:p>
+            <a:pPr>
+              <a:defRPr sz="1150" b="1">
+                <a:solidFill>
+                  <a:srgbClr val="F8FAFC"/>
+                </a:solidFill>
+              </a:defRPr>
+            </a:pPr>
+            <a:r>
+              <a:t>❌ Static &amp; Random Blurbs</a:t>
+            </a:r>
+          </a:p>
+          <a:p>
+            <a:pPr>
+              <a:defRPr sz="1000">
                 <a:solidFill>
                   <a:srgbClr val="CBD5E1"/>
                 </a:solidFill>
               </a:defRPr>
             </a:pPr>
             <a:r>
-              <a:t>▪  React 18 + Next.js App Router for dynamic routing &amp; SEO</a:t>
-            </a:r>
-          </a:p>
-          <a:p>
-            <a:pPr>
-              <a:defRPr sz="950">
+              <a:t>Online horoscope &amp; spiritual tools rely on static string concatenations with no algorithmic depth.</a:t>
+            </a:r>
+          </a:p>
+          <a:p>
+            <a:pPr>
+              <a:defRPr sz="1150" b="1">
+                <a:solidFill>
+                  <a:srgbClr val="F8FAFC"/>
+                </a:solidFill>
+              </a:defRPr>
+            </a:pPr>
+            <a:r>
+              <a:t>❌ Zero Biometric Integration</a:t>
+            </a:r>
+          </a:p>
+          <a:p>
+            <a:pPr>
+              <a:defRPr sz="1000">
                 <a:solidFill>
                   <a:srgbClr val="CBD5E1"/>
                 </a:solidFill>
               </a:defRPr>
             </a:pPr>
             <a:r>
-              <a:t>▪  TailwindCSS + Framer Motion for 3D card flips &amp; glassmorphism</a:t>
-            </a:r>
-          </a:p>
-          <a:p>
-            <a:pPr>
-              <a:defRPr sz="950">
+              <a:t>Palmistry apps fail to extract verifiable morphological metrics (curvature, length, mounts).</a:t>
+            </a:r>
+          </a:p>
+          <a:p>
+            <a:pPr>
+              <a:defRPr sz="1150" b="1">
+                <a:solidFill>
+                  <a:srgbClr val="F8FAFC"/>
+                </a:solidFill>
+              </a:defRPr>
+            </a:pPr>
+            <a:r>
+              <a:t>❌ Isolated Modalities</a:t>
+            </a:r>
+          </a:p>
+          <a:p>
+            <a:pPr>
+              <a:defRPr sz="1000">
                 <a:solidFill>
                   <a:srgbClr val="CBD5E1"/>
                 </a:solidFill>
               </a:defRPr>
             </a:pPr>
             <a:r>
-              <a:t>▪  Real-time state hydration with JWT bearer interceptors</a:t>
+              <a:t>Palm, Tarot, and Astrology exist in silos, with zero correlation or cross-validation.</a:t>
+            </a:r>
+          </a:p>
+          <a:p>
+            <a:pPr>
+              <a:defRPr sz="1150" b="1">
+                <a:solidFill>
+                  <a:srgbClr val="F8FAFC"/>
+                </a:solidFill>
+              </a:defRPr>
+            </a:pPr>
+            <a:r>
+              <a:t>❌ No Objective Confidence</a:t>
+            </a:r>
+          </a:p>
+          <a:p>
+            <a:pPr>
+              <a:defRPr sz="1000">
+                <a:solidFill>
+                  <a:srgbClr val="CBD5E1"/>
+                </a:solidFill>
+              </a:defRPr>
+            </a:pPr>
+            <a:r>
+              <a:t>Users are given arbitrary claims with no transparency, quality checks, or confidence scoring.</a:t>
             </a:r>
           </a:p>
         </p:txBody>
@@ -4487,8 +4820,8 @@
         </p:nvSpPr>
         <p:spPr>
           <a:xfrm>
-            <a:off x="731520" y="3063240"/>
-            <a:ext cx="5303520" cy="1554480"/>
+            <a:off x="6248095" y="1463040"/>
+            <a:ext cx="5212080" cy="4754880"/>
           </a:xfrm>
           <a:prstGeom prst="roundRect">
             <a:avLst/>
@@ -4498,7 +4831,7 @@
           </a:solidFill>
           <a:ln w="12700">
             <a:solidFill>
-              <a:srgbClr val="283854"/>
+              <a:srgbClr val="10B981"/>
             </a:solidFill>
           </a:ln>
         </p:spPr>
@@ -4532,8 +4865,8 @@
         </p:nvSpPr>
         <p:spPr>
           <a:xfrm>
-            <a:off x="896112" y="3154680"/>
-            <a:ext cx="4983480" cy="1371600"/>
+            <a:off x="6522415" y="1691640"/>
+            <a:ext cx="4663440" cy="4297680"/>
           </a:xfrm>
           <a:prstGeom prst="rect">
             <a:avLst/>
@@ -4547,409 +4880,110 @@
           <a:lstStyle/>
           <a:p>
             <a:pPr>
-              <a:defRPr sz="1200" b="1">
-                <a:solidFill>
-                  <a:srgbClr val="A855F7"/>
-                </a:solidFill>
-              </a:defRPr>
-            </a:pPr>
-            <a:r>
-              <a:t>🚀 Async Application Layer (FastAPI)</a:t>
-            </a:r>
-          </a:p>
-          <a:p>
-            <a:pPr>
-              <a:defRPr sz="950">
+              <a:defRPr sz="1400" b="1">
+                <a:solidFill>
+                  <a:srgbClr val="10B981"/>
+                </a:solidFill>
+              </a:defRPr>
+            </a:pPr>
+            <a:r>
+              <a:t>THE MYSTICAI SOLUTION</a:t>
+            </a:r>
+          </a:p>
+          <a:p>
+            <a:pPr>
+              <a:defRPr sz="1150" b="1">
+                <a:solidFill>
+                  <a:srgbClr val="F8FAFC"/>
+                </a:solidFill>
+              </a:defRPr>
+            </a:pPr>
+            <a:r>
+              <a:t>✔ Multimodal Intelligence Engine</a:t>
+            </a:r>
+          </a:p>
+          <a:p>
+            <a:pPr>
+              <a:defRPr sz="1000">
                 <a:solidFill>
                   <a:srgbClr val="CBD5E1"/>
                 </a:solidFill>
               </a:defRPr>
             </a:pPr>
             <a:r>
-              <a:t>▪  High-throughput Python 3.11 asynchronous REST microservices</a:t>
-            </a:r>
-          </a:p>
-          <a:p>
-            <a:pPr>
-              <a:defRPr sz="950">
+              <a:t>Fuses Computer Vision palm morphology with 78-card symbolic tarot dynamics.</a:t>
+            </a:r>
+          </a:p>
+          <a:p>
+            <a:pPr>
+              <a:defRPr sz="1150" b="1">
+                <a:solidFill>
+                  <a:srgbClr val="F8FAFC"/>
+                </a:solidFill>
+              </a:defRPr>
+            </a:pPr>
+            <a:r>
+              <a:t>✔ Deterministic Biometric Tracing</a:t>
+            </a:r>
+          </a:p>
+          <a:p>
+            <a:pPr>
+              <a:defRPr sz="1000">
                 <a:solidFill>
                   <a:srgbClr val="CBD5E1"/>
                 </a:solidFill>
               </a:defRPr>
             </a:pPr>
             <a:r>
-              <a:t>▪  Strict Pydantic v2 contract validation for all payloads</a:t>
-            </a:r>
-          </a:p>
-          <a:p>
-            <a:pPr>
-              <a:defRPr sz="950">
+              <a:t>Measures 5 principal palm lines and 4 elemental hand shapes accurately.</a:t>
+            </a:r>
+          </a:p>
+          <a:p>
+            <a:pPr>
+              <a:defRPr sz="1150" b="1">
+                <a:solidFill>
+                  <a:srgbClr val="F8FAFC"/>
+                </a:solidFill>
+              </a:defRPr>
+            </a:pPr>
+            <a:r>
+              <a:t>✔ Big Five (OCEAN) Psychology</a:t>
+            </a:r>
+          </a:p>
+          <a:p>
+            <a:pPr>
+              <a:defRPr sz="1000">
                 <a:solidFill>
                   <a:srgbClr val="CBD5E1"/>
                 </a:solidFill>
               </a:defRPr>
             </a:pPr>
             <a:r>
-              <a:t>▪  Modular routers: Auth, Readings, AI Chat, Datasets, Analytics</a:t>
-            </a:r>
-          </a:p>
-        </p:txBody>
-      </p:sp>
-      <p:sp>
-        <p:nvSpPr>
-          <p:cNvPr id="12" name="Rounded Rectangle 11"/>
-          <p:cNvSpPr/>
-          <p:nvPr/>
-        </p:nvSpPr>
-        <p:spPr>
-          <a:xfrm>
-            <a:off x="731520" y="4754880"/>
-            <a:ext cx="5303520" cy="1554480"/>
-          </a:xfrm>
-          <a:prstGeom prst="roundRect">
-            <a:avLst/>
-          </a:prstGeom>
-          <a:solidFill>
-            <a:srgbClr val="131D31"/>
-          </a:solidFill>
-          <a:ln w="12700">
-            <a:solidFill>
-              <a:srgbClr val="283854"/>
-            </a:solidFill>
-          </a:ln>
-        </p:spPr>
-        <p:style>
-          <a:lnRef idx="1">
-            <a:schemeClr val="accent1"/>
-          </a:lnRef>
-          <a:fillRef idx="3">
-            <a:schemeClr val="accent1"/>
-          </a:fillRef>
-          <a:effectRef idx="2">
-            <a:schemeClr val="accent1"/>
-          </a:effectRef>
-          <a:fontRef idx="minor">
-            <a:schemeClr val="lt1"/>
-          </a:fontRef>
-        </p:style>
-        <p:txBody>
-          <a:bodyPr rtlCol="0" anchor="ctr"/>
-          <a:lstStyle/>
-          <a:p>
-            <a:pPr algn="ctr"/>
-          </a:p>
-        </p:txBody>
-      </p:sp>
-      <p:sp>
-        <p:nvSpPr>
-          <p:cNvPr id="13" name="TextBox 12"/>
-          <p:cNvSpPr txBox="1"/>
-          <p:nvPr/>
-        </p:nvSpPr>
-        <p:spPr>
-          <a:xfrm>
-            <a:off x="896112" y="4846320"/>
-            <a:ext cx="4983480" cy="1371600"/>
-          </a:xfrm>
-          <a:prstGeom prst="rect">
-            <a:avLst/>
-          </a:prstGeom>
-          <a:noFill/>
-        </p:spPr>
-        <p:txBody>
-          <a:bodyPr wrap="square" lIns="0" tIns="0">
-            <a:spAutoFit/>
-          </a:bodyPr>
-          <a:lstStyle/>
-          <a:p>
-            <a:pPr>
-              <a:defRPr sz="1200" b="1">
-                <a:solidFill>
-                  <a:srgbClr val="10B981"/>
-                </a:solidFill>
-              </a:defRPr>
-            </a:pPr>
-            <a:r>
-              <a:t>🗄️ Polyglot Dual-Database Layer</a:t>
-            </a:r>
-          </a:p>
-          <a:p>
-            <a:pPr>
-              <a:defRPr sz="950">
+              <a:t>Maps spiritual symbols into validated psychological trait dimensions and life domains.</a:t>
+            </a:r>
+          </a:p>
+          <a:p>
+            <a:pPr>
+              <a:defRPr sz="1150" b="1">
+                <a:solidFill>
+                  <a:srgbClr val="F8FAFC"/>
+                </a:solidFill>
+              </a:defRPr>
+            </a:pPr>
+            <a:r>
+              <a:t>✔ 5-Factor Weighted Confidence</a:t>
+            </a:r>
+          </a:p>
+          <a:p>
+            <a:pPr>
+              <a:defRPr sz="1000">
                 <a:solidFill>
                   <a:srgbClr val="CBD5E1"/>
                 </a:solidFill>
               </a:defRPr>
             </a:pPr>
             <a:r>
-              <a:t>▪  PostgreSQL (SQLAlchemy): ACID user auth, roles &amp; transactions</a:t>
-            </a:r>
-          </a:p>
-          <a:p>
-            <a:pPr>
-              <a:defRPr sz="950">
-                <a:solidFill>
-                  <a:srgbClr val="CBD5E1"/>
-                </a:solidFill>
-              </a:defRPr>
-            </a:pPr>
-            <a:r>
-              <a:t>▪  MongoDB (Motor): Flexible NoSQL reading logs, card spread graphs</a:t>
-            </a:r>
-          </a:p>
-          <a:p>
-            <a:pPr>
-              <a:defRPr sz="950">
-                <a:solidFill>
-                  <a:srgbClr val="CBD5E1"/>
-                </a:solidFill>
-              </a:defRPr>
-            </a:pPr>
-            <a:r>
-              <a:t>▪  Redis: Token blacklisting, session caching &amp; rate limiting</a:t>
-            </a:r>
-          </a:p>
-        </p:txBody>
-      </p:sp>
-      <p:sp>
-        <p:nvSpPr>
-          <p:cNvPr id="14" name="Rounded Rectangle 13"/>
-          <p:cNvSpPr/>
-          <p:nvPr/>
-        </p:nvSpPr>
-        <p:spPr>
-          <a:xfrm>
-            <a:off x="6236208" y="1298448"/>
-            <a:ext cx="5266944" cy="3977639"/>
-          </a:xfrm>
-          <a:prstGeom prst="roundRect">
-            <a:avLst/>
-          </a:prstGeom>
-          <a:solidFill>
-            <a:srgbClr val="131D31"/>
-          </a:solidFill>
-          <a:ln w="19050">
-            <a:solidFill>
-              <a:srgbClr val="283854"/>
-            </a:solidFill>
-          </a:ln>
-        </p:spPr>
-        <p:style>
-          <a:lnRef idx="1">
-            <a:schemeClr val="accent1"/>
-          </a:lnRef>
-          <a:fillRef idx="3">
-            <a:schemeClr val="accent1"/>
-          </a:fillRef>
-          <a:effectRef idx="2">
-            <a:schemeClr val="accent1"/>
-          </a:effectRef>
-          <a:fontRef idx="minor">
-            <a:schemeClr val="lt1"/>
-          </a:fontRef>
-        </p:style>
-        <p:txBody>
-          <a:bodyPr rtlCol="0" anchor="ctr"/>
-          <a:lstStyle/>
-          <a:p>
-            <a:pPr algn="ctr"/>
-          </a:p>
-        </p:txBody>
-      </p:sp>
-      <p:sp>
-        <p:nvSpPr>
-          <p:cNvPr id="15" name="TextBox 14"/>
-          <p:cNvSpPr txBox="1"/>
-          <p:nvPr/>
-        </p:nvSpPr>
-        <p:spPr>
-          <a:xfrm>
-            <a:off x="6309360" y="1353312"/>
-            <a:ext cx="3584447" cy="274320"/>
-          </a:xfrm>
-          <a:prstGeom prst="rect">
-            <a:avLst/>
-          </a:prstGeom>
-          <a:noFill/>
-        </p:spPr>
-        <p:txBody>
-          <a:bodyPr wrap="none" lIns="0" tIns="0">
-            <a:spAutoFit/>
-          </a:bodyPr>
-          <a:lstStyle/>
-          <a:p>
-            <a:pPr>
-              <a:defRPr sz="950" b="1">
-                <a:solidFill>
-                  <a:srgbClr val="38BDF8"/>
-                </a:solidFill>
-              </a:defRPr>
-            </a:pPr>
-            <a:r>
-              <a:t>🖥️  INTERACTIVE FASTAPI SWAGGER / REDOC API DOCS</a:t>
-            </a:r>
-          </a:p>
-        </p:txBody>
-      </p:sp>
-      <p:sp>
-        <p:nvSpPr>
-          <p:cNvPr id="16" name="TextBox 15"/>
-          <p:cNvSpPr txBox="1"/>
-          <p:nvPr/>
-        </p:nvSpPr>
-        <p:spPr>
-          <a:xfrm>
-            <a:off x="9966960" y="1353312"/>
-            <a:ext cx="1463040" cy="274320"/>
-          </a:xfrm>
-          <a:prstGeom prst="rect">
-            <a:avLst/>
-          </a:prstGeom>
-          <a:noFill/>
-        </p:spPr>
-        <p:txBody>
-          <a:bodyPr wrap="none" rIns="0" tIns="0">
-            <a:spAutoFit/>
-          </a:bodyPr>
-          <a:lstStyle/>
-          <a:p>
-            <a:pPr algn="r">
-              <a:defRPr sz="900" b="1">
-                <a:solidFill>
-                  <a:srgbClr val="10B981"/>
-                </a:solidFill>
-              </a:defRPr>
-            </a:pPr>
-            <a:r>
-              <a:t>● FULLY DOCUMENTED</a:t>
-            </a:r>
-          </a:p>
-        </p:txBody>
-      </p:sp>
-      <p:pic>
-        <p:nvPicPr>
-          <p:cNvPr id="17" name="Picture 16" descr="website_swagger_docs.jpg"/>
-          <p:cNvPicPr>
-            <a:picLocks noChangeAspect="1"/>
-          </p:cNvPicPr>
-          <p:nvPr/>
-        </p:nvPicPr>
-        <p:blipFill>
-          <a:blip r:embed="rId2"/>
-          <a:stretch>
-            <a:fillRect/>
-          </a:stretch>
-        </p:blipFill>
-        <p:spPr>
-          <a:xfrm>
-            <a:off x="6309360" y="1645920"/>
-            <a:ext cx="5120640" cy="3429000"/>
-          </a:xfrm>
-          <a:prstGeom prst="rect">
-            <a:avLst/>
-          </a:prstGeom>
-        </p:spPr>
-      </p:pic>
-      <p:sp>
-        <p:nvSpPr>
-          <p:cNvPr id="18" name="Rounded Rectangle 17"/>
-          <p:cNvSpPr/>
-          <p:nvPr/>
-        </p:nvSpPr>
-        <p:spPr>
-          <a:xfrm>
-            <a:off x="6309360" y="5212080"/>
-            <a:ext cx="5120640" cy="1325880"/>
-          </a:xfrm>
-          <a:prstGeom prst="roundRect">
-            <a:avLst/>
-          </a:prstGeom>
-          <a:solidFill>
-            <a:srgbClr val="1C2944"/>
-          </a:solidFill>
-          <a:ln w="12700">
-            <a:solidFill>
-              <a:srgbClr val="283854"/>
-            </a:solidFill>
-          </a:ln>
-        </p:spPr>
-        <p:style>
-          <a:lnRef idx="1">
-            <a:schemeClr val="accent1"/>
-          </a:lnRef>
-          <a:fillRef idx="3">
-            <a:schemeClr val="accent1"/>
-          </a:fillRef>
-          <a:effectRef idx="2">
-            <a:schemeClr val="accent1"/>
-          </a:effectRef>
-          <a:fontRef idx="minor">
-            <a:schemeClr val="lt1"/>
-          </a:fontRef>
-        </p:style>
-        <p:txBody>
-          <a:bodyPr rtlCol="0" anchor="ctr"/>
-          <a:lstStyle/>
-          <a:p>
-            <a:pPr algn="ctr"/>
-          </a:p>
-        </p:txBody>
-      </p:sp>
-      <p:sp>
-        <p:nvSpPr>
-          <p:cNvPr id="19" name="TextBox 18"/>
-          <p:cNvSpPr txBox="1"/>
-          <p:nvPr/>
-        </p:nvSpPr>
-        <p:spPr>
-          <a:xfrm>
-            <a:off x="6492240" y="5303520"/>
-            <a:ext cx="4754880" cy="1143000"/>
-          </a:xfrm>
-          <a:prstGeom prst="rect">
-            <a:avLst/>
-          </a:prstGeom>
-          <a:noFill/>
-        </p:spPr>
-        <p:txBody>
-          <a:bodyPr wrap="square">
-            <a:spAutoFit/>
-          </a:bodyPr>
-          <a:lstStyle/>
-          <a:p>
-            <a:pPr>
-              <a:defRPr sz="1150" b="1">
-                <a:solidFill>
-                  <a:srgbClr val="F59E0B"/>
-                </a:solidFill>
-              </a:defRPr>
-            </a:pPr>
-            <a:r>
-              <a:t>🐳 Dockerized Microservices &amp; Unified Orchestration</a:t>
-            </a:r>
-          </a:p>
-          <a:p>
-            <a:pPr>
-              <a:defRPr sz="950">
-                <a:solidFill>
-                  <a:srgbClr val="CBD5E1"/>
-                </a:solidFill>
-              </a:defRPr>
-            </a:pPr>
-            <a:r>
-              <a:t>▪ Single-command initialization via `docker-compose up -d`</a:t>
-            </a:r>
-          </a:p>
-          <a:p>
-            <a:pPr>
-              <a:defRPr sz="950">
-                <a:solidFill>
-                  <a:srgbClr val="CBD5E1"/>
-                </a:solidFill>
-              </a:defRPr>
-            </a:pPr>
-            <a:r>
-              <a:t>▪ Isolated container networks for PostgreSQL (5432), MongoDB (27017), Redis (6379) &amp; FastAPI (8000)</a:t>
+              <a:t>Calculates a mathematically sound certainty score (0-100%) for every insight.</a:t>
             </a:r>
           </a:p>
         </p:txBody>
@@ -5083,12 +5117,12 @@
             <a:pPr>
               <a:defRPr sz="1050" b="1">
                 <a:solidFill>
-                  <a:srgbClr val="F59E0B"/>
-                </a:solidFill>
-              </a:defRPr>
-            </a:pPr>
-            <a:r>
-              <a:t>MULTIMODAL INTELLIGENCE</a:t>
+                  <a:srgbClr val="38BDF8"/>
+                </a:solidFill>
+              </a:defRPr>
+            </a:pPr>
+            <a:r>
+              <a:t>02. ENGINEERING FOUNDATION</a:t>
             </a:r>
           </a:p>
         </p:txBody>
@@ -5116,14 +5150,14 @@
           <a:lstStyle/>
           <a:p>
             <a:pPr>
-              <a:defRPr sz="2100" b="1">
+              <a:defRPr sz="2200" b="1">
                 <a:solidFill>
                   <a:srgbClr val="F8FAFC"/>
                 </a:solidFill>
               </a:defRPr>
             </a:pPr>
             <a:r>
-              <a:t>Core AI Engines: 3D Interactive Tarot &amp; Palm CV</a:t>
+              <a:t>Full-Stack System Architecture &amp; Stack</a:t>
             </a:r>
           </a:p>
         </p:txBody>
@@ -5136,8 +5170,8 @@
         </p:nvSpPr>
         <p:spPr>
           <a:xfrm>
-            <a:off x="10332720" y="411480"/>
-            <a:ext cx="1097280" cy="365760"/>
+            <a:off x="10241280" y="365760"/>
+            <a:ext cx="1188720" cy="320040"/>
           </a:xfrm>
           <a:prstGeom prst="rect">
             <a:avLst/>
@@ -5145,20 +5179,20 @@
           <a:noFill/>
         </p:spPr>
         <p:txBody>
-          <a:bodyPr wrap="none">
+          <a:bodyPr wrap="none" rIns="0">
             <a:spAutoFit/>
           </a:bodyPr>
           <a:lstStyle/>
           <a:p>
             <a:pPr algn="r">
-              <a:defRPr sz="1300" b="1">
+              <a:defRPr sz="1100" b="1">
                 <a:solidFill>
                   <a:srgbClr val="94A3B8"/>
                 </a:solidFill>
               </a:defRPr>
             </a:pPr>
             <a:r>
-              <a:t>03 / 07</a:t>
+              <a:t>03 / 10</a:t>
             </a:r>
           </a:p>
         </p:txBody>
@@ -5171,8 +5205,8 @@
         </p:nvSpPr>
         <p:spPr>
           <a:xfrm>
-            <a:off x="731520" y="1188720"/>
-            <a:ext cx="10728655" cy="18288"/>
+            <a:off x="731520" y="1234440"/>
+            <a:ext cx="10728655" cy="13716"/>
           </a:xfrm>
           <a:prstGeom prst="rect">
             <a:avLst/>
@@ -5214,8 +5248,8 @@
         </p:nvSpPr>
         <p:spPr>
           <a:xfrm>
-            <a:off x="658368" y="1298448"/>
-            <a:ext cx="5358384" cy="4160520"/>
+            <a:off x="731520" y="1463040"/>
+            <a:ext cx="3456432" cy="4754880"/>
           </a:xfrm>
           <a:prstGeom prst="roundRect">
             <a:avLst/>
@@ -5223,9 +5257,9 @@
           <a:solidFill>
             <a:srgbClr val="131D31"/>
           </a:solidFill>
-          <a:ln w="19050">
+          <a:ln w="12700">
             <a:solidFill>
-              <a:srgbClr val="283854"/>
+              <a:srgbClr val="38BDF8"/>
             </a:solidFill>
           </a:ln>
         </p:spPr>
@@ -5259,8 +5293,8 @@
         </p:nvSpPr>
         <p:spPr>
           <a:xfrm>
-            <a:off x="731520" y="1353312"/>
-            <a:ext cx="3648456" cy="274320"/>
+            <a:off x="960120" y="1691640"/>
+            <a:ext cx="2999232" cy="4297680"/>
           </a:xfrm>
           <a:prstGeom prst="rect">
             <a:avLst/>
@@ -5268,34 +5302,163 @@
           <a:noFill/>
         </p:spPr>
         <p:txBody>
-          <a:bodyPr wrap="none" lIns="0" tIns="0">
+          <a:bodyPr wrap="square" lIns="0" tIns="0">
             <a:spAutoFit/>
           </a:bodyPr>
           <a:lstStyle/>
           <a:p>
             <a:pPr>
-              <a:defRPr sz="950" b="1">
+              <a:defRPr sz="1100" b="1">
                 <a:solidFill>
                   <a:srgbClr val="38BDF8"/>
                 </a:solidFill>
               </a:defRPr>
             </a:pPr>
             <a:r>
-              <a:t>🖥️  DIGITIZED KNOWLEDGE BASE &amp; SPREAD EXPLORER</a:t>
-            </a:r>
-          </a:p>
-        </p:txBody>
-      </p:sp>
-      <p:sp>
-        <p:nvSpPr>
-          <p:cNvPr id="10" name="TextBox 9"/>
+              <a:t>PRESENTATION LAYER</a:t>
+            </a:r>
+          </a:p>
+          <a:p>
+            <a:pPr>
+              <a:defRPr sz="1400" b="1">
+                <a:solidFill>
+                  <a:srgbClr val="F8FAFC"/>
+                </a:solidFill>
+              </a:defRPr>
+            </a:pPr>
+            <a:r>
+              <a:t>Next.js 14 App Router</a:t>
+            </a:r>
+          </a:p>
+          <a:p>
+            <a:pPr>
+              <a:defRPr sz="800">
+                <a:solidFill>
+                  <a:srgbClr val="283854"/>
+                </a:solidFill>
+              </a:defRPr>
+            </a:pPr>
+            <a:r>
+              <a:t>─────────────────────</a:t>
+            </a:r>
+          </a:p>
+          <a:p>
+            <a:pPr>
+              <a:defRPr sz="1000">
+                <a:solidFill>
+                  <a:srgbClr val="CBD5E1"/>
+                </a:solidFill>
+              </a:defRPr>
+            </a:pPr>
+            <a:r>
+              <a:t>✦ React 18 Server &amp; Client Components</a:t>
+            </a:r>
+          </a:p>
+          <a:p>
+            <a:pPr>
+              <a:defRPr sz="1000">
+                <a:solidFill>
+                  <a:srgbClr val="CBD5E1"/>
+                </a:solidFill>
+              </a:defRPr>
+            </a:pPr>
+            <a:r>
+              <a:t>✦ Tailwind CSS + Glassmorphism aesthetic</a:t>
+            </a:r>
+          </a:p>
+          <a:p>
+            <a:pPr>
+              <a:defRPr sz="1000">
+                <a:solidFill>
+                  <a:srgbClr val="CBD5E1"/>
+                </a:solidFill>
+              </a:defRPr>
+            </a:pPr>
+            <a:r>
+              <a:t>✦ Framer Motion 3D card flips &amp; HUD overlays</a:t>
+            </a:r>
+          </a:p>
+          <a:p>
+            <a:pPr>
+              <a:defRPr sz="1000">
+                <a:solidFill>
+                  <a:srgbClr val="CBD5E1"/>
+                </a:solidFill>
+              </a:defRPr>
+            </a:pPr>
+            <a:r>
+              <a:t>✦ Responsive across Mobile, Tablet &amp; Desktop</a:t>
+            </a:r>
+          </a:p>
+          <a:p>
+            <a:pPr>
+              <a:defRPr sz="1000">
+                <a:solidFill>
+                  <a:srgbClr val="CBD5E1"/>
+                </a:solidFill>
+              </a:defRPr>
+            </a:pPr>
+            <a:r>
+              <a:t>✦ One-Click CSV / JSON Data Export</a:t>
+            </a:r>
+          </a:p>
+        </p:txBody>
+      </p:sp>
+      <p:sp>
+        <p:nvSpPr>
+          <p:cNvPr id="10" name="Rounded Rectangle 9"/>
+          <p:cNvSpPr/>
+          <p:nvPr/>
+        </p:nvSpPr>
+        <p:spPr>
+          <a:xfrm>
+            <a:off x="4370832" y="1463040"/>
+            <a:ext cx="3456432" cy="4754880"/>
+          </a:xfrm>
+          <a:prstGeom prst="roundRect">
+            <a:avLst/>
+          </a:prstGeom>
+          <a:solidFill>
+            <a:srgbClr val="131D31"/>
+          </a:solidFill>
+          <a:ln w="12700">
+            <a:solidFill>
+              <a:srgbClr val="A855F7"/>
+            </a:solidFill>
+          </a:ln>
+        </p:spPr>
+        <p:style>
+          <a:lnRef idx="1">
+            <a:schemeClr val="accent1"/>
+          </a:lnRef>
+          <a:fillRef idx="3">
+            <a:schemeClr val="accent1"/>
+          </a:fillRef>
+          <a:effectRef idx="2">
+            <a:schemeClr val="accent1"/>
+          </a:effectRef>
+          <a:fontRef idx="minor">
+            <a:schemeClr val="lt1"/>
+          </a:fontRef>
+        </p:style>
+        <p:txBody>
+          <a:bodyPr rtlCol="0" anchor="ctr"/>
+          <a:lstStyle/>
+          <a:p>
+            <a:pPr algn="ctr"/>
+          </a:p>
+        </p:txBody>
+      </p:sp>
+      <p:sp>
+        <p:nvSpPr>
+          <p:cNvPr id="11" name="TextBox 10"/>
           <p:cNvSpPr txBox="1"/>
           <p:nvPr/>
         </p:nvSpPr>
         <p:spPr>
           <a:xfrm>
-            <a:off x="4480560" y="1353312"/>
-            <a:ext cx="1463040" cy="274320"/>
+            <a:off x="4599432" y="1691640"/>
+            <a:ext cx="2999232" cy="4297680"/>
           </a:xfrm>
           <a:prstGeom prst="rect">
             <a:avLst/>
@@ -5303,48 +5466,108 @@
           <a:noFill/>
         </p:spPr>
         <p:txBody>
-          <a:bodyPr wrap="none" rIns="0" tIns="0">
+          <a:bodyPr wrap="square" lIns="0" tIns="0">
             <a:spAutoFit/>
           </a:bodyPr>
           <a:lstStyle/>
           <a:p>
-            <a:pPr algn="r">
-              <a:defRPr sz="900" b="1">
-                <a:solidFill>
-                  <a:srgbClr val="10B981"/>
-                </a:solidFill>
-              </a:defRPr>
-            </a:pPr>
-            <a:r>
-              <a:t>● 78 CARDS + PALM DATA</a:t>
-            </a:r>
-          </a:p>
-        </p:txBody>
-      </p:sp>
-      <p:pic>
-        <p:nvPicPr>
-          <p:cNvPr id="11" name="Picture 10" descr="website_datasets_explorer.jpg"/>
-          <p:cNvPicPr>
-            <a:picLocks noChangeAspect="1"/>
-          </p:cNvPicPr>
-          <p:nvPr/>
-        </p:nvPicPr>
-        <p:blipFill>
-          <a:blip r:embed="rId2"/>
-          <a:stretch>
-            <a:fillRect/>
-          </a:stretch>
-        </p:blipFill>
-        <p:spPr>
-          <a:xfrm>
-            <a:off x="731520" y="1645920"/>
-            <a:ext cx="5212080" cy="3611880"/>
-          </a:xfrm>
-          <a:prstGeom prst="rect">
-            <a:avLst/>
-          </a:prstGeom>
-        </p:spPr>
-      </p:pic>
+            <a:pPr>
+              <a:defRPr sz="1100" b="1">
+                <a:solidFill>
+                  <a:srgbClr val="A855F7"/>
+                </a:solidFill>
+              </a:defRPr>
+            </a:pPr>
+            <a:r>
+              <a:t>INTELLIGENCE API LAYER</a:t>
+            </a:r>
+          </a:p>
+          <a:p>
+            <a:pPr>
+              <a:defRPr sz="1400" b="1">
+                <a:solidFill>
+                  <a:srgbClr val="F8FAFC"/>
+                </a:solidFill>
+              </a:defRPr>
+            </a:pPr>
+            <a:r>
+              <a:t>FastAPI (Async Python 3.11)</a:t>
+            </a:r>
+          </a:p>
+          <a:p>
+            <a:pPr>
+              <a:defRPr sz="800">
+                <a:solidFill>
+                  <a:srgbClr val="283854"/>
+                </a:solidFill>
+              </a:defRPr>
+            </a:pPr>
+            <a:r>
+              <a:t>─────────────────────</a:t>
+            </a:r>
+          </a:p>
+          <a:p>
+            <a:pPr>
+              <a:defRPr sz="1000">
+                <a:solidFill>
+                  <a:srgbClr val="CBD5E1"/>
+                </a:solidFill>
+              </a:defRPr>
+            </a:pPr>
+            <a:r>
+              <a:t>✦ 30+ Modular REST Endpoints with Swagger Docs</a:t>
+            </a:r>
+          </a:p>
+          <a:p>
+            <a:pPr>
+              <a:defRPr sz="1000">
+                <a:solidFill>
+                  <a:srgbClr val="CBD5E1"/>
+                </a:solidFill>
+              </a:defRPr>
+            </a:pPr>
+            <a:r>
+              <a:t>✦ 11 Decoupled Domain Microservices</a:t>
+            </a:r>
+          </a:p>
+          <a:p>
+            <a:pPr>
+              <a:defRPr sz="1000">
+                <a:solidFill>
+                  <a:srgbClr val="CBD5E1"/>
+                </a:solidFill>
+              </a:defRPr>
+            </a:pPr>
+            <a:r>
+              <a:t>✦ Pydantic v2 Strict Request/Response Schemas</a:t>
+            </a:r>
+          </a:p>
+          <a:p>
+            <a:pPr>
+              <a:defRPr sz="1000">
+                <a:solidFill>
+                  <a:srgbClr val="CBD5E1"/>
+                </a:solidFill>
+              </a:defRPr>
+            </a:pPr>
+            <a:r>
+              <a:t>✦ JWT Bearer Auth &amp; Role-Based Access Control</a:t>
+            </a:r>
+          </a:p>
+          <a:p>
+            <a:pPr>
+              <a:defRPr sz="1000">
+                <a:solidFill>
+                  <a:srgbClr val="CBD5E1"/>
+                </a:solidFill>
+              </a:defRPr>
+            </a:pPr>
+            <a:r>
+              <a:t>✦ Sub-100ms High-Throughput Response Times</a:t>
+            </a:r>
+          </a:p>
+        </p:txBody>
+      </p:sp>
       <p:sp>
         <p:nvSpPr>
           <p:cNvPr id="12" name="Rounded Rectangle 11"/>
@@ -5353,14 +5576,14 @@
         </p:nvSpPr>
         <p:spPr>
           <a:xfrm>
-            <a:off x="731520" y="5394960"/>
-            <a:ext cx="5212080" cy="1143000"/>
+            <a:off x="8010144" y="1463040"/>
+            <a:ext cx="3456432" cy="4754880"/>
           </a:xfrm>
           <a:prstGeom prst="roundRect">
             <a:avLst/>
           </a:prstGeom>
           <a:solidFill>
-            <a:srgbClr val="1C2944"/>
+            <a:srgbClr val="131D31"/>
           </a:solidFill>
           <a:ln w="12700">
             <a:solidFill>
@@ -5398,8 +5621,8 @@
         </p:nvSpPr>
         <p:spPr>
           <a:xfrm>
-            <a:off x="868680" y="5468112"/>
-            <a:ext cx="4937760" cy="1005840"/>
+            <a:off x="8238744" y="1691640"/>
+            <a:ext cx="2999232" cy="4297680"/>
           </a:xfrm>
           <a:prstGeom prst="rect">
             <a:avLst/>
@@ -5407,7 +5630,7 @@
           <a:noFill/>
         </p:spPr>
         <p:txBody>
-          <a:bodyPr wrap="square">
+          <a:bodyPr wrap="square" lIns="0" tIns="0">
             <a:spAutoFit/>
           </a:bodyPr>
           <a:lstStyle/>
@@ -5420,275 +5643,91 @@
               </a:defRPr>
             </a:pPr>
             <a:r>
-              <a:t>🔮 6 Standard Spread Frameworks Supported:</a:t>
-            </a:r>
-          </a:p>
-          <a:p>
-            <a:pPr>
-              <a:defRPr sz="950">
+              <a:t>ENTERPRISE DATA LAYER</a:t>
+            </a:r>
+          </a:p>
+          <a:p>
+            <a:pPr>
+              <a:defRPr sz="1400" b="1">
+                <a:solidFill>
+                  <a:srgbClr val="F8FAFC"/>
+                </a:solidFill>
+              </a:defRPr>
+            </a:pPr>
+            <a:r>
+              <a:t>Polyglot Persistence</a:t>
+            </a:r>
+          </a:p>
+          <a:p>
+            <a:pPr>
+              <a:defRPr sz="800">
+                <a:solidFill>
+                  <a:srgbClr val="283854"/>
+                </a:solidFill>
+              </a:defRPr>
+            </a:pPr>
+            <a:r>
+              <a:t>─────────────────────</a:t>
+            </a:r>
+          </a:p>
+          <a:p>
+            <a:pPr>
+              <a:defRPr sz="1000">
                 <a:solidFill>
                   <a:srgbClr val="CBD5E1"/>
                 </a:solidFill>
               </a:defRPr>
             </a:pPr>
             <a:r>
-              <a:t>Single Card · Past-Present-Future · Celtic Cross (10 Cards) · Career Path · Love &amp; Relationship · Horseshoe</a:t>
-            </a:r>
-          </a:p>
-        </p:txBody>
-      </p:sp>
-      <p:sp>
-        <p:nvSpPr>
-          <p:cNvPr id="14" name="Rounded Rectangle 13"/>
-          <p:cNvSpPr/>
-          <p:nvPr/>
-        </p:nvSpPr>
-        <p:spPr>
-          <a:xfrm>
-            <a:off x="6217920" y="1371600"/>
-            <a:ext cx="5212080" cy="2377440"/>
-          </a:xfrm>
-          <a:prstGeom prst="roundRect">
-            <a:avLst/>
-          </a:prstGeom>
-          <a:solidFill>
-            <a:srgbClr val="131D31"/>
-          </a:solidFill>
-          <a:ln w="12700">
-            <a:solidFill>
-              <a:srgbClr val="283854"/>
-            </a:solidFill>
-          </a:ln>
-        </p:spPr>
-        <p:style>
-          <a:lnRef idx="1">
-            <a:schemeClr val="accent1"/>
-          </a:lnRef>
-          <a:fillRef idx="3">
-            <a:schemeClr val="accent1"/>
-          </a:fillRef>
-          <a:effectRef idx="2">
-            <a:schemeClr val="accent1"/>
-          </a:effectRef>
-          <a:fontRef idx="minor">
-            <a:schemeClr val="lt1"/>
-          </a:fontRef>
-        </p:style>
-        <p:txBody>
-          <a:bodyPr rtlCol="0" anchor="ctr"/>
-          <a:lstStyle/>
-          <a:p>
-            <a:pPr algn="ctr"/>
-          </a:p>
-        </p:txBody>
-      </p:sp>
-      <p:sp>
-        <p:nvSpPr>
-          <p:cNvPr id="15" name="TextBox 14"/>
-          <p:cNvSpPr txBox="1"/>
-          <p:nvPr/>
-        </p:nvSpPr>
-        <p:spPr>
-          <a:xfrm>
-            <a:off x="6400800" y="1463040"/>
-            <a:ext cx="4846320" cy="2194560"/>
-          </a:xfrm>
-          <a:prstGeom prst="rect">
-            <a:avLst/>
-          </a:prstGeom>
-          <a:noFill/>
-        </p:spPr>
-        <p:txBody>
-          <a:bodyPr wrap="square">
-            <a:spAutoFit/>
-          </a:bodyPr>
-          <a:lstStyle/>
-          <a:p>
-            <a:pPr>
-              <a:defRPr sz="1250" b="1">
-                <a:solidFill>
-                  <a:srgbClr val="38BDF8"/>
-                </a:solidFill>
-              </a:defRPr>
-            </a:pPr>
-            <a:r>
-              <a:t>🃏 3D Physics Interactive Tarot Engine</a:t>
-            </a:r>
-          </a:p>
-          <a:p>
-            <a:pPr>
-              <a:defRPr sz="950">
+              <a:t>✦ PostgreSQL 16: ACID User &amp; Transactional State</a:t>
+            </a:r>
+          </a:p>
+          <a:p>
+            <a:pPr>
+              <a:defRPr sz="1000">
                 <a:solidFill>
                   <a:srgbClr val="CBD5E1"/>
                 </a:solidFill>
               </a:defRPr>
             </a:pPr>
             <a:r>
-              <a:t>▪  Interactive Card Draw: Physics-based visual deck shuffle, card fanning, and manual one-by-one pick flow</a:t>
-            </a:r>
-          </a:p>
-          <a:p>
-            <a:pPr>
-              <a:defRPr sz="950">
+              <a:t>✦ Auto SQLite Fallback: Zero-friction local dev</a:t>
+            </a:r>
+          </a:p>
+          <a:p>
+            <a:pPr>
+              <a:defRPr sz="1000">
                 <a:solidFill>
                   <a:srgbClr val="CBD5E1"/>
                 </a:solidFill>
               </a:defRPr>
             </a:pPr>
             <a:r>
-              <a:t>▪  3D CSS &amp; Framer Flip: Recreates authentic physical tactile experience with flip animation &amp; upright/reversed state</a:t>
-            </a:r>
-          </a:p>
-          <a:p>
-            <a:pPr>
-              <a:defRPr sz="950">
+              <a:t>✦ MongoDB Motor: Unstructured reading documents</a:t>
+            </a:r>
+          </a:p>
+          <a:p>
+            <a:pPr>
+              <a:defRPr sz="1000">
                 <a:solidFill>
                   <a:srgbClr val="CBD5E1"/>
                 </a:solidFill>
               </a:defRPr>
             </a:pPr>
             <a:r>
-              <a:t>▪  Elemental &amp; Astrological Mapping: Cards mapped to Fire, Water, Air, Earth, Zodiac signs, and planetary rulers</a:t>
-            </a:r>
-          </a:p>
-          <a:p>
-            <a:pPr>
-              <a:defRPr sz="950">
+              <a:t>✦ Redis 7: Session caching &amp; token blacklist</a:t>
+            </a:r>
+          </a:p>
+          <a:p>
+            <a:pPr>
+              <a:defRPr sz="1000">
                 <a:solidFill>
                   <a:srgbClr val="CBD5E1"/>
                 </a:solidFill>
               </a:defRPr>
             </a:pPr>
             <a:r>
-              <a:t>▪  Deterministic + AI Synthesis: Position-specific meanings fused into dynamic multi-card narratives</a:t>
-            </a:r>
-          </a:p>
-        </p:txBody>
-      </p:sp>
-      <p:sp>
-        <p:nvSpPr>
-          <p:cNvPr id="16" name="Rounded Rectangle 15"/>
-          <p:cNvSpPr/>
-          <p:nvPr/>
-        </p:nvSpPr>
-        <p:spPr>
-          <a:xfrm>
-            <a:off x="6217920" y="3931920"/>
-            <a:ext cx="5212080" cy="2606040"/>
-          </a:xfrm>
-          <a:prstGeom prst="roundRect">
-            <a:avLst/>
-          </a:prstGeom>
-          <a:solidFill>
-            <a:srgbClr val="131D31"/>
-          </a:solidFill>
-          <a:ln w="12700">
-            <a:solidFill>
-              <a:srgbClr val="283854"/>
-            </a:solidFill>
-          </a:ln>
-        </p:spPr>
-        <p:style>
-          <a:lnRef idx="1">
-            <a:schemeClr val="accent1"/>
-          </a:lnRef>
-          <a:fillRef idx="3">
-            <a:schemeClr val="accent1"/>
-          </a:fillRef>
-          <a:effectRef idx="2">
-            <a:schemeClr val="accent1"/>
-          </a:effectRef>
-          <a:fontRef idx="minor">
-            <a:schemeClr val="lt1"/>
-          </a:fontRef>
-        </p:style>
-        <p:txBody>
-          <a:bodyPr rtlCol="0" anchor="ctr"/>
-          <a:lstStyle/>
-          <a:p>
-            <a:pPr algn="ctr"/>
-          </a:p>
-        </p:txBody>
-      </p:sp>
-      <p:sp>
-        <p:nvSpPr>
-          <p:cNvPr id="17" name="TextBox 16"/>
-          <p:cNvSpPr txBox="1"/>
-          <p:nvPr/>
-        </p:nvSpPr>
-        <p:spPr>
-          <a:xfrm>
-            <a:off x="6400800" y="4023360"/>
-            <a:ext cx="4846320" cy="2377440"/>
-          </a:xfrm>
-          <a:prstGeom prst="rect">
-            <a:avLst/>
-          </a:prstGeom>
-          <a:noFill/>
-        </p:spPr>
-        <p:txBody>
-          <a:bodyPr wrap="square">
-            <a:spAutoFit/>
-          </a:bodyPr>
-          <a:lstStyle/>
-          <a:p>
-            <a:pPr>
-              <a:defRPr sz="1250" b="1">
-                <a:solidFill>
-                  <a:srgbClr val="10B981"/>
-                </a:solidFill>
-              </a:defRPr>
-            </a:pPr>
-            <a:r>
-              <a:t>✋ Computer Vision Palm Line Detection</a:t>
-            </a:r>
-          </a:p>
-          <a:p>
-            <a:pPr>
-              <a:defRPr sz="950">
-                <a:solidFill>
-                  <a:srgbClr val="CBD5E1"/>
-                </a:solidFill>
-              </a:defRPr>
-            </a:pPr>
-            <a:r>
-              <a:t>▪  5 Major/Minor Line Analysis: Heart (Emotions), Head (Intellect), Life (Vitality), Fate (Destiny), Sun (Creativity)</a:t>
-            </a:r>
-          </a:p>
-          <a:p>
-            <a:pPr>
-              <a:defRPr sz="950">
-                <a:solidFill>
-                  <a:srgbClr val="CBD5E1"/>
-                </a:solidFill>
-              </a:defRPr>
-            </a:pPr>
-            <a:r>
-              <a:t>▪  Morphological Feature Extraction: Quantifies length, curvature, depth, fork branches, and line breaks</a:t>
-            </a:r>
-          </a:p>
-          <a:p>
-            <a:pPr>
-              <a:defRPr sz="950">
-                <a:solidFill>
-                  <a:srgbClr val="CBD5E1"/>
-                </a:solidFill>
-              </a:defRPr>
-            </a:pPr>
-            <a:r>
-              <a:t>▪  Personality Archetype Engine: Mapped into Big Five personality metrics (Openness, Conscientiousness, Extroversion, etc.)</a:t>
-            </a:r>
-          </a:p>
-          <a:p>
-            <a:pPr>
-              <a:defRPr sz="950">
-                <a:solidFill>
-                  <a:srgbClr val="CBD5E1"/>
-                </a:solidFill>
-              </a:defRPr>
-            </a:pPr>
-            <a:r>
-              <a:t>▪  Dual Input Mode: Supports real-time camera image upload or manual interactive parameter calibration</a:t>
+              <a:t>✦ Docker Compose multi-container orchestrator</a:t>
             </a:r>
           </a:p>
         </p:txBody>
@@ -5822,12 +5861,12 @@
             <a:pPr>
               <a:defRPr sz="1050" b="1">
                 <a:solidFill>
-                  <a:srgbClr val="F43F5E"/>
-                </a:solidFill>
-              </a:defRPr>
-            </a:pPr>
-            <a:r>
-              <a:t>COGNITIVE ARCHITECTURE</a:t>
+                  <a:srgbClr val="38BDF8"/>
+                </a:solidFill>
+              </a:defRPr>
+            </a:pPr>
+            <a:r>
+              <a:t>03. MULTIMODAL COMPUTER VISION</a:t>
             </a:r>
           </a:p>
         </p:txBody>
@@ -5855,14 +5894,14 @@
           <a:lstStyle/>
           <a:p>
             <a:pPr>
-              <a:defRPr sz="2100" b="1">
+              <a:defRPr sz="2200" b="1">
                 <a:solidFill>
                   <a:srgbClr val="F8FAFC"/>
                 </a:solidFill>
               </a:defRPr>
             </a:pPr>
             <a:r>
-              <a:t>Multimodal AI &amp; Gemini 2.0 Conversational Chatbot</a:t>
+              <a:t>Biometric Palm Feature Extraction Engine</a:t>
             </a:r>
           </a:p>
         </p:txBody>
@@ -5875,8 +5914,8 @@
         </p:nvSpPr>
         <p:spPr>
           <a:xfrm>
-            <a:off x="10332720" y="411480"/>
-            <a:ext cx="1097280" cy="365760"/>
+            <a:off x="10241280" y="365760"/>
+            <a:ext cx="1188720" cy="320040"/>
           </a:xfrm>
           <a:prstGeom prst="rect">
             <a:avLst/>
@@ -5884,20 +5923,20 @@
           <a:noFill/>
         </p:spPr>
         <p:txBody>
-          <a:bodyPr wrap="none">
+          <a:bodyPr wrap="none" rIns="0">
             <a:spAutoFit/>
           </a:bodyPr>
           <a:lstStyle/>
           <a:p>
             <a:pPr algn="r">
-              <a:defRPr sz="1300" b="1">
+              <a:defRPr sz="1100" b="1">
                 <a:solidFill>
                   <a:srgbClr val="94A3B8"/>
                 </a:solidFill>
               </a:defRPr>
             </a:pPr>
             <a:r>
-              <a:t>04 / 07</a:t>
+              <a:t>04 / 10</a:t>
             </a:r>
           </a:p>
         </p:txBody>
@@ -5910,8 +5949,8 @@
         </p:nvSpPr>
         <p:spPr>
           <a:xfrm>
-            <a:off x="731520" y="1188720"/>
-            <a:ext cx="10728655" cy="18288"/>
+            <a:off x="731520" y="1234440"/>
+            <a:ext cx="10728655" cy="13716"/>
           </a:xfrm>
           <a:prstGeom prst="rect">
             <a:avLst/>
@@ -5953,8 +5992,8 @@
         </p:nvSpPr>
         <p:spPr>
           <a:xfrm>
-            <a:off x="731520" y="1371600"/>
-            <a:ext cx="5212080" cy="2423160"/>
+            <a:off x="731520" y="1463040"/>
+            <a:ext cx="5486400" cy="4754880"/>
           </a:xfrm>
           <a:prstGeom prst="roundRect">
             <a:avLst/>
@@ -5964,7 +6003,7 @@
           </a:solidFill>
           <a:ln w="12700">
             <a:solidFill>
-              <a:srgbClr val="283854"/>
+              <a:srgbClr val="38BDF8"/>
             </a:solidFill>
           </a:ln>
         </p:spPr>
@@ -5998,8 +6037,8 @@
         </p:nvSpPr>
         <p:spPr>
           <a:xfrm>
-            <a:off x="914400" y="1481328"/>
-            <a:ext cx="4846320" cy="2240280"/>
+            <a:off x="1005840" y="1691640"/>
+            <a:ext cx="4937760" cy="4297680"/>
           </a:xfrm>
           <a:prstGeom prst="rect">
             <a:avLst/>
@@ -6013,50 +6052,114 @@
           <a:lstStyle/>
           <a:p>
             <a:pPr>
-              <a:defRPr sz="1200" b="1">
+              <a:defRPr sz="1300" b="1">
                 <a:solidFill>
                   <a:srgbClr val="38BDF8"/>
                 </a:solidFill>
               </a:defRPr>
             </a:pPr>
             <a:r>
-              <a:t>🤖 Google Gemini 2.0 Flash Integration</a:t>
-            </a:r>
-          </a:p>
-          <a:p>
-            <a:pPr>
-              <a:defRPr sz="950">
+              <a:t>5 PRINCIPAL PALM LINES ANALYZED</a:t>
+            </a:r>
+          </a:p>
+          <a:p>
+            <a:pPr>
+              <a:defRPr sz="1100" b="1">
+                <a:solidFill>
+                  <a:srgbClr val="F59E0B"/>
+                </a:solidFill>
+              </a:defRPr>
+            </a:pPr>
+            <a:r>
+              <a:t>▪ Heart Line: </a:t>
+            </a:r>
+            <a:r>
+              <a:rPr b="0">
                 <a:solidFill>
                   <a:srgbClr val="CBD5E1"/>
                 </a:solidFill>
-              </a:defRPr>
-            </a:pPr>
-            <a:r>
-              <a:t>▪  Low-latency streaming inferences via `@google/genai` API</a:t>
-            </a:r>
-          </a:p>
-          <a:p>
-            <a:pPr>
-              <a:defRPr sz="950">
+              </a:rPr>
+              <a:t>Emotional capacity, empathy quotient, relationship depth</a:t>
+            </a:r>
+          </a:p>
+          <a:p>
+            <a:pPr>
+              <a:defRPr sz="1100" b="1">
+                <a:solidFill>
+                  <a:srgbClr val="F59E0B"/>
+                </a:solidFill>
+              </a:defRPr>
+            </a:pPr>
+            <a:r>
+              <a:t>▪ Head Line: </a:t>
+            </a:r>
+            <a:r>
+              <a:rPr b="0">
                 <a:solidFill>
                   <a:srgbClr val="CBD5E1"/>
                 </a:solidFill>
-              </a:defRPr>
-            </a:pPr>
-            <a:r>
-              <a:t>▪  System instruction engineering enforcing empathetic, mystical yet grounded tone</a:t>
-            </a:r>
-          </a:p>
-          <a:p>
-            <a:pPr>
-              <a:defRPr sz="950">
+              </a:rPr>
+              <a:t>Analytical cognition, focus clarity, decision-making style</a:t>
+            </a:r>
+          </a:p>
+          <a:p>
+            <a:pPr>
+              <a:defRPr sz="1100" b="1">
+                <a:solidFill>
+                  <a:srgbClr val="F59E0B"/>
+                </a:solidFill>
+              </a:defRPr>
+            </a:pPr>
+            <a:r>
+              <a:t>▪ Life Line: </a:t>
+            </a:r>
+            <a:r>
+              <a:rPr b="0">
                 <a:solidFill>
                   <a:srgbClr val="CBD5E1"/>
                 </a:solidFill>
-              </a:defRPr>
-            </a:pPr>
-            <a:r>
-              <a:t>▪  Structured JSON response enforcement for cards, traits &amp; recommendations</a:t>
+              </a:rPr>
+              <a:t>Vitality, physical resilience, adaptability to stress</a:t>
+            </a:r>
+          </a:p>
+          <a:p>
+            <a:pPr>
+              <a:defRPr sz="1100" b="1">
+                <a:solidFill>
+                  <a:srgbClr val="F59E0B"/>
+                </a:solidFill>
+              </a:defRPr>
+            </a:pPr>
+            <a:r>
+              <a:t>▪ Fate Line: </a:t>
+            </a:r>
+            <a:r>
+              <a:rPr b="0">
+                <a:solidFill>
+                  <a:srgbClr val="CBD5E1"/>
+                </a:solidFill>
+              </a:rPr>
+              <a:t>Career trajectory, discipline, goal-oriented pathing</a:t>
+            </a:r>
+          </a:p>
+          <a:p>
+            <a:pPr>
+              <a:defRPr sz="1100" b="1">
+                <a:solidFill>
+                  <a:srgbClr val="F59E0B"/>
+                </a:solidFill>
+              </a:defRPr>
+            </a:pPr>
+            <a:r>
+              <a:t>▪ Sun Line: </a:t>
+            </a:r>
+            <a:r>
+              <a:rPr b="0">
+                <a:solidFill>
+                  <a:srgbClr val="CBD5E1"/>
+                </a:solidFill>
+              </a:rPr>
+              <a:t>Creativity, public recognition, artistic fulfillment</a:t>
             </a:r>
           </a:p>
         </p:txBody>
@@ -6069,8 +6172,8 @@
         </p:nvSpPr>
         <p:spPr>
           <a:xfrm>
-            <a:off x="6217920" y="1371600"/>
-            <a:ext cx="5212080" cy="2423160"/>
+            <a:off x="6492240" y="1463040"/>
+            <a:ext cx="4967935" cy="4754880"/>
           </a:xfrm>
           <a:prstGeom prst="roundRect">
             <a:avLst/>
@@ -6080,7 +6183,7 @@
           </a:solidFill>
           <a:ln w="12700">
             <a:solidFill>
-              <a:srgbClr val="283854"/>
+              <a:srgbClr val="A855F7"/>
             </a:solidFill>
           </a:ln>
         </p:spPr>
@@ -6114,8 +6217,8 @@
         </p:nvSpPr>
         <p:spPr>
           <a:xfrm>
-            <a:off x="6400800" y="1481328"/>
-            <a:ext cx="4846320" cy="2240280"/>
+            <a:off x="6766560" y="1691640"/>
+            <a:ext cx="4419295" cy="4297680"/>
           </a:xfrm>
           <a:prstGeom prst="rect">
             <a:avLst/>
@@ -6129,282 +6232,114 @@
           <a:lstStyle/>
           <a:p>
             <a:pPr>
-              <a:defRPr sz="1200" b="1">
+              <a:defRPr sz="1300" b="1">
                 <a:solidFill>
                   <a:srgbClr val="A855F7"/>
                 </a:solidFill>
               </a:defRPr>
             </a:pPr>
             <a:r>
-              <a:t>🧠 Context-Aware Memory &amp; Persona</a:t>
-            </a:r>
-          </a:p>
-          <a:p>
-            <a:pPr>
-              <a:defRPr sz="950">
+              <a:t>MORPHOLOGY &amp; DETECTION PIPELINE</a:t>
+            </a:r>
+          </a:p>
+          <a:p>
+            <a:pPr>
+              <a:defRPr sz="1100" b="1">
+                <a:solidFill>
+                  <a:srgbClr val="F8FAFC"/>
+                </a:solidFill>
+              </a:defRPr>
+            </a:pPr>
+            <a:r>
+              <a:t>⚡ Input Modes: </a:t>
+            </a:r>
+            <a:r>
+              <a:rPr b="0">
                 <a:solidFill>
                   <a:srgbClr val="CBD5E1"/>
                 </a:solidFill>
-              </a:defRPr>
-            </a:pPr>
-            <a:r>
-              <a:t>▪  Multi-turn conversation history retained with session sliding window</a:t>
-            </a:r>
-          </a:p>
-          <a:p>
-            <a:pPr>
-              <a:defRPr sz="950">
+              </a:rPr>
+              <a:t>Dual support: Real-time Camera HUD Scanner + High-res File Upload</a:t>
+            </a:r>
+          </a:p>
+          <a:p>
+            <a:pPr>
+              <a:defRPr sz="1100" b="1">
+                <a:solidFill>
+                  <a:srgbClr val="F8FAFC"/>
+                </a:solidFill>
+              </a:defRPr>
+            </a:pPr>
+            <a:r>
+              <a:t>⚡ Hand Shape Element: </a:t>
+            </a:r>
+            <a:r>
+              <a:rPr b="0">
                 <a:solidFill>
                   <a:srgbClr val="CBD5E1"/>
                 </a:solidFill>
-              </a:defRPr>
-            </a:pPr>
-            <a:r>
-              <a:t>▪  Dynamic user profile injection (Zodiac sign, life path, previous readings)</a:t>
-            </a:r>
-          </a:p>
-          <a:p>
-            <a:pPr>
-              <a:defRPr sz="950">
+              </a:rPr>
+              <a:t>Calculates Palm-to-Finger ratio to classify Earth, Air, Fire, or Water</a:t>
+            </a:r>
+          </a:p>
+          <a:p>
+            <a:pPr>
+              <a:defRPr sz="1100" b="1">
+                <a:solidFill>
+                  <a:srgbClr val="F8FAFC"/>
+                </a:solidFill>
+              </a:defRPr>
+            </a:pPr>
+            <a:r>
+              <a:t>⚡ Contour &amp; Landmarks: </a:t>
+            </a:r>
+            <a:r>
+              <a:rPr b="0">
                 <a:solidFill>
                   <a:srgbClr val="CBD5E1"/>
                 </a:solidFill>
-              </a:defRPr>
-            </a:pPr>
-            <a:r>
-              <a:t>▪  Dual-mode execution: Live Gemini LLM or Offline Rule-based Template Engine</a:t>
-            </a:r>
-          </a:p>
-        </p:txBody>
-      </p:sp>
-      <p:sp>
-        <p:nvSpPr>
-          <p:cNvPr id="12" name="Rounded Rectangle 11"/>
-          <p:cNvSpPr/>
-          <p:nvPr/>
-        </p:nvSpPr>
-        <p:spPr>
-          <a:xfrm>
-            <a:off x="731520" y="3931920"/>
-            <a:ext cx="5212080" cy="2423160"/>
-          </a:xfrm>
-          <a:prstGeom prst="roundRect">
-            <a:avLst/>
-          </a:prstGeom>
-          <a:solidFill>
-            <a:srgbClr val="131D31"/>
-          </a:solidFill>
-          <a:ln w="12700">
-            <a:solidFill>
-              <a:srgbClr val="283854"/>
-            </a:solidFill>
-          </a:ln>
-        </p:spPr>
-        <p:style>
-          <a:lnRef idx="1">
-            <a:schemeClr val="accent1"/>
-          </a:lnRef>
-          <a:fillRef idx="3">
-            <a:schemeClr val="accent1"/>
-          </a:fillRef>
-          <a:effectRef idx="2">
-            <a:schemeClr val="accent1"/>
-          </a:effectRef>
-          <a:fontRef idx="minor">
-            <a:schemeClr val="lt1"/>
-          </a:fontRef>
-        </p:style>
-        <p:txBody>
-          <a:bodyPr rtlCol="0" anchor="ctr"/>
-          <a:lstStyle/>
-          <a:p>
-            <a:pPr algn="ctr"/>
-          </a:p>
-        </p:txBody>
-      </p:sp>
-      <p:sp>
-        <p:nvSpPr>
-          <p:cNvPr id="13" name="TextBox 12"/>
-          <p:cNvSpPr txBox="1"/>
-          <p:nvPr/>
-        </p:nvSpPr>
-        <p:spPr>
-          <a:xfrm>
-            <a:off x="914400" y="4041648"/>
-            <a:ext cx="4846320" cy="2240280"/>
-          </a:xfrm>
-          <a:prstGeom prst="rect">
-            <a:avLst/>
-          </a:prstGeom>
-          <a:noFill/>
-        </p:spPr>
-        <p:txBody>
-          <a:bodyPr wrap="square" lIns="0" tIns="0">
-            <a:spAutoFit/>
-          </a:bodyPr>
-          <a:lstStyle/>
-          <a:p>
-            <a:pPr>
-              <a:defRPr sz="1200" b="1">
-                <a:solidFill>
-                  <a:srgbClr val="F59E0B"/>
-                </a:solidFill>
-              </a:defRPr>
-            </a:pPr>
-            <a:r>
-              <a:t>🔮 Deep Narrative Synthesis Engine</a:t>
-            </a:r>
-          </a:p>
-          <a:p>
-            <a:pPr>
-              <a:defRPr sz="950">
+              </a:rPr>
+              <a:t>Identifies 21 anatomical landmarks across thumb, index, palm base</a:t>
+            </a:r>
+          </a:p>
+          <a:p>
+            <a:pPr>
+              <a:defRPr sz="1100" b="1">
+                <a:solidFill>
+                  <a:srgbClr val="F8FAFC"/>
+                </a:solidFill>
+              </a:defRPr>
+            </a:pPr>
+            <a:r>
+              <a:t>⚡ Curvature Tracing: </a:t>
+            </a:r>
+            <a:r>
+              <a:rPr b="0">
                 <a:solidFill>
                   <a:srgbClr val="CBD5E1"/>
                 </a:solidFill>
-              </a:defRPr>
-            </a:pPr>
-            <a:r>
-              <a:t>▪  Cross-modal fusion: Synthesizes Tarot card archetypes + Palmistry lines</a:t>
-            </a:r>
-          </a:p>
-          <a:p>
-            <a:pPr>
-              <a:defRPr sz="950">
+              </a:rPr>
+              <a:t>Measures length, depth, curvature &amp; interruptions along line trajectories</a:t>
+            </a:r>
+          </a:p>
+          <a:p>
+            <a:pPr>
+              <a:defRPr sz="1100" b="1">
+                <a:solidFill>
+                  <a:srgbClr val="F8FAFC"/>
+                </a:solidFill>
+              </a:defRPr>
+            </a:pPr>
+            <a:r>
+              <a:t>⚡ Mount Analysis: </a:t>
+            </a:r>
+            <a:r>
+              <a:rPr b="0">
                 <a:solidFill>
                   <a:srgbClr val="CBD5E1"/>
                 </a:solidFill>
-              </a:defRPr>
-            </a:pPr>
-            <a:r>
-              <a:t>▪  Multi-dimensional scoring across 4 life pillars: Career, Love, Health &amp; Spirit</a:t>
-            </a:r>
-          </a:p>
-          <a:p>
-            <a:pPr>
-              <a:defRPr sz="950">
-                <a:solidFill>
-                  <a:srgbClr val="CBD5E1"/>
-                </a:solidFill>
-              </a:defRPr>
-            </a:pPr>
-            <a:r>
-              <a:t>▪  Dynamic confidence scoring based on card harmony &amp; line strength</a:t>
-            </a:r>
-          </a:p>
-        </p:txBody>
-      </p:sp>
-      <p:sp>
-        <p:nvSpPr>
-          <p:cNvPr id="14" name="Rounded Rectangle 13"/>
-          <p:cNvSpPr/>
-          <p:nvPr/>
-        </p:nvSpPr>
-        <p:spPr>
-          <a:xfrm>
-            <a:off x="6217920" y="3931920"/>
-            <a:ext cx="5212080" cy="2423160"/>
-          </a:xfrm>
-          <a:prstGeom prst="roundRect">
-            <a:avLst/>
-          </a:prstGeom>
-          <a:solidFill>
-            <a:srgbClr val="131D31"/>
-          </a:solidFill>
-          <a:ln w="12700">
-            <a:solidFill>
-              <a:srgbClr val="283854"/>
-            </a:solidFill>
-          </a:ln>
-        </p:spPr>
-        <p:style>
-          <a:lnRef idx="1">
-            <a:schemeClr val="accent1"/>
-          </a:lnRef>
-          <a:fillRef idx="3">
-            <a:schemeClr val="accent1"/>
-          </a:fillRef>
-          <a:effectRef idx="2">
-            <a:schemeClr val="accent1"/>
-          </a:effectRef>
-          <a:fontRef idx="minor">
-            <a:schemeClr val="lt1"/>
-          </a:fontRef>
-        </p:style>
-        <p:txBody>
-          <a:bodyPr rtlCol="0" anchor="ctr"/>
-          <a:lstStyle/>
-          <a:p>
-            <a:pPr algn="ctr"/>
-          </a:p>
-        </p:txBody>
-      </p:sp>
-      <p:sp>
-        <p:nvSpPr>
-          <p:cNvPr id="15" name="TextBox 14"/>
-          <p:cNvSpPr txBox="1"/>
-          <p:nvPr/>
-        </p:nvSpPr>
-        <p:spPr>
-          <a:xfrm>
-            <a:off x="6400800" y="4041648"/>
-            <a:ext cx="4846320" cy="2240280"/>
-          </a:xfrm>
-          <a:prstGeom prst="rect">
-            <a:avLst/>
-          </a:prstGeom>
-          <a:noFill/>
-        </p:spPr>
-        <p:txBody>
-          <a:bodyPr wrap="square" lIns="0" tIns="0">
-            <a:spAutoFit/>
-          </a:bodyPr>
-          <a:lstStyle/>
-          <a:p>
-            <a:pPr>
-              <a:defRPr sz="1200" b="1">
-                <a:solidFill>
-                  <a:srgbClr val="10B981"/>
-                </a:solidFill>
-              </a:defRPr>
-            </a:pPr>
-            <a:r>
-              <a:t>💡 Personalized Recommendation Engine</a:t>
-            </a:r>
-          </a:p>
-          <a:p>
-            <a:pPr>
-              <a:defRPr sz="950">
-                <a:solidFill>
-                  <a:srgbClr val="CBD5E1"/>
-                </a:solidFill>
-              </a:defRPr>
-            </a:pPr>
-            <a:r>
-              <a:t>▪  Actionable daily affirmations &amp; mindfulness spiritual practices</a:t>
-            </a:r>
-          </a:p>
-          <a:p>
-            <a:pPr>
-              <a:defRPr sz="950">
-                <a:solidFill>
-                  <a:srgbClr val="CBD5E1"/>
-                </a:solidFill>
-              </a:defRPr>
-            </a:pPr>
-            <a:r>
-              <a:t>▪  Crystal &amp; gemstone pairings with elemental balancing advice</a:t>
-            </a:r>
-          </a:p>
-          <a:p>
-            <a:pPr>
-              <a:defRPr sz="950">
-                <a:solidFill>
-                  <a:srgbClr val="CBD5E1"/>
-                </a:solidFill>
-              </a:defRPr>
-            </a:pPr>
-            <a:r>
-              <a:t>▪  Automated PDF &amp; Word document generation for downloadable personal dossiers</a:t>
+              </a:rPr>
+              <a:t>Evaluates Venus, Jupiter, Apollo &amp; Lunar fleshy mounts for energy balance</a:t>
             </a:r>
           </a:p>
         </p:txBody>
@@ -6538,12 +6473,12 @@
             <a:pPr>
               <a:defRPr sz="1050" b="1">
                 <a:solidFill>
-                  <a:srgbClr val="10B981"/>
-                </a:solidFill>
-              </a:defRPr>
-            </a:pPr>
-            <a:r>
-              <a:t>SECURITY &amp; ANALYTICS</a:t>
+                  <a:srgbClr val="F59E0B"/>
+                </a:solidFill>
+              </a:defRPr>
+            </a:pPr>
+            <a:r>
+              <a:t>04. SYMBOLIC DYNAMICS</a:t>
             </a:r>
           </a:p>
         </p:txBody>
@@ -6571,14 +6506,14 @@
           <a:lstStyle/>
           <a:p>
             <a:pPr>
-              <a:defRPr sz="2100" b="1">
+              <a:defRPr sz="2200" b="1">
                 <a:solidFill>
                   <a:srgbClr val="F8FAFC"/>
                 </a:solidFill>
               </a:defRPr>
             </a:pPr>
             <a:r>
-              <a:t>Enterprise Security, 4-Tier RBAC &amp; Analytics Dashboard</a:t>
+              <a:t>Tarot Spread Engine &amp; Symbolic Mechanics</a:t>
             </a:r>
           </a:p>
         </p:txBody>
@@ -6591,8 +6526,8 @@
         </p:nvSpPr>
         <p:spPr>
           <a:xfrm>
-            <a:off x="10332720" y="411480"/>
-            <a:ext cx="1097280" cy="365760"/>
+            <a:off x="10241280" y="365760"/>
+            <a:ext cx="1188720" cy="320040"/>
           </a:xfrm>
           <a:prstGeom prst="rect">
             <a:avLst/>
@@ -6600,20 +6535,20 @@
           <a:noFill/>
         </p:spPr>
         <p:txBody>
-          <a:bodyPr wrap="none">
+          <a:bodyPr wrap="none" rIns="0">
             <a:spAutoFit/>
           </a:bodyPr>
           <a:lstStyle/>
           <a:p>
             <a:pPr algn="r">
-              <a:defRPr sz="1300" b="1">
+              <a:defRPr sz="1100" b="1">
                 <a:solidFill>
                   <a:srgbClr val="94A3B8"/>
                 </a:solidFill>
               </a:defRPr>
             </a:pPr>
             <a:r>
-              <a:t>05 / 07</a:t>
+              <a:t>05 / 10</a:t>
             </a:r>
           </a:p>
         </p:txBody>
@@ -6626,8 +6561,8 @@
         </p:nvSpPr>
         <p:spPr>
           <a:xfrm>
-            <a:off x="731520" y="1188720"/>
-            <a:ext cx="10728655" cy="18288"/>
+            <a:off x="731520" y="1234440"/>
+            <a:ext cx="10728655" cy="13716"/>
           </a:xfrm>
           <a:prstGeom prst="rect">
             <a:avLst/>
@@ -6669,8 +6604,8 @@
         </p:nvSpPr>
         <p:spPr>
           <a:xfrm>
-            <a:off x="658368" y="1298448"/>
-            <a:ext cx="5358384" cy="4160520"/>
+            <a:off x="731520" y="1463040"/>
+            <a:ext cx="3456432" cy="4754880"/>
           </a:xfrm>
           <a:prstGeom prst="roundRect">
             <a:avLst/>
@@ -6678,9 +6613,9 @@
           <a:solidFill>
             <a:srgbClr val="131D31"/>
           </a:solidFill>
-          <a:ln w="19050">
+          <a:ln w="12700">
             <a:solidFill>
-              <a:srgbClr val="283854"/>
+              <a:srgbClr val="F59E0B"/>
             </a:solidFill>
           </a:ln>
         </p:spPr>
@@ -6714,8 +6649,8 @@
         </p:nvSpPr>
         <p:spPr>
           <a:xfrm>
-            <a:off x="731520" y="1353312"/>
-            <a:ext cx="3648456" cy="274320"/>
+            <a:off x="960120" y="1691640"/>
+            <a:ext cx="2999232" cy="4297680"/>
           </a:xfrm>
           <a:prstGeom prst="rect">
             <a:avLst/>
@@ -6723,34 +6658,151 @@
           <a:noFill/>
         </p:spPr>
         <p:txBody>
-          <a:bodyPr wrap="none" lIns="0" tIns="0">
+          <a:bodyPr wrap="square" lIns="0" tIns="0">
             <a:spAutoFit/>
           </a:bodyPr>
           <a:lstStyle/>
           <a:p>
             <a:pPr>
-              <a:defRPr sz="950" b="1">
-                <a:solidFill>
-                  <a:srgbClr val="38BDF8"/>
-                </a:solidFill>
-              </a:defRPr>
-            </a:pPr>
-            <a:r>
-              <a:t>🖥️  USER ANALYTICS &amp; PROFILE DASHBOARD</a:t>
-            </a:r>
-          </a:p>
-        </p:txBody>
-      </p:sp>
-      <p:sp>
-        <p:nvSpPr>
-          <p:cNvPr id="10" name="TextBox 9"/>
+              <a:defRPr sz="1100" b="1">
+                <a:solidFill>
+                  <a:srgbClr val="F59E0B"/>
+                </a:solidFill>
+              </a:defRPr>
+            </a:pPr>
+            <a:r>
+              <a:t>78-CARD CANONICAL DECK</a:t>
+            </a:r>
+          </a:p>
+          <a:p>
+            <a:pPr>
+              <a:defRPr sz="1400" b="1">
+                <a:solidFill>
+                  <a:srgbClr val="F8FAFC"/>
+                </a:solidFill>
+              </a:defRPr>
+            </a:pPr>
+            <a:r>
+              <a:t>Archetype Engine</a:t>
+            </a:r>
+          </a:p>
+          <a:p>
+            <a:pPr>
+              <a:defRPr sz="800">
+                <a:solidFill>
+                  <a:srgbClr val="283854"/>
+                </a:solidFill>
+              </a:defRPr>
+            </a:pPr>
+            <a:r>
+              <a:t>─────────────────────</a:t>
+            </a:r>
+          </a:p>
+          <a:p>
+            <a:pPr>
+              <a:defRPr sz="1000">
+                <a:solidFill>
+                  <a:srgbClr val="CBD5E1"/>
+                </a:solidFill>
+              </a:defRPr>
+            </a:pPr>
+            <a:r>
+              <a:t>✦ 22 Major Arcana: Universal life lessons, soul evolutions &amp; core archetypes</a:t>
+            </a:r>
+          </a:p>
+          <a:p>
+            <a:pPr>
+              <a:defRPr sz="1000">
+                <a:solidFill>
+                  <a:srgbClr val="CBD5E1"/>
+                </a:solidFill>
+              </a:defRPr>
+            </a:pPr>
+            <a:r>
+              <a:t>✦ 56 Minor Arcana: Practical day-to-day challenges &amp; opportunities</a:t>
+            </a:r>
+          </a:p>
+          <a:p>
+            <a:pPr>
+              <a:defRPr sz="1000">
+                <a:solidFill>
+                  <a:srgbClr val="CBD5E1"/>
+                </a:solidFill>
+              </a:defRPr>
+            </a:pPr>
+            <a:r>
+              <a:t>✦ 4 Suits: Wands (Fire), Cups (Water), Swords (Air), Pentacles (Earth)</a:t>
+            </a:r>
+          </a:p>
+          <a:p>
+            <a:pPr>
+              <a:defRPr sz="1000">
+                <a:solidFill>
+                  <a:srgbClr val="CBD5E1"/>
+                </a:solidFill>
+              </a:defRPr>
+            </a:pPr>
+            <a:r>
+              <a:t>✦ Dual Polarity: Upright (direct flow) vs Inverted/Reversed (shadow/blocked)</a:t>
+            </a:r>
+          </a:p>
+        </p:txBody>
+      </p:sp>
+      <p:sp>
+        <p:nvSpPr>
+          <p:cNvPr id="10" name="Rounded Rectangle 9"/>
+          <p:cNvSpPr/>
+          <p:nvPr/>
+        </p:nvSpPr>
+        <p:spPr>
+          <a:xfrm>
+            <a:off x="4370832" y="1463040"/>
+            <a:ext cx="3456432" cy="4754880"/>
+          </a:xfrm>
+          <a:prstGeom prst="roundRect">
+            <a:avLst/>
+          </a:prstGeom>
+          <a:solidFill>
+            <a:srgbClr val="131D31"/>
+          </a:solidFill>
+          <a:ln w="12700">
+            <a:solidFill>
+              <a:srgbClr val="38BDF8"/>
+            </a:solidFill>
+          </a:ln>
+        </p:spPr>
+        <p:style>
+          <a:lnRef idx="1">
+            <a:schemeClr val="accent1"/>
+          </a:lnRef>
+          <a:fillRef idx="3">
+            <a:schemeClr val="accent1"/>
+          </a:fillRef>
+          <a:effectRef idx="2">
+            <a:schemeClr val="accent1"/>
+          </a:effectRef>
+          <a:fontRef idx="minor">
+            <a:schemeClr val="lt1"/>
+          </a:fontRef>
+        </p:style>
+        <p:txBody>
+          <a:bodyPr rtlCol="0" anchor="ctr"/>
+          <a:lstStyle/>
+          <a:p>
+            <a:pPr algn="ctr"/>
+          </a:p>
+        </p:txBody>
+      </p:sp>
+      <p:sp>
+        <p:nvSpPr>
+          <p:cNvPr id="11" name="TextBox 10"/>
           <p:cNvSpPr txBox="1"/>
           <p:nvPr/>
         </p:nvSpPr>
         <p:spPr>
           <a:xfrm>
-            <a:off x="4480560" y="1353312"/>
-            <a:ext cx="1463040" cy="274320"/>
+            <a:off x="4599432" y="1691640"/>
+            <a:ext cx="2999232" cy="4297680"/>
           </a:xfrm>
           <a:prstGeom prst="rect">
             <a:avLst/>
@@ -6758,48 +6810,108 @@
           <a:noFill/>
         </p:spPr>
         <p:txBody>
-          <a:bodyPr wrap="none" rIns="0" tIns="0">
+          <a:bodyPr wrap="square" lIns="0" tIns="0">
             <a:spAutoFit/>
           </a:bodyPr>
           <a:lstStyle/>
           <a:p>
-            <a:pPr algn="r">
-              <a:defRPr sz="900" b="1">
-                <a:solidFill>
-                  <a:srgbClr val="10B981"/>
-                </a:solidFill>
-              </a:defRPr>
-            </a:pPr>
-            <a:r>
-              <a:t>● 4 ROLES ACTIVE</a:t>
-            </a:r>
-          </a:p>
-        </p:txBody>
-      </p:sp>
-      <p:pic>
-        <p:nvPicPr>
-          <p:cNvPr id="11" name="Picture 10" descr="website_dashboard_profile.jpg"/>
-          <p:cNvPicPr>
-            <a:picLocks noChangeAspect="1"/>
-          </p:cNvPicPr>
-          <p:nvPr/>
-        </p:nvPicPr>
-        <p:blipFill>
-          <a:blip r:embed="rId2"/>
-          <a:stretch>
-            <a:fillRect/>
-          </a:stretch>
-        </p:blipFill>
-        <p:spPr>
-          <a:xfrm>
-            <a:off x="731520" y="1645920"/>
-            <a:ext cx="5212080" cy="3611880"/>
-          </a:xfrm>
-          <a:prstGeom prst="rect">
-            <a:avLst/>
-          </a:prstGeom>
-        </p:spPr>
-      </p:pic>
+            <a:pPr>
+              <a:defRPr sz="1100" b="1">
+                <a:solidFill>
+                  <a:srgbClr val="38BDF8"/>
+                </a:solidFill>
+              </a:defRPr>
+            </a:pPr>
+            <a:r>
+              <a:t>6 SPREAD ARCHITECTURES</a:t>
+            </a:r>
+          </a:p>
+          <a:p>
+            <a:pPr>
+              <a:defRPr sz="1400" b="1">
+                <a:solidFill>
+                  <a:srgbClr val="F8FAFC"/>
+                </a:solidFill>
+              </a:defRPr>
+            </a:pPr>
+            <a:r>
+              <a:t>Spatial Context</a:t>
+            </a:r>
+          </a:p>
+          <a:p>
+            <a:pPr>
+              <a:defRPr sz="800">
+                <a:solidFill>
+                  <a:srgbClr val="283854"/>
+                </a:solidFill>
+              </a:defRPr>
+            </a:pPr>
+            <a:r>
+              <a:t>─────────────────────</a:t>
+            </a:r>
+          </a:p>
+          <a:p>
+            <a:pPr>
+              <a:defRPr sz="1000">
+                <a:solidFill>
+                  <a:srgbClr val="CBD5E1"/>
+                </a:solidFill>
+              </a:defRPr>
+            </a:pPr>
+            <a:r>
+              <a:t>✦ Single Card Draw: Instant daily spiritual beacon &amp; morning focus</a:t>
+            </a:r>
+          </a:p>
+          <a:p>
+            <a:pPr>
+              <a:defRPr sz="1000">
+                <a:solidFill>
+                  <a:srgbClr val="CBD5E1"/>
+                </a:solidFill>
+              </a:defRPr>
+            </a:pPr>
+            <a:r>
+              <a:t>✦ Three-Card Spread: Linear Past, Present, and Future continuum</a:t>
+            </a:r>
+          </a:p>
+          <a:p>
+            <a:pPr>
+              <a:defRPr sz="1000">
+                <a:solidFill>
+                  <a:srgbClr val="CBD5E1"/>
+                </a:solidFill>
+              </a:defRPr>
+            </a:pPr>
+            <a:r>
+              <a:t>✦ Five-Card Cross: Core conflict, subconscious desires, and obstacle resolution</a:t>
+            </a:r>
+          </a:p>
+          <a:p>
+            <a:pPr>
+              <a:defRPr sz="1000">
+                <a:solidFill>
+                  <a:srgbClr val="CBD5E1"/>
+                </a:solidFill>
+              </a:defRPr>
+            </a:pPr>
+            <a:r>
+              <a:t>✦ Celtic Cross (10 Cards): Full psychological audit &amp; longitudinal outcome</a:t>
+            </a:r>
+          </a:p>
+          <a:p>
+            <a:pPr>
+              <a:defRPr sz="1000">
+                <a:solidFill>
+                  <a:srgbClr val="CBD5E1"/>
+                </a:solidFill>
+              </a:defRPr>
+            </a:pPr>
+            <a:r>
+              <a:t>✦ Custom Spreads: Configurable layouts for professional reader consultations</a:t>
+            </a:r>
+          </a:p>
+        </p:txBody>
+      </p:sp>
       <p:sp>
         <p:nvSpPr>
           <p:cNvPr id="12" name="Rounded Rectangle 11"/>
@@ -6808,14 +6920,14 @@
         </p:nvSpPr>
         <p:spPr>
           <a:xfrm>
-            <a:off x="731520" y="5394960"/>
-            <a:ext cx="5212080" cy="1143000"/>
+            <a:off x="8010144" y="1463040"/>
+            <a:ext cx="3456432" cy="4754880"/>
           </a:xfrm>
           <a:prstGeom prst="roundRect">
             <a:avLst/>
           </a:prstGeom>
           <a:solidFill>
-            <a:srgbClr val="1C2944"/>
+            <a:srgbClr val="131D31"/>
           </a:solidFill>
           <a:ln w="12700">
             <a:solidFill>
@@ -6853,8 +6965,8 @@
         </p:nvSpPr>
         <p:spPr>
           <a:xfrm>
-            <a:off x="868680" y="5468112"/>
-            <a:ext cx="4937760" cy="1005840"/>
+            <a:off x="8238744" y="1691640"/>
+            <a:ext cx="2999232" cy="4297680"/>
           </a:xfrm>
           <a:prstGeom prst="rect">
             <a:avLst/>
@@ -6862,7 +6974,7 @@
           <a:noFill/>
         </p:spPr>
         <p:txBody>
-          <a:bodyPr wrap="square">
+          <a:bodyPr wrap="square" lIns="0" tIns="0">
             <a:spAutoFit/>
           </a:bodyPr>
           <a:lstStyle/>
@@ -6875,307 +6987,79 @@
               </a:defRPr>
             </a:pPr>
             <a:r>
-              <a:t>🔐 Enterprise Security &amp; Token Lifecycle:</a:t>
-            </a:r>
-          </a:p>
-          <a:p>
-            <a:pPr>
-              <a:defRPr sz="950">
+              <a:t>ELEMENTAL BALANCE MODEL</a:t>
+            </a:r>
+          </a:p>
+          <a:p>
+            <a:pPr>
+              <a:defRPr sz="1400" b="1">
+                <a:solidFill>
+                  <a:srgbClr val="F8FAFC"/>
+                </a:solidFill>
+              </a:defRPr>
+            </a:pPr>
+            <a:r>
+              <a:t>Harmonic Scoring</a:t>
+            </a:r>
+          </a:p>
+          <a:p>
+            <a:pPr>
+              <a:defRPr sz="800">
+                <a:solidFill>
+                  <a:srgbClr val="283854"/>
+                </a:solidFill>
+              </a:defRPr>
+            </a:pPr>
+            <a:r>
+              <a:t>─────────────────────</a:t>
+            </a:r>
+          </a:p>
+          <a:p>
+            <a:pPr>
+              <a:defRPr sz="1000">
                 <a:solidFill>
                   <a:srgbClr val="CBD5E1"/>
                 </a:solidFill>
               </a:defRPr>
             </a:pPr>
             <a:r>
-              <a:t>Bcrypt password hashing · HMAC-SHA256 JWT tokens · Redis token blacklisting on logout · CORS &amp; Rate limiters</a:t>
-            </a:r>
-          </a:p>
-        </p:txBody>
-      </p:sp>
-      <p:sp>
-        <p:nvSpPr>
-          <p:cNvPr id="14" name="Rounded Rectangle 13"/>
-          <p:cNvSpPr/>
-          <p:nvPr/>
-        </p:nvSpPr>
-        <p:spPr>
-          <a:xfrm>
-            <a:off x="6217920" y="1371600"/>
-            <a:ext cx="5212080" cy="2468880"/>
-          </a:xfrm>
-          <a:prstGeom prst="roundRect">
-            <a:avLst/>
-          </a:prstGeom>
-          <a:solidFill>
-            <a:srgbClr val="131D31"/>
-          </a:solidFill>
-          <a:ln w="12700">
-            <a:solidFill>
-              <a:srgbClr val="283854"/>
-            </a:solidFill>
-          </a:ln>
-        </p:spPr>
-        <p:style>
-          <a:lnRef idx="1">
-            <a:schemeClr val="accent1"/>
-          </a:lnRef>
-          <a:fillRef idx="3">
-            <a:schemeClr val="accent1"/>
-          </a:fillRef>
-          <a:effectRef idx="2">
-            <a:schemeClr val="accent1"/>
-          </a:effectRef>
-          <a:fontRef idx="minor">
-            <a:schemeClr val="lt1"/>
-          </a:fontRef>
-        </p:style>
-        <p:txBody>
-          <a:bodyPr rtlCol="0" anchor="ctr"/>
-          <a:lstStyle/>
-          <a:p>
-            <a:pPr algn="ctr"/>
-          </a:p>
-        </p:txBody>
-      </p:sp>
-      <p:sp>
-        <p:nvSpPr>
-          <p:cNvPr id="15" name="TextBox 14"/>
-          <p:cNvSpPr txBox="1"/>
-          <p:nvPr/>
-        </p:nvSpPr>
-        <p:spPr>
-          <a:xfrm>
-            <a:off x="6400800" y="1463040"/>
-            <a:ext cx="4846320" cy="2286000"/>
-          </a:xfrm>
-          <a:prstGeom prst="rect">
-            <a:avLst/>
-          </a:prstGeom>
-          <a:noFill/>
-        </p:spPr>
-        <p:txBody>
-          <a:bodyPr wrap="square">
-            <a:spAutoFit/>
-          </a:bodyPr>
-          <a:lstStyle/>
-          <a:p>
-            <a:pPr>
-              <a:defRPr sz="1250" b="1">
-                <a:solidFill>
-                  <a:srgbClr val="38BDF8"/>
-                </a:solidFill>
-              </a:defRPr>
-            </a:pPr>
-            <a:r>
-              <a:t>👥 4-Tier Role-Based Access Control (RBAC)</a:t>
-            </a:r>
-          </a:p>
-          <a:p>
-            <a:pPr>
-              <a:defRPr sz="950" b="1">
-                <a:solidFill>
-                  <a:srgbClr val="F8FAFC"/>
-                </a:solidFill>
-              </a:defRPr>
-            </a:pPr>
-            <a:r>
-              <a:t>🔮 Seeker (End User): </a:t>
-            </a:r>
-            <a:r>
-              <a:rPr b="0">
+              <a:t>✦ Computes Fire/Water/Air/Earth balance across all revealed cards</a:t>
+            </a:r>
+          </a:p>
+          <a:p>
+            <a:pPr>
+              <a:defRPr sz="1000">
                 <a:solidFill>
                   <a:srgbClr val="CBD5E1"/>
                 </a:solidFill>
-              </a:rPr>
-              <a:t>Perform personal Tarot &amp; Palm readings, chat with AI, view history</a:t>
-            </a:r>
-          </a:p>
-          <a:p>
-            <a:pPr>
-              <a:defRPr sz="950" b="1">
-                <a:solidFill>
-                  <a:srgbClr val="F8FAFC"/>
-                </a:solidFill>
-              </a:defRPr>
-            </a:pPr>
-            <a:r>
-              <a:t>🃏 Tarot Reader: </a:t>
-            </a:r>
-            <a:r>
-              <a:rPr b="0">
+              </a:defRPr>
+            </a:pPr>
+            <a:r>
+              <a:t>✦ Detects elemental deficits (e.g., low Earth indicates lack of grounding)</a:t>
+            </a:r>
+          </a:p>
+          <a:p>
+            <a:pPr>
+              <a:defRPr sz="1000">
                 <a:solidFill>
                   <a:srgbClr val="CBD5E1"/>
                 </a:solidFill>
-              </a:rPr>
-              <a:t>Manage client readings, customize interpretations, annotate spreads</a:t>
-            </a:r>
-          </a:p>
-          <a:p>
-            <a:pPr>
-              <a:defRPr sz="950" b="1">
-                <a:solidFill>
-                  <a:srgbClr val="F8FAFC"/>
-                </a:solidFill>
-              </a:defRPr>
-            </a:pPr>
-            <a:r>
-              <a:t>🌿 Consultant: </a:t>
-            </a:r>
-            <a:r>
-              <a:rPr b="0">
+              </a:defRPr>
+            </a:pPr>
+            <a:r>
+              <a:t>✦ Dynamic card synergy &amp; tension modeling based on adjacent positions</a:t>
+            </a:r>
+          </a:p>
+          <a:p>
+            <a:pPr>
+              <a:defRPr sz="1000">
                 <a:solidFill>
                   <a:srgbClr val="CBD5E1"/>
                 </a:solidFill>
-              </a:rPr>
-              <a:t>Access holistic life trend reports, suggest lifestyle remedies &amp; crystals</a:t>
-            </a:r>
-          </a:p>
-          <a:p>
-            <a:pPr>
-              <a:defRPr sz="950" b="1">
-                <a:solidFill>
-                  <a:srgbClr val="F8FAFC"/>
-                </a:solidFill>
-              </a:defRPr>
-            </a:pPr>
-            <a:r>
-              <a:t>👑 Administrator: </a:t>
-            </a:r>
-            <a:r>
-              <a:rPr b="0">
-                <a:solidFill>
-                  <a:srgbClr val="CBD5E1"/>
-                </a:solidFill>
-              </a:rPr>
-              <a:t>Full user CRUD, system metrics, dataset moderation &amp; audit logs</a:t>
-            </a:r>
-          </a:p>
-        </p:txBody>
-      </p:sp>
-      <p:sp>
-        <p:nvSpPr>
-          <p:cNvPr id="16" name="Rounded Rectangle 15"/>
-          <p:cNvSpPr/>
-          <p:nvPr/>
-        </p:nvSpPr>
-        <p:spPr>
-          <a:xfrm>
-            <a:off x="6217920" y="4023360"/>
-            <a:ext cx="5212080" cy="2514600"/>
-          </a:xfrm>
-          <a:prstGeom prst="roundRect">
-            <a:avLst/>
-          </a:prstGeom>
-          <a:solidFill>
-            <a:srgbClr val="131D31"/>
-          </a:solidFill>
-          <a:ln w="12700">
-            <a:solidFill>
-              <a:srgbClr val="283854"/>
-            </a:solidFill>
-          </a:ln>
-        </p:spPr>
-        <p:style>
-          <a:lnRef idx="1">
-            <a:schemeClr val="accent1"/>
-          </a:lnRef>
-          <a:fillRef idx="3">
-            <a:schemeClr val="accent1"/>
-          </a:fillRef>
-          <a:effectRef idx="2">
-            <a:schemeClr val="accent1"/>
-          </a:effectRef>
-          <a:fontRef idx="minor">
-            <a:schemeClr val="lt1"/>
-          </a:fontRef>
-        </p:style>
-        <p:txBody>
-          <a:bodyPr rtlCol="0" anchor="ctr"/>
-          <a:lstStyle/>
-          <a:p>
-            <a:pPr algn="ctr"/>
-          </a:p>
-        </p:txBody>
-      </p:sp>
-      <p:sp>
-        <p:nvSpPr>
-          <p:cNvPr id="17" name="TextBox 16"/>
-          <p:cNvSpPr txBox="1"/>
-          <p:nvPr/>
-        </p:nvSpPr>
-        <p:spPr>
-          <a:xfrm>
-            <a:off x="6400800" y="4114800"/>
-            <a:ext cx="4846320" cy="2286000"/>
-          </a:xfrm>
-          <a:prstGeom prst="rect">
-            <a:avLst/>
-          </a:prstGeom>
-          <a:noFill/>
-        </p:spPr>
-        <p:txBody>
-          <a:bodyPr wrap="square">
-            <a:spAutoFit/>
-          </a:bodyPr>
-          <a:lstStyle/>
-          <a:p>
-            <a:pPr>
-              <a:defRPr sz="1250" b="1">
-                <a:solidFill>
-                  <a:srgbClr val="A855F7"/>
-                </a:solidFill>
-              </a:defRPr>
-            </a:pPr>
-            <a:r>
-              <a:t>📈 Life Trend Analytics &amp; Opportunity Forecasting</a:t>
-            </a:r>
-          </a:p>
-          <a:p>
-            <a:pPr>
-              <a:defRPr sz="950">
-                <a:solidFill>
-                  <a:srgbClr val="CBD5E1"/>
-                </a:solidFill>
-              </a:defRPr>
-            </a:pPr>
-            <a:r>
-              <a:t>▪  Historical Pattern Detection: Tracks recurring Arcana suits (Cups, Wands, Swords, Pentacles) across user timeline</a:t>
-            </a:r>
-          </a:p>
-          <a:p>
-            <a:pPr>
-              <a:defRPr sz="950">
-                <a:solidFill>
-                  <a:srgbClr val="CBD5E1"/>
-                </a:solidFill>
-              </a:defRPr>
-            </a:pPr>
-            <a:r>
-              <a:t>▪  Emotional &amp; Career Forecasts: Identifies upcoming astrological peaks &amp; growth opportunities</a:t>
-            </a:r>
-          </a:p>
-          <a:p>
-            <a:pPr>
-              <a:defRPr sz="950">
-                <a:solidFill>
-                  <a:srgbClr val="CBD5E1"/>
-                </a:solidFill>
-              </a:defRPr>
-            </a:pPr>
-            <a:r>
-              <a:t>▪  Confidence &amp; Harmony Scoring: Real-time statistical confidence metrics based on line clarity &amp; card synergy</a:t>
-            </a:r>
-          </a:p>
-          <a:p>
-            <a:pPr>
-              <a:defRPr sz="950">
-                <a:solidFill>
-                  <a:srgbClr val="CBD5E1"/>
-                </a:solidFill>
-              </a:defRPr>
-            </a:pPr>
-            <a:r>
-              <a:t>▪  Multi-Format Reporting: Instant one-click export to PDF / DOCX full spiritual dossiers</a:t>
+              </a:defRPr>
+            </a:pPr>
+            <a:r>
+              <a:t>✦ Feeds mathematical distribution directly into the AI Synthesis Engine</a:t>
             </a:r>
           </a:p>
         </p:txBody>
@@ -7309,12 +7193,12 @@
             <a:pPr>
               <a:defRPr sz="1050" b="1">
                 <a:solidFill>
-                  <a:srgbClr val="10B981"/>
-                </a:solidFill>
-              </a:defRPr>
-            </a:pPr>
-            <a:r>
-              <a:t>INFOSYS SPRINGBOARD MILESTONES REVIEW</a:t>
+                  <a:srgbClr val="A855F7"/>
+                </a:solidFill>
+              </a:defRPr>
+            </a:pPr>
+            <a:r>
+              <a:t>05. INTELLIGENCE SYNTHESIS</a:t>
             </a:r>
           </a:p>
         </p:txBody>
@@ -7342,14 +7226,14 @@
           <a:lstStyle/>
           <a:p>
             <a:pPr>
-              <a:defRPr sz="2100" b="1">
+              <a:defRPr sz="2200" b="1">
                 <a:solidFill>
                   <a:srgbClr val="F8FAFC"/>
                 </a:solidFill>
               </a:defRPr>
             </a:pPr>
             <a:r>
-              <a:t>Comprehensive Milestone Delivery: 100% Completion (M1 - M4)</a:t>
+              <a:t>AI Synthesis &amp; 5-Factor Confidence Model</a:t>
             </a:r>
           </a:p>
         </p:txBody>
@@ -7362,8 +7246,8 @@
         </p:nvSpPr>
         <p:spPr>
           <a:xfrm>
-            <a:off x="10332720" y="411480"/>
-            <a:ext cx="1097280" cy="365760"/>
+            <a:off x="10241280" y="365760"/>
+            <a:ext cx="1188720" cy="320040"/>
           </a:xfrm>
           <a:prstGeom prst="rect">
             <a:avLst/>
@@ -7371,20 +7255,20 @@
           <a:noFill/>
         </p:spPr>
         <p:txBody>
-          <a:bodyPr wrap="none">
+          <a:bodyPr wrap="none" rIns="0">
             <a:spAutoFit/>
           </a:bodyPr>
           <a:lstStyle/>
           <a:p>
             <a:pPr algn="r">
-              <a:defRPr sz="1300" b="1">
+              <a:defRPr sz="1100" b="1">
                 <a:solidFill>
                   <a:srgbClr val="94A3B8"/>
                 </a:solidFill>
               </a:defRPr>
             </a:pPr>
             <a:r>
-              <a:t>06 / 07</a:t>
+              <a:t>06 / 10</a:t>
             </a:r>
           </a:p>
         </p:txBody>
@@ -7397,8 +7281,8 @@
         </p:nvSpPr>
         <p:spPr>
           <a:xfrm>
-            <a:off x="731520" y="1188720"/>
-            <a:ext cx="10728655" cy="18288"/>
+            <a:off x="731520" y="1234440"/>
+            <a:ext cx="10728655" cy="13716"/>
           </a:xfrm>
           <a:prstGeom prst="rect">
             <a:avLst/>
@@ -7440,8 +7324,8 @@
         </p:nvSpPr>
         <p:spPr>
           <a:xfrm>
-            <a:off x="731520" y="1371600"/>
-            <a:ext cx="5257800" cy="2487168"/>
+            <a:off x="731520" y="1463040"/>
+            <a:ext cx="5212080" cy="4754880"/>
           </a:xfrm>
           <a:prstGeom prst="roundRect">
             <a:avLst/>
@@ -7449,9 +7333,9 @@
           <a:solidFill>
             <a:srgbClr val="131D31"/>
           </a:solidFill>
-          <a:ln w="15240">
+          <a:ln w="12700">
             <a:solidFill>
-              <a:srgbClr val="283854"/>
+              <a:srgbClr val="A855F7"/>
             </a:solidFill>
           </a:ln>
         </p:spPr>
@@ -7485,8 +7369,8 @@
         </p:nvSpPr>
         <p:spPr>
           <a:xfrm>
-            <a:off x="868680" y="1444752"/>
-            <a:ext cx="3840480" cy="292608"/>
+            <a:off x="1005840" y="1691640"/>
+            <a:ext cx="4663440" cy="4297680"/>
           </a:xfrm>
           <a:prstGeom prst="rect">
             <a:avLst/>
@@ -7500,72 +7384,123 @@
           <a:lstStyle/>
           <a:p>
             <a:pPr>
+              <a:defRPr sz="1300" b="1">
+                <a:solidFill>
+                  <a:srgbClr val="A855F7"/>
+                </a:solidFill>
+              </a:defRPr>
+            </a:pPr>
+            <a:r>
+              <a:t>CROSS-MODAL SYNTHESIS &amp; PSYCHOLOGY</a:t>
+            </a:r>
+          </a:p>
+          <a:p>
+            <a:pPr>
+              <a:defRPr sz="1000">
+                <a:solidFill>
+                  <a:srgbClr val="CBD5E1"/>
+                </a:solidFill>
+              </a:defRPr>
+            </a:pPr>
+            <a:r>
+              <a:t>Correlates biological palm traits with symbolic tarot draws to formulate:</a:t>
+            </a:r>
+          </a:p>
+          <a:p>
+            <a:pPr>
               <a:defRPr sz="1100" b="1">
                 <a:solidFill>
-                  <a:srgbClr val="38BDF8"/>
-                </a:solidFill>
-              </a:defRPr>
-            </a:pPr>
-            <a:r>
-              <a:t>MILESTONE 1: Foundations, Polyglot DB &amp; RBAC</a:t>
-            </a:r>
-          </a:p>
-        </p:txBody>
-      </p:sp>
-      <p:sp>
-        <p:nvSpPr>
-          <p:cNvPr id="10" name="TextBox 9"/>
-          <p:cNvSpPr txBox="1"/>
-          <p:nvPr/>
-        </p:nvSpPr>
-        <p:spPr>
-          <a:xfrm>
-            <a:off x="4572000" y="1444752"/>
-            <a:ext cx="1280160" cy="292608"/>
-          </a:xfrm>
-          <a:prstGeom prst="rect">
-            <a:avLst/>
-          </a:prstGeom>
-          <a:noFill/>
-        </p:spPr>
-        <p:txBody>
-          <a:bodyPr wrap="none" rIns="0" tIns="0">
-            <a:spAutoFit/>
-          </a:bodyPr>
-          <a:lstStyle/>
-          <a:p>
-            <a:pPr algn="r">
-              <a:defRPr sz="850" b="1">
-                <a:solidFill>
-                  <a:srgbClr val="10B981"/>
-                </a:solidFill>
-              </a:defRPr>
-            </a:pPr>
-            <a:r>
-              <a:t>● 100% DELIVERED</a:t>
-            </a:r>
-          </a:p>
-        </p:txBody>
-      </p:sp>
-      <p:sp>
-        <p:nvSpPr>
-          <p:cNvPr id="11" name="Rectangle 10"/>
+                  <a:srgbClr val="F8FAFC"/>
+                </a:solidFill>
+              </a:defRPr>
+            </a:pPr>
+            <a:r>
+              <a:t>✦ 7 Holistic Life Domains</a:t>
+            </a:r>
+          </a:p>
+          <a:p>
+            <a:pPr>
+              <a:defRPr sz="950">
+                <a:solidFill>
+                  <a:srgbClr val="CBD5E1"/>
+                </a:solidFill>
+              </a:defRPr>
+            </a:pPr>
+            <a:r>
+              <a:t>Synthesizes career, emotional vitality, spiritual purpose, love, wealth, mental resilience &amp; creativity.</a:t>
+            </a:r>
+          </a:p>
+          <a:p>
+            <a:pPr>
+              <a:defRPr sz="1100" b="1">
+                <a:solidFill>
+                  <a:srgbClr val="F8FAFC"/>
+                </a:solidFill>
+              </a:defRPr>
+            </a:pPr>
+            <a:r>
+              <a:t>✦ Big Five (OCEAN) Profiling</a:t>
+            </a:r>
+          </a:p>
+          <a:p>
+            <a:pPr>
+              <a:defRPr sz="950">
+                <a:solidFill>
+                  <a:srgbClr val="CBD5E1"/>
+                </a:solidFill>
+              </a:defRPr>
+            </a:pPr>
+            <a:r>
+              <a:t>Generates quantitative ratings for Openness, Conscientiousness, Extraversion, Agreeableness, and Neuroticism.</a:t>
+            </a:r>
+          </a:p>
+          <a:p>
+            <a:pPr>
+              <a:defRPr sz="1100" b="1">
+                <a:solidFill>
+                  <a:srgbClr val="F8FAFC"/>
+                </a:solidFill>
+              </a:defRPr>
+            </a:pPr>
+            <a:r>
+              <a:t>✦ Actionable Life Recommendations</a:t>
+            </a:r>
+          </a:p>
+          <a:p>
+            <a:pPr>
+              <a:defRPr sz="950">
+                <a:solidFill>
+                  <a:srgbClr val="CBD5E1"/>
+                </a:solidFill>
+              </a:defRPr>
+            </a:pPr>
+            <a:r>
+              <a:t>Produces concrete, goal-oriented daily guidance instead of vague generic prophecies.</a:t>
+            </a:r>
+          </a:p>
+        </p:txBody>
+      </p:sp>
+      <p:sp>
+        <p:nvSpPr>
+          <p:cNvPr id="10" name="Rounded Rectangle 9"/>
           <p:cNvSpPr/>
           <p:nvPr/>
         </p:nvSpPr>
         <p:spPr>
           <a:xfrm>
-            <a:off x="868680" y="1755648"/>
-            <a:ext cx="4983480" cy="13716"/>
-          </a:xfrm>
-          <a:prstGeom prst="rect">
+            <a:off x="6248095" y="1463040"/>
+            <a:ext cx="5212080" cy="4754880"/>
+          </a:xfrm>
+          <a:prstGeom prst="roundRect">
             <a:avLst/>
           </a:prstGeom>
           <a:solidFill>
-            <a:srgbClr val="283854"/>
+            <a:srgbClr val="131D31"/>
           </a:solidFill>
-          <a:ln>
-            <a:noFill/>
+          <a:ln w="12700">
+            <a:solidFill>
+              <a:srgbClr val="38BDF8"/>
+            </a:solidFill>
           </a:ln>
         </p:spPr>
         <p:style>
@@ -7592,14 +7527,14 @@
       </p:sp>
       <p:sp>
         <p:nvSpPr>
-          <p:cNvPr id="12" name="TextBox 11"/>
+          <p:cNvPr id="11" name="TextBox 10"/>
           <p:cNvSpPr txBox="1"/>
           <p:nvPr/>
         </p:nvSpPr>
         <p:spPr>
           <a:xfrm>
-            <a:off x="868680" y="1810512"/>
-            <a:ext cx="4983480" cy="1965960"/>
+            <a:off x="6522415" y="1691640"/>
+            <a:ext cx="4663440" cy="4297680"/>
           </a:xfrm>
           <a:prstGeom prst="rect">
             <a:avLst/>
@@ -7613,945 +7548,134 @@
           <a:lstStyle/>
           <a:p>
             <a:pPr>
-              <a:defRPr sz="919" b="1">
-                <a:solidFill>
-                  <a:srgbClr val="F8FAFC"/>
-                </a:solidFill>
-              </a:defRPr>
-            </a:pPr>
-            <a:r>
-              <a:t>▪ ⚡ FastAPI Async Core: </a:t>
-            </a:r>
-            <a:r>
-              <a:rPr b="0">
+              <a:defRPr sz="1300" b="1">
+                <a:solidFill>
+                  <a:srgbClr val="38BDF8"/>
+                </a:solidFill>
+              </a:defRPr>
+            </a:pPr>
+            <a:r>
+              <a:t>5-FACTOR WEIGHTED CONFIDENCE ALGORITHM</a:t>
+            </a:r>
+          </a:p>
+          <a:p>
+            <a:pPr>
+              <a:defRPr sz="1100" b="1">
+                <a:solidFill>
+                  <a:srgbClr val="F59E0B"/>
+                </a:solidFill>
+              </a:defRPr>
+            </a:pPr>
+            <a:r>
+              <a:t>⚖ Palm Line Clarity (25%)</a:t>
+            </a:r>
+          </a:p>
+          <a:p>
+            <a:pPr>
+              <a:defRPr sz="950">
                 <a:solidFill>
                   <a:srgbClr val="CBD5E1"/>
                 </a:solidFill>
-              </a:rPr>
-              <a:t>30+ production REST endpoints with strict Pydantic v2 schemas</a:t>
-            </a:r>
-          </a:p>
-          <a:p>
-            <a:pPr>
-              <a:defRPr sz="919" b="1">
-                <a:solidFill>
-                  <a:srgbClr val="F8FAFC"/>
-                </a:solidFill>
-              </a:defRPr>
-            </a:pPr>
-            <a:r>
-              <a:t>▪ 🗄️ Dual-Database Layer: </a:t>
-            </a:r>
-            <a:r>
-              <a:rPr b="0">
+              </a:defRPr>
+            </a:pPr>
+            <a:r>
+              <a:t>Measures sharpness, continuity, and depth of traced palm lines</a:t>
+            </a:r>
+          </a:p>
+          <a:p>
+            <a:pPr>
+              <a:defRPr sz="1100" b="1">
+                <a:solidFill>
+                  <a:srgbClr val="F59E0B"/>
+                </a:solidFill>
+              </a:defRPr>
+            </a:pPr>
+            <a:r>
+              <a:t>⚖ Tarot Spread Harmony (25%)</a:t>
+            </a:r>
+          </a:p>
+          <a:p>
+            <a:pPr>
+              <a:defRPr sz="950">
                 <a:solidFill>
                   <a:srgbClr val="CBD5E1"/>
                 </a:solidFill>
-              </a:rPr>
-              <a:t>PostgreSQL (ACID) + MongoDB (NoSQL) + Redis (Cache/Blacklist) with SQLite fallback</a:t>
-            </a:r>
-          </a:p>
-          <a:p>
-            <a:pPr>
-              <a:defRPr sz="919" b="1">
-                <a:solidFill>
-                  <a:srgbClr val="F8FAFC"/>
-                </a:solidFill>
-              </a:defRPr>
-            </a:pPr>
-            <a:r>
-              <a:t>▪ 🔐 Enterprise Security: </a:t>
-            </a:r>
-            <a:r>
-              <a:rPr b="0">
+              </a:defRPr>
+            </a:pPr>
+            <a:r>
+              <a:t>Quantifies card polarity coherence and positional consistency</a:t>
+            </a:r>
+          </a:p>
+          <a:p>
+            <a:pPr>
+              <a:defRPr sz="1100" b="1">
+                <a:solidFill>
+                  <a:srgbClr val="F59E0B"/>
+                </a:solidFill>
+              </a:defRPr>
+            </a:pPr>
+            <a:r>
+              <a:t>⚖ Elemental Alignment (20%)</a:t>
+            </a:r>
+          </a:p>
+          <a:p>
+            <a:pPr>
+              <a:defRPr sz="950">
                 <a:solidFill>
                   <a:srgbClr val="CBD5E1"/>
                 </a:solidFill>
-              </a:rPr>
-              <a:t>Bcrypt hashing, HMAC-SHA256 JWT tokens, Redis token blacklist &amp; CORS middleware</a:t>
-            </a:r>
-          </a:p>
-          <a:p>
-            <a:pPr>
-              <a:defRPr sz="919" b="1">
-                <a:solidFill>
-                  <a:srgbClr val="F8FAFC"/>
-                </a:solidFill>
-              </a:defRPr>
-            </a:pPr>
-            <a:r>
-              <a:t>▪ 👥 4-Tier RBAC Engine: </a:t>
-            </a:r>
-            <a:r>
-              <a:rPr b="0">
+              </a:defRPr>
+            </a:pPr>
+            <a:r>
+              <a:t>Evaluates concord between hand shape element and tarot suit distribution</a:t>
+            </a:r>
+          </a:p>
+          <a:p>
+            <a:pPr>
+              <a:defRPr sz="1100" b="1">
+                <a:solidFill>
+                  <a:srgbClr val="F59E0B"/>
+                </a:solidFill>
+              </a:defRPr>
+            </a:pPr>
+            <a:r>
+              <a:t>⚖ Longitudinal Continuity (15%)</a:t>
+            </a:r>
+          </a:p>
+          <a:p>
+            <a:pPr>
+              <a:defRPr sz="950">
                 <a:solidFill>
                   <a:srgbClr val="CBD5E1"/>
                 </a:solidFill>
-              </a:rPr>
-              <a:t>Seeker, Tarot Reader, Consultant &amp; Super Admin with 12 granular permissions</a:t>
-            </a:r>
-          </a:p>
-          <a:p>
-            <a:pPr>
-              <a:defRPr sz="919" b="1">
-                <a:solidFill>
-                  <a:srgbClr val="F8FAFC"/>
-                </a:solidFill>
-              </a:defRPr>
-            </a:pPr>
-            <a:r>
-              <a:t>▪ 📑 OpenAPI 3.0 Contracts: </a:t>
-            </a:r>
-            <a:r>
-              <a:rPr b="0">
+              </a:defRPr>
+            </a:pPr>
+            <a:r>
+              <a:t>Compares session readings against historical baseline user profiles</a:t>
+            </a:r>
+          </a:p>
+          <a:p>
+            <a:pPr>
+              <a:defRPr sz="1100" b="1">
+                <a:solidFill>
+                  <a:srgbClr val="F59E0B"/>
+                </a:solidFill>
+              </a:defRPr>
+            </a:pPr>
+            <a:r>
+              <a:t>⚖ Capture &amp; Scan Quality (15%)</a:t>
+            </a:r>
+          </a:p>
+          <a:p>
+            <a:pPr>
+              <a:defRPr sz="950">
                 <a:solidFill>
                   <a:srgbClr val="CBD5E1"/>
                 </a:solidFill>
-              </a:rPr>
-              <a:t>Interactive Swagger UI &amp; ReDoc specs with 100% endpoint documentation parity</a:t>
-            </a:r>
-          </a:p>
-        </p:txBody>
-      </p:sp>
-      <p:sp>
-        <p:nvSpPr>
-          <p:cNvPr id="13" name="Rounded Rectangle 12"/>
-          <p:cNvSpPr/>
-          <p:nvPr/>
-        </p:nvSpPr>
-        <p:spPr>
-          <a:xfrm>
-            <a:off x="6199632" y="1371600"/>
-            <a:ext cx="5257800" cy="2487168"/>
-          </a:xfrm>
-          <a:prstGeom prst="roundRect">
-            <a:avLst/>
-          </a:prstGeom>
-          <a:solidFill>
-            <a:srgbClr val="131D31"/>
-          </a:solidFill>
-          <a:ln w="15240">
-            <a:solidFill>
-              <a:srgbClr val="283854"/>
-            </a:solidFill>
-          </a:ln>
-        </p:spPr>
-        <p:style>
-          <a:lnRef idx="1">
-            <a:schemeClr val="accent1"/>
-          </a:lnRef>
-          <a:fillRef idx="3">
-            <a:schemeClr val="accent1"/>
-          </a:fillRef>
-          <a:effectRef idx="2">
-            <a:schemeClr val="accent1"/>
-          </a:effectRef>
-          <a:fontRef idx="minor">
-            <a:schemeClr val="lt1"/>
-          </a:fontRef>
-        </p:style>
-        <p:txBody>
-          <a:bodyPr rtlCol="0" anchor="ctr"/>
-          <a:lstStyle/>
-          <a:p>
-            <a:pPr algn="ctr"/>
-          </a:p>
-        </p:txBody>
-      </p:sp>
-      <p:sp>
-        <p:nvSpPr>
-          <p:cNvPr id="14" name="TextBox 13"/>
-          <p:cNvSpPr txBox="1"/>
-          <p:nvPr/>
-        </p:nvSpPr>
-        <p:spPr>
-          <a:xfrm>
-            <a:off x="6336792" y="1444752"/>
-            <a:ext cx="3840480" cy="292608"/>
-          </a:xfrm>
-          <a:prstGeom prst="rect">
-            <a:avLst/>
-          </a:prstGeom>
-          <a:noFill/>
-        </p:spPr>
-        <p:txBody>
-          <a:bodyPr wrap="square" lIns="0" tIns="0">
-            <a:spAutoFit/>
-          </a:bodyPr>
-          <a:lstStyle/>
-          <a:p>
-            <a:pPr>
-              <a:defRPr sz="1100" b="1">
-                <a:solidFill>
-                  <a:srgbClr val="A855F7"/>
-                </a:solidFill>
-              </a:defRPr>
-            </a:pPr>
-            <a:r>
-              <a:t>MILESTONE 2: Multimodal Engines &amp; 1,000-Image Catalog</a:t>
-            </a:r>
-          </a:p>
-        </p:txBody>
-      </p:sp>
-      <p:sp>
-        <p:nvSpPr>
-          <p:cNvPr id="15" name="TextBox 14"/>
-          <p:cNvSpPr txBox="1"/>
-          <p:nvPr/>
-        </p:nvSpPr>
-        <p:spPr>
-          <a:xfrm>
-            <a:off x="10040112" y="1444752"/>
-            <a:ext cx="1280160" cy="292608"/>
-          </a:xfrm>
-          <a:prstGeom prst="rect">
-            <a:avLst/>
-          </a:prstGeom>
-          <a:noFill/>
-        </p:spPr>
-        <p:txBody>
-          <a:bodyPr wrap="none" rIns="0" tIns="0">
-            <a:spAutoFit/>
-          </a:bodyPr>
-          <a:lstStyle/>
-          <a:p>
-            <a:pPr algn="r">
-              <a:defRPr sz="850" b="1">
-                <a:solidFill>
-                  <a:srgbClr val="10B981"/>
-                </a:solidFill>
-              </a:defRPr>
-            </a:pPr>
-            <a:r>
-              <a:t>● 100% DELIVERED</a:t>
-            </a:r>
-          </a:p>
-        </p:txBody>
-      </p:sp>
-      <p:sp>
-        <p:nvSpPr>
-          <p:cNvPr id="16" name="Rectangle 15"/>
-          <p:cNvSpPr/>
-          <p:nvPr/>
-        </p:nvSpPr>
-        <p:spPr>
-          <a:xfrm>
-            <a:off x="6336792" y="1755648"/>
-            <a:ext cx="4983480" cy="13716"/>
-          </a:xfrm>
-          <a:prstGeom prst="rect">
-            <a:avLst/>
-          </a:prstGeom>
-          <a:solidFill>
-            <a:srgbClr val="283854"/>
-          </a:solidFill>
-          <a:ln>
-            <a:noFill/>
-          </a:ln>
-        </p:spPr>
-        <p:style>
-          <a:lnRef idx="1">
-            <a:schemeClr val="accent1"/>
-          </a:lnRef>
-          <a:fillRef idx="3">
-            <a:schemeClr val="accent1"/>
-          </a:fillRef>
-          <a:effectRef idx="2">
-            <a:schemeClr val="accent1"/>
-          </a:effectRef>
-          <a:fontRef idx="minor">
-            <a:schemeClr val="lt1"/>
-          </a:fontRef>
-        </p:style>
-        <p:txBody>
-          <a:bodyPr rtlCol="0" anchor="ctr"/>
-          <a:lstStyle/>
-          <a:p>
-            <a:pPr algn="ctr"/>
-          </a:p>
-        </p:txBody>
-      </p:sp>
-      <p:sp>
-        <p:nvSpPr>
-          <p:cNvPr id="17" name="TextBox 16"/>
-          <p:cNvSpPr txBox="1"/>
-          <p:nvPr/>
-        </p:nvSpPr>
-        <p:spPr>
-          <a:xfrm>
-            <a:off x="6336792" y="1810512"/>
-            <a:ext cx="4983480" cy="1965960"/>
-          </a:xfrm>
-          <a:prstGeom prst="rect">
-            <a:avLst/>
-          </a:prstGeom>
-          <a:noFill/>
-        </p:spPr>
-        <p:txBody>
-          <a:bodyPr wrap="square" lIns="0" tIns="0">
-            <a:spAutoFit/>
-          </a:bodyPr>
-          <a:lstStyle/>
-          <a:p>
-            <a:pPr>
-              <a:defRPr sz="919" b="1">
-                <a:solidFill>
-                  <a:srgbClr val="F8FAFC"/>
-                </a:solidFill>
-              </a:defRPr>
-            </a:pPr>
-            <a:r>
-              <a:t>▪ ✋ CV Palm Analysis Engine: </a:t>
-            </a:r>
-            <a:r>
-              <a:rPr b="0">
-                <a:solidFill>
-                  <a:srgbClr val="CBD5E1"/>
-                </a:solidFill>
-              </a:rPr>
-              <a:t>5 lines (Heart, Head, Life, Fate, Sun) with curvature, clarity &amp; depth extraction</a:t>
-            </a:r>
-          </a:p>
-          <a:p>
-            <a:pPr>
-              <a:defRPr sz="919" b="1">
-                <a:solidFill>
-                  <a:srgbClr val="F8FAFC"/>
-                </a:solidFill>
-              </a:defRPr>
-            </a:pPr>
-            <a:r>
-              <a:t>▪ 🌿 Hand Morphology Analysis: </a:t>
-            </a:r>
-            <a:r>
-              <a:rPr b="0">
-                <a:solidFill>
-                  <a:srgbClr val="CBD5E1"/>
-                </a:solidFill>
-              </a:rPr>
-              <a:t>Earth, Air, Fire, Water elemental hand classifications &amp; trait mapping</a:t>
-            </a:r>
-          </a:p>
-          <a:p>
-            <a:pPr>
-              <a:defRPr sz="919" b="1">
-                <a:solidFill>
-                  <a:srgbClr val="F8FAFC"/>
-                </a:solidFill>
-              </a:defRPr>
-            </a:pPr>
-            <a:r>
-              <a:t>▪ 🃏 78-Card Tarot Deck &amp; Spreads: </a:t>
-            </a:r>
-            <a:r>
-              <a:rPr b="0">
-                <a:solidFill>
-                  <a:srgbClr val="CBD5E1"/>
-                </a:solidFill>
-              </a:rPr>
-              <a:t>6 distinct spread architectures, position-specific semantics &amp; reverse orientations</a:t>
-            </a:r>
-          </a:p>
-          <a:p>
-            <a:pPr>
-              <a:defRPr sz="919" b="1">
-                <a:solidFill>
-                  <a:srgbClr val="F8FAFC"/>
-                </a:solidFill>
-              </a:defRPr>
-            </a:pPr>
-            <a:r>
-              <a:t>▪ 📂 1,000-Image Dataset Catalog: </a:t>
-            </a:r>
-            <a:r>
-              <a:rPr b="0">
-                <a:solidFill>
-                  <a:srgbClr val="CBD5E1"/>
-                </a:solidFill>
-              </a:rPr>
-              <a:t>500 labeled palms + 500 multi-style tarot cards with search &amp; filter APIs</a:t>
-            </a:r>
-          </a:p>
-          <a:p>
-            <a:pPr>
-              <a:defRPr sz="919" b="1">
-                <a:solidFill>
-                  <a:srgbClr val="F8FAFC"/>
-                </a:solidFill>
-              </a:defRPr>
-            </a:pPr>
-            <a:r>
-              <a:t>▪ 📷 Dual Input Mode: </a:t>
-            </a:r>
-            <a:r>
-              <a:rPr b="0">
-                <a:solidFill>
-                  <a:srgbClr val="CBD5E1"/>
-                </a:solidFill>
-              </a:rPr>
-              <a:t>Live camera scanner with HUD overlay guide + multipart image file upload</a:t>
-            </a:r>
-          </a:p>
-        </p:txBody>
-      </p:sp>
-      <p:sp>
-        <p:nvSpPr>
-          <p:cNvPr id="18" name="Rounded Rectangle 17"/>
-          <p:cNvSpPr/>
-          <p:nvPr/>
-        </p:nvSpPr>
-        <p:spPr>
-          <a:xfrm>
-            <a:off x="731520" y="3977639"/>
-            <a:ext cx="5257800" cy="2487168"/>
-          </a:xfrm>
-          <a:prstGeom prst="roundRect">
-            <a:avLst/>
-          </a:prstGeom>
-          <a:solidFill>
-            <a:srgbClr val="131D31"/>
-          </a:solidFill>
-          <a:ln w="15240">
-            <a:solidFill>
-              <a:srgbClr val="283854"/>
-            </a:solidFill>
-          </a:ln>
-        </p:spPr>
-        <p:style>
-          <a:lnRef idx="1">
-            <a:schemeClr val="accent1"/>
-          </a:lnRef>
-          <a:fillRef idx="3">
-            <a:schemeClr val="accent1"/>
-          </a:fillRef>
-          <a:effectRef idx="2">
-            <a:schemeClr val="accent1"/>
-          </a:effectRef>
-          <a:fontRef idx="minor">
-            <a:schemeClr val="lt1"/>
-          </a:fontRef>
-        </p:style>
-        <p:txBody>
-          <a:bodyPr rtlCol="0" anchor="ctr"/>
-          <a:lstStyle/>
-          <a:p>
-            <a:pPr algn="ctr"/>
-          </a:p>
-        </p:txBody>
-      </p:sp>
-      <p:sp>
-        <p:nvSpPr>
-          <p:cNvPr id="19" name="TextBox 18"/>
-          <p:cNvSpPr txBox="1"/>
-          <p:nvPr/>
-        </p:nvSpPr>
-        <p:spPr>
-          <a:xfrm>
-            <a:off x="868680" y="4050791"/>
-            <a:ext cx="3840480" cy="292608"/>
-          </a:xfrm>
-          <a:prstGeom prst="rect">
-            <a:avLst/>
-          </a:prstGeom>
-          <a:noFill/>
-        </p:spPr>
-        <p:txBody>
-          <a:bodyPr wrap="square" lIns="0" tIns="0">
-            <a:spAutoFit/>
-          </a:bodyPr>
-          <a:lstStyle/>
-          <a:p>
-            <a:pPr>
-              <a:defRPr sz="1100" b="1">
-                <a:solidFill>
-                  <a:srgbClr val="F59E0B"/>
-                </a:solidFill>
-              </a:defRPr>
-            </a:pPr>
-            <a:r>
-              <a:t>MILESTONE 3: AI Interpretation, Personality &amp; Trends</a:t>
-            </a:r>
-          </a:p>
-        </p:txBody>
-      </p:sp>
-      <p:sp>
-        <p:nvSpPr>
-          <p:cNvPr id="20" name="TextBox 19"/>
-          <p:cNvSpPr txBox="1"/>
-          <p:nvPr/>
-        </p:nvSpPr>
-        <p:spPr>
-          <a:xfrm>
-            <a:off x="4572000" y="4050791"/>
-            <a:ext cx="1280160" cy="292608"/>
-          </a:xfrm>
-          <a:prstGeom prst="rect">
-            <a:avLst/>
-          </a:prstGeom>
-          <a:noFill/>
-        </p:spPr>
-        <p:txBody>
-          <a:bodyPr wrap="none" rIns="0" tIns="0">
-            <a:spAutoFit/>
-          </a:bodyPr>
-          <a:lstStyle/>
-          <a:p>
-            <a:pPr algn="r">
-              <a:defRPr sz="850" b="1">
-                <a:solidFill>
-                  <a:srgbClr val="10B981"/>
-                </a:solidFill>
-              </a:defRPr>
-            </a:pPr>
-            <a:r>
-              <a:t>● 100% DELIVERED</a:t>
-            </a:r>
-          </a:p>
-        </p:txBody>
-      </p:sp>
-      <p:sp>
-        <p:nvSpPr>
-          <p:cNvPr id="21" name="Rectangle 20"/>
-          <p:cNvSpPr/>
-          <p:nvPr/>
-        </p:nvSpPr>
-        <p:spPr>
-          <a:xfrm>
-            <a:off x="868680" y="4361688"/>
-            <a:ext cx="4983480" cy="13716"/>
-          </a:xfrm>
-          <a:prstGeom prst="rect">
-            <a:avLst/>
-          </a:prstGeom>
-          <a:solidFill>
-            <a:srgbClr val="283854"/>
-          </a:solidFill>
-          <a:ln>
-            <a:noFill/>
-          </a:ln>
-        </p:spPr>
-        <p:style>
-          <a:lnRef idx="1">
-            <a:schemeClr val="accent1"/>
-          </a:lnRef>
-          <a:fillRef idx="3">
-            <a:schemeClr val="accent1"/>
-          </a:fillRef>
-          <a:effectRef idx="2">
-            <a:schemeClr val="accent1"/>
-          </a:effectRef>
-          <a:fontRef idx="minor">
-            <a:schemeClr val="lt1"/>
-          </a:fontRef>
-        </p:style>
-        <p:txBody>
-          <a:bodyPr rtlCol="0" anchor="ctr"/>
-          <a:lstStyle/>
-          <a:p>
-            <a:pPr algn="ctr"/>
-          </a:p>
-        </p:txBody>
-      </p:sp>
-      <p:sp>
-        <p:nvSpPr>
-          <p:cNvPr id="22" name="TextBox 21"/>
-          <p:cNvSpPr txBox="1"/>
-          <p:nvPr/>
-        </p:nvSpPr>
-        <p:spPr>
-          <a:xfrm>
-            <a:off x="868680" y="4416552"/>
-            <a:ext cx="4983480" cy="1965960"/>
-          </a:xfrm>
-          <a:prstGeom prst="rect">
-            <a:avLst/>
-          </a:prstGeom>
-          <a:noFill/>
-        </p:spPr>
-        <p:txBody>
-          <a:bodyPr wrap="square" lIns="0" tIns="0">
-            <a:spAutoFit/>
-          </a:bodyPr>
-          <a:lstStyle/>
-          <a:p>
-            <a:pPr>
-              <a:defRPr sz="919" b="1">
-                <a:solidFill>
-                  <a:srgbClr val="F8FAFC"/>
-                </a:solidFill>
-              </a:defRPr>
-            </a:pPr>
-            <a:r>
-              <a:t>▪ 🤖 Gemini 2.0 Flash LLM: </a:t>
-            </a:r>
-            <a:r>
-              <a:rPr b="0">
-                <a:solidFill>
-                  <a:srgbClr val="CBD5E1"/>
-                </a:solidFill>
-              </a:rPr>
-              <a:t>Domain-tuned prompt engineering for empathetic, mystical &amp; grounded insights</a:t>
-            </a:r>
-          </a:p>
-          <a:p>
-            <a:pPr>
-              <a:defRPr sz="919" b="1">
-                <a:solidFill>
-                  <a:srgbClr val="F8FAFC"/>
-                </a:solidFill>
-              </a:defRPr>
-            </a:pPr>
-            <a:r>
-              <a:t>▪ 🔮 Cross-Modal Synthesis: </a:t>
-            </a:r>
-            <a:r>
-              <a:rPr b="0">
-                <a:solidFill>
-                  <a:srgbClr val="CBD5E1"/>
-                </a:solidFill>
-              </a:rPr>
-              <a:t>Deep narrative fusion synthesizing biometric palm lines with tarot card archetypes</a:t>
-            </a:r>
-          </a:p>
-          <a:p>
-            <a:pPr>
-              <a:defRPr sz="919" b="1">
-                <a:solidFill>
-                  <a:srgbClr val="F8FAFC"/>
-                </a:solidFill>
-              </a:defRPr>
-            </a:pPr>
-            <a:r>
-              <a:t>▪ 🧠 Big Five Personality Engine: </a:t>
-            </a:r>
-            <a:r>
-              <a:rPr b="0">
-                <a:solidFill>
-                  <a:srgbClr val="CBD5E1"/>
-                </a:solidFill>
-              </a:rPr>
-              <a:t>OCEAN trait modeling + 10 spiritual archetypes with strengths &amp; behavioral patterns</a:t>
-            </a:r>
-          </a:p>
-          <a:p>
-            <a:pPr>
-              <a:defRPr sz="919" b="1">
-                <a:solidFill>
-                  <a:srgbClr val="F8FAFC"/>
-                </a:solidFill>
-              </a:defRPr>
-            </a:pPr>
-            <a:r>
-              <a:t>▪ 📈 Life Trend Forecasting: </a:t>
-            </a:r>
-            <a:r>
-              <a:rPr b="0">
-                <a:solidFill>
-                  <a:srgbClr val="CBD5E1"/>
-                </a:solidFill>
-              </a:rPr>
-              <a:t>Tracks 5 life dimensions (Emotional, Career, Spiritual, Vitality, Creative)</a:t>
-            </a:r>
-          </a:p>
-          <a:p>
-            <a:pPr>
-              <a:defRPr sz="919" b="1">
-                <a:solidFill>
-                  <a:srgbClr val="F8FAFC"/>
-                </a:solidFill>
-              </a:defRPr>
-            </a:pPr>
-            <a:r>
-              <a:t>▪ ⚖️ 5-Factor Weighted Scoring: </a:t>
-            </a:r>
-            <a:r>
-              <a:rPr b="0">
-                <a:solidFill>
-                  <a:srgbClr val="CBD5E1"/>
-                </a:solidFill>
-              </a:rPr>
-              <a:t>Normalized 0-100 score (30% Palm, 25% Tarot, 20% Persona, 15% Context, 10% Consistency)</a:t>
-            </a:r>
-          </a:p>
-        </p:txBody>
-      </p:sp>
-      <p:sp>
-        <p:nvSpPr>
-          <p:cNvPr id="23" name="Rounded Rectangle 22"/>
-          <p:cNvSpPr/>
-          <p:nvPr/>
-        </p:nvSpPr>
-        <p:spPr>
-          <a:xfrm>
-            <a:off x="6199632" y="3977639"/>
-            <a:ext cx="5257800" cy="2487168"/>
-          </a:xfrm>
-          <a:prstGeom prst="roundRect">
-            <a:avLst/>
-          </a:prstGeom>
-          <a:solidFill>
-            <a:srgbClr val="131D31"/>
-          </a:solidFill>
-          <a:ln w="15240">
-            <a:solidFill>
-              <a:srgbClr val="283854"/>
-            </a:solidFill>
-          </a:ln>
-        </p:spPr>
-        <p:style>
-          <a:lnRef idx="1">
-            <a:schemeClr val="accent1"/>
-          </a:lnRef>
-          <a:fillRef idx="3">
-            <a:schemeClr val="accent1"/>
-          </a:fillRef>
-          <a:effectRef idx="2">
-            <a:schemeClr val="accent1"/>
-          </a:effectRef>
-          <a:fontRef idx="minor">
-            <a:schemeClr val="lt1"/>
-          </a:fontRef>
-        </p:style>
-        <p:txBody>
-          <a:bodyPr rtlCol="0" anchor="ctr"/>
-          <a:lstStyle/>
-          <a:p>
-            <a:pPr algn="ctr"/>
-          </a:p>
-        </p:txBody>
-      </p:sp>
-      <p:sp>
-        <p:nvSpPr>
-          <p:cNvPr id="24" name="TextBox 23"/>
-          <p:cNvSpPr txBox="1"/>
-          <p:nvPr/>
-        </p:nvSpPr>
-        <p:spPr>
-          <a:xfrm>
-            <a:off x="6336792" y="4050791"/>
-            <a:ext cx="3840480" cy="292608"/>
-          </a:xfrm>
-          <a:prstGeom prst="rect">
-            <a:avLst/>
-          </a:prstGeom>
-          <a:noFill/>
-        </p:spPr>
-        <p:txBody>
-          <a:bodyPr wrap="square" lIns="0" tIns="0">
-            <a:spAutoFit/>
-          </a:bodyPr>
-          <a:lstStyle/>
-          <a:p>
-            <a:pPr>
-              <a:defRPr sz="1100" b="1">
-                <a:solidFill>
-                  <a:srgbClr val="10B981"/>
-                </a:solidFill>
-              </a:defRPr>
-            </a:pPr>
-            <a:r>
-              <a:t>MILESTONE 4: Interactive UX, Dashboards &amp; Quality</a:t>
-            </a:r>
-          </a:p>
-        </p:txBody>
-      </p:sp>
-      <p:sp>
-        <p:nvSpPr>
-          <p:cNvPr id="25" name="TextBox 24"/>
-          <p:cNvSpPr txBox="1"/>
-          <p:nvPr/>
-        </p:nvSpPr>
-        <p:spPr>
-          <a:xfrm>
-            <a:off x="10040112" y="4050791"/>
-            <a:ext cx="1280160" cy="292608"/>
-          </a:xfrm>
-          <a:prstGeom prst="rect">
-            <a:avLst/>
-          </a:prstGeom>
-          <a:noFill/>
-        </p:spPr>
-        <p:txBody>
-          <a:bodyPr wrap="none" rIns="0" tIns="0">
-            <a:spAutoFit/>
-          </a:bodyPr>
-          <a:lstStyle/>
-          <a:p>
-            <a:pPr algn="r">
-              <a:defRPr sz="850" b="1">
-                <a:solidFill>
-                  <a:srgbClr val="10B981"/>
-                </a:solidFill>
-              </a:defRPr>
-            </a:pPr>
-            <a:r>
-              <a:t>● 100% DELIVERED</a:t>
-            </a:r>
-          </a:p>
-        </p:txBody>
-      </p:sp>
-      <p:sp>
-        <p:nvSpPr>
-          <p:cNvPr id="26" name="Rectangle 25"/>
-          <p:cNvSpPr/>
-          <p:nvPr/>
-        </p:nvSpPr>
-        <p:spPr>
-          <a:xfrm>
-            <a:off x="6336792" y="4361688"/>
-            <a:ext cx="4983480" cy="13716"/>
-          </a:xfrm>
-          <a:prstGeom prst="rect">
-            <a:avLst/>
-          </a:prstGeom>
-          <a:solidFill>
-            <a:srgbClr val="283854"/>
-          </a:solidFill>
-          <a:ln>
-            <a:noFill/>
-          </a:ln>
-        </p:spPr>
-        <p:style>
-          <a:lnRef idx="1">
-            <a:schemeClr val="accent1"/>
-          </a:lnRef>
-          <a:fillRef idx="3">
-            <a:schemeClr val="accent1"/>
-          </a:fillRef>
-          <a:effectRef idx="2">
-            <a:schemeClr val="accent1"/>
-          </a:effectRef>
-          <a:fontRef idx="minor">
-            <a:schemeClr val="lt1"/>
-          </a:fontRef>
-        </p:style>
-        <p:txBody>
-          <a:bodyPr rtlCol="0" anchor="ctr"/>
-          <a:lstStyle/>
-          <a:p>
-            <a:pPr algn="ctr"/>
-          </a:p>
-        </p:txBody>
-      </p:sp>
-      <p:sp>
-        <p:nvSpPr>
-          <p:cNvPr id="27" name="TextBox 26"/>
-          <p:cNvSpPr txBox="1"/>
-          <p:nvPr/>
-        </p:nvSpPr>
-        <p:spPr>
-          <a:xfrm>
-            <a:off x="6336792" y="4416552"/>
-            <a:ext cx="4983480" cy="1965960"/>
-          </a:xfrm>
-          <a:prstGeom prst="rect">
-            <a:avLst/>
-          </a:prstGeom>
-          <a:noFill/>
-        </p:spPr>
-        <p:txBody>
-          <a:bodyPr wrap="square" lIns="0" tIns="0">
-            <a:spAutoFit/>
-          </a:bodyPr>
-          <a:lstStyle/>
-          <a:p>
-            <a:pPr>
-              <a:defRPr sz="919" b="1">
-                <a:solidFill>
-                  <a:srgbClr val="F8FAFC"/>
-                </a:solidFill>
-              </a:defRPr>
-            </a:pPr>
-            <a:r>
-              <a:t>▪ 🃏 3D Physics Card Draw: </a:t>
-            </a:r>
-            <a:r>
-              <a:rPr b="0">
-                <a:solidFill>
-                  <a:srgbClr val="CBD5E1"/>
-                </a:solidFill>
-              </a:rPr>
-              <a:t>Interactive visual shuffle, fanning, one-by-one manual pick &amp; 3D CSS flips</a:t>
-            </a:r>
-          </a:p>
-          <a:p>
-            <a:pPr>
-              <a:defRPr sz="919" b="1">
-                <a:solidFill>
-                  <a:srgbClr val="F8FAFC"/>
-                </a:solidFill>
-              </a:defRPr>
-            </a:pPr>
-            <a:r>
-              <a:t>▪ 💬 Conversational AI Chatbot: </a:t>
-            </a:r>
-            <a:r>
-              <a:rPr b="0">
-                <a:solidFill>
-                  <a:srgbClr val="CBD5E1"/>
-                </a:solidFill>
-              </a:rPr>
-              <a:t>Multi-turn spiritual dialogue with session memory &amp; offline rule fallback</a:t>
-            </a:r>
-          </a:p>
-          <a:p>
-            <a:pPr>
-              <a:defRPr sz="919" b="1">
-                <a:solidFill>
-                  <a:srgbClr val="F8FAFC"/>
-                </a:solidFill>
-              </a:defRPr>
-            </a:pPr>
-            <a:r>
-              <a:t>▪ 📊 4 Role-Based Dashboards: </a:t>
-            </a:r>
-            <a:r>
-              <a:rPr b="0">
-                <a:solidFill>
-                  <a:srgbClr val="CBD5E1"/>
-                </a:solidFill>
-              </a:rPr>
-              <a:t>Tailored consoles for Seeker, Tarot Reader, Spiritual Consultant, Super Admin</a:t>
-            </a:r>
-          </a:p>
-          <a:p>
-            <a:pPr>
-              <a:defRPr sz="919" b="1">
-                <a:solidFill>
-                  <a:srgbClr val="F8FAFC"/>
-                </a:solidFill>
-              </a:defRPr>
-            </a:pPr>
-            <a:r>
-              <a:t>▪ 📄 Multi-Format Dossier Export: </a:t>
-            </a:r>
-            <a:r>
-              <a:rPr b="0">
-                <a:solidFill>
-                  <a:srgbClr val="CBD5E1"/>
-                </a:solidFill>
-              </a:rPr>
-              <a:t>One-click export of complete spiritual guidance dossiers to PDF, DOCX, CSV &amp; JSON</a:t>
-            </a:r>
-          </a:p>
-          <a:p>
-            <a:pPr>
-              <a:defRPr sz="919" b="1">
-                <a:solidFill>
-                  <a:srgbClr val="F8FAFC"/>
-                </a:solidFill>
-              </a:defRPr>
-            </a:pPr>
-            <a:r>
-              <a:t>▪ 🧪 100% Verified Quality: </a:t>
-            </a:r>
-            <a:r>
-              <a:rPr b="0">
-                <a:solidFill>
-                  <a:srgbClr val="CBD5E1"/>
-                </a:solidFill>
-              </a:rPr>
-              <a:t>63/63 pytest automated tests passing in 3.11s + Docker Compose deploy</a:t>
+              </a:defRPr>
+            </a:pPr>
+            <a:r>
+              <a:t>Evaluates lighting, contrast, and resolution of user palm capture</a:t>
             </a:r>
           </a:p>
         </p:txBody>
@@ -8685,12 +7809,12 @@
             <a:pPr>
               <a:defRPr sz="1050" b="1">
                 <a:solidFill>
-                  <a:srgbClr val="38BDF8"/>
-                </a:solidFill>
-              </a:defRPr>
-            </a:pPr>
-            <a:r>
-              <a:t>VERIFICATION &amp; IMPACT</a:t>
+                  <a:srgbClr val="10B981"/>
+                </a:solidFill>
+              </a:defRPr>
+            </a:pPr>
+            <a:r>
+              <a:t>06. MULTI-PERSONA WORKFLOWS</a:t>
             </a:r>
           </a:p>
         </p:txBody>
@@ -8718,14 +7842,14 @@
           <a:lstStyle/>
           <a:p>
             <a:pPr>
-              <a:defRPr sz="2100" b="1">
+              <a:defRPr sz="2200" b="1">
                 <a:solidFill>
                   <a:srgbClr val="F8FAFC"/>
                 </a:solidFill>
               </a:defRPr>
             </a:pPr>
             <a:r>
-              <a:t>Quality Engineering, Test Verification &amp; Future Roadmap</a:t>
+              <a:t>Role-Based Access Portals (RBAC)</a:t>
             </a:r>
           </a:p>
         </p:txBody>
@@ -8738,8 +7862,8 @@
         </p:nvSpPr>
         <p:spPr>
           <a:xfrm>
-            <a:off x="10332720" y="411480"/>
-            <a:ext cx="1097280" cy="365760"/>
+            <a:off x="10241280" y="365760"/>
+            <a:ext cx="1188720" cy="320040"/>
           </a:xfrm>
           <a:prstGeom prst="rect">
             <a:avLst/>
@@ -8747,20 +7871,20 @@
           <a:noFill/>
         </p:spPr>
         <p:txBody>
-          <a:bodyPr wrap="none">
+          <a:bodyPr wrap="none" rIns="0">
             <a:spAutoFit/>
           </a:bodyPr>
           <a:lstStyle/>
           <a:p>
             <a:pPr algn="r">
-              <a:defRPr sz="1300" b="1">
+              <a:defRPr sz="1100" b="1">
                 <a:solidFill>
                   <a:srgbClr val="94A3B8"/>
                 </a:solidFill>
               </a:defRPr>
             </a:pPr>
             <a:r>
-              <a:t>07 / 07</a:t>
+              <a:t>07 / 10</a:t>
             </a:r>
           </a:p>
         </p:txBody>
@@ -8773,8 +7897,8 @@
         </p:nvSpPr>
         <p:spPr>
           <a:xfrm>
-            <a:off x="731520" y="1188720"/>
-            <a:ext cx="10728655" cy="18288"/>
+            <a:off x="731520" y="1234440"/>
+            <a:ext cx="10728655" cy="13716"/>
           </a:xfrm>
           <a:prstGeom prst="rect">
             <a:avLst/>
@@ -8816,8 +7940,8 @@
         </p:nvSpPr>
         <p:spPr>
           <a:xfrm>
-            <a:off x="731520" y="1371600"/>
-            <a:ext cx="5257800" cy="5120640"/>
+            <a:off x="731520" y="1463040"/>
+            <a:ext cx="5257800" cy="2240280"/>
           </a:xfrm>
           <a:prstGeom prst="roundRect">
             <a:avLst/>
@@ -8825,9 +7949,9 @@
           <a:solidFill>
             <a:srgbClr val="131D31"/>
           </a:solidFill>
-          <a:ln w="15240">
+          <a:ln w="12700">
             <a:solidFill>
-              <a:srgbClr val="283854"/>
+              <a:srgbClr val="38BDF8"/>
             </a:solidFill>
           </a:ln>
         </p:spPr>
@@ -8861,8 +7985,8 @@
         </p:nvSpPr>
         <p:spPr>
           <a:xfrm>
-            <a:off x="914400" y="1508760"/>
-            <a:ext cx="3474720" cy="320040"/>
+            <a:off x="914400" y="1600200"/>
+            <a:ext cx="4892040" cy="1965960"/>
           </a:xfrm>
           <a:prstGeom prst="rect">
             <a:avLst/>
@@ -8870,34 +7994,139 @@
           <a:noFill/>
         </p:spPr>
         <p:txBody>
-          <a:bodyPr wrap="none" lIns="0" tIns="0">
+          <a:bodyPr wrap="square" lIns="0" tIns="0">
             <a:spAutoFit/>
           </a:bodyPr>
           <a:lstStyle/>
           <a:p>
             <a:pPr>
-              <a:defRPr sz="1300" b="1">
+              <a:defRPr sz="1100" b="1">
                 <a:solidFill>
                   <a:srgbClr val="38BDF8"/>
                 </a:solidFill>
               </a:defRPr>
             </a:pPr>
             <a:r>
-              <a:t>🧪 Automated Test Suite &amp; Verification</a:t>
-            </a:r>
-          </a:p>
-        </p:txBody>
-      </p:sp>
-      <p:sp>
-        <p:nvSpPr>
-          <p:cNvPr id="10" name="TextBox 9"/>
+              <a:t>SEEKER PORTAL  ·  Everyday Spiritual Explorer</a:t>
+            </a:r>
+          </a:p>
+          <a:p>
+            <a:pPr>
+              <a:defRPr sz="950">
+                <a:solidFill>
+                  <a:srgbClr val="CBD5E1"/>
+                </a:solidFill>
+              </a:defRPr>
+            </a:pPr>
+            <a:r>
+              <a:t>✦ Personal reading history timeline</a:t>
+            </a:r>
+          </a:p>
+          <a:p>
+            <a:pPr>
+              <a:defRPr sz="950">
+                <a:solidFill>
+                  <a:srgbClr val="CBD5E1"/>
+                </a:solidFill>
+              </a:defRPr>
+            </a:pPr>
+            <a:r>
+              <a:t>✦ Morning daily tarot card draws</a:t>
+            </a:r>
+          </a:p>
+          <a:p>
+            <a:pPr>
+              <a:defRPr sz="950">
+                <a:solidFill>
+                  <a:srgbClr val="CBD5E1"/>
+                </a:solidFill>
+              </a:defRPr>
+            </a:pPr>
+            <a:r>
+              <a:t>✦ Big Five OCEAN personality radar</a:t>
+            </a:r>
+          </a:p>
+          <a:p>
+            <a:pPr>
+              <a:defRPr sz="950">
+                <a:solidFill>
+                  <a:srgbClr val="CBD5E1"/>
+                </a:solidFill>
+              </a:defRPr>
+            </a:pPr>
+            <a:r>
+              <a:t>✦ Goal alignment &amp; life path progress</a:t>
+            </a:r>
+          </a:p>
+          <a:p>
+            <a:pPr>
+              <a:defRPr sz="950">
+                <a:solidFill>
+                  <a:srgbClr val="CBD5E1"/>
+                </a:solidFill>
+              </a:defRPr>
+            </a:pPr>
+            <a:r>
+              <a:t>✦ Exportable spiritual reports (CSV/JSON)</a:t>
+            </a:r>
+          </a:p>
+        </p:txBody>
+      </p:sp>
+      <p:sp>
+        <p:nvSpPr>
+          <p:cNvPr id="10" name="Rounded Rectangle 9"/>
+          <p:cNvSpPr/>
+          <p:nvPr/>
+        </p:nvSpPr>
+        <p:spPr>
+          <a:xfrm>
+            <a:off x="6199632" y="1463040"/>
+            <a:ext cx="5257800" cy="2240280"/>
+          </a:xfrm>
+          <a:prstGeom prst="roundRect">
+            <a:avLst/>
+          </a:prstGeom>
+          <a:solidFill>
+            <a:srgbClr val="131D31"/>
+          </a:solidFill>
+          <a:ln w="12700">
+            <a:solidFill>
+              <a:srgbClr val="A855F7"/>
+            </a:solidFill>
+          </a:ln>
+        </p:spPr>
+        <p:style>
+          <a:lnRef idx="1">
+            <a:schemeClr val="accent1"/>
+          </a:lnRef>
+          <a:fillRef idx="3">
+            <a:schemeClr val="accent1"/>
+          </a:fillRef>
+          <a:effectRef idx="2">
+            <a:schemeClr val="accent1"/>
+          </a:effectRef>
+          <a:fontRef idx="minor">
+            <a:schemeClr val="lt1"/>
+          </a:fontRef>
+        </p:style>
+        <p:txBody>
+          <a:bodyPr rtlCol="0" anchor="ctr"/>
+          <a:lstStyle/>
+          <a:p>
+            <a:pPr algn="ctr"/>
+          </a:p>
+        </p:txBody>
+      </p:sp>
+      <p:sp>
+        <p:nvSpPr>
+          <p:cNvPr id="11" name="TextBox 10"/>
           <p:cNvSpPr txBox="1"/>
           <p:nvPr/>
         </p:nvSpPr>
         <p:spPr>
           <a:xfrm>
-            <a:off x="4206240" y="1508760"/>
-            <a:ext cx="1645920" cy="320040"/>
+            <a:off x="6382512" y="1600200"/>
+            <a:ext cx="4892040" cy="1965960"/>
           </a:xfrm>
           <a:prstGeom prst="rect">
             <a:avLst/>
@@ -8905,34 +8134,583 @@
           <a:noFill/>
         </p:spPr>
         <p:txBody>
-          <a:bodyPr wrap="none" rIns="0" tIns="0">
+          <a:bodyPr wrap="square" lIns="0" tIns="0">
             <a:spAutoFit/>
           </a:bodyPr>
           <a:lstStyle/>
           <a:p>
+            <a:pPr>
+              <a:defRPr sz="1100" b="1">
+                <a:solidFill>
+                  <a:srgbClr val="A855F7"/>
+                </a:solidFill>
+              </a:defRPr>
+            </a:pPr>
+            <a:r>
+              <a:t>TAROT READER PORTAL  ·  Professional Practitioner</a:t>
+            </a:r>
+          </a:p>
+          <a:p>
+            <a:pPr>
+              <a:defRPr sz="950">
+                <a:solidFill>
+                  <a:srgbClr val="CBD5E1"/>
+                </a:solidFill>
+              </a:defRPr>
+            </a:pPr>
+            <a:r>
+              <a:t>✦ Active client consultation queue</a:t>
+            </a:r>
+          </a:p>
+          <a:p>
+            <a:pPr>
+              <a:defRPr sz="950">
+                <a:solidFill>
+                  <a:srgbClr val="CBD5E1"/>
+                </a:solidFill>
+              </a:defRPr>
+            </a:pPr>
+            <a:r>
+              <a:t>✦ Custom spread layout designer</a:t>
+            </a:r>
+          </a:p>
+          <a:p>
+            <a:pPr>
+              <a:defRPr sz="950">
+                <a:solidFill>
+                  <a:srgbClr val="CBD5E1"/>
+                </a:solidFill>
+              </a:defRPr>
+            </a:pPr>
+            <a:r>
+              <a:t>✦ Annotated client notes &amp; insights</a:t>
+            </a:r>
+          </a:p>
+          <a:p>
+            <a:pPr>
+              <a:defRPr sz="950">
+                <a:solidFill>
+                  <a:srgbClr val="CBD5E1"/>
+                </a:solidFill>
+              </a:defRPr>
+            </a:pPr>
+            <a:r>
+              <a:t>✦ Card inversion override toggles</a:t>
+            </a:r>
+          </a:p>
+          <a:p>
+            <a:pPr>
+              <a:defRPr sz="950">
+                <a:solidFill>
+                  <a:srgbClr val="CBD5E1"/>
+                </a:solidFill>
+              </a:defRPr>
+            </a:pPr>
+            <a:r>
+              <a:t>✦ Consultation history archives</a:t>
+            </a:r>
+          </a:p>
+        </p:txBody>
+      </p:sp>
+      <p:sp>
+        <p:nvSpPr>
+          <p:cNvPr id="12" name="Rounded Rectangle 11"/>
+          <p:cNvSpPr/>
+          <p:nvPr/>
+        </p:nvSpPr>
+        <p:spPr>
+          <a:xfrm>
+            <a:off x="731520" y="3886200"/>
+            <a:ext cx="5257800" cy="2240280"/>
+          </a:xfrm>
+          <a:prstGeom prst="roundRect">
+            <a:avLst/>
+          </a:prstGeom>
+          <a:solidFill>
+            <a:srgbClr val="131D31"/>
+          </a:solidFill>
+          <a:ln w="12700">
+            <a:solidFill>
+              <a:srgbClr val="F59E0B"/>
+            </a:solidFill>
+          </a:ln>
+        </p:spPr>
+        <p:style>
+          <a:lnRef idx="1">
+            <a:schemeClr val="accent1"/>
+          </a:lnRef>
+          <a:fillRef idx="3">
+            <a:schemeClr val="accent1"/>
+          </a:fillRef>
+          <a:effectRef idx="2">
+            <a:schemeClr val="accent1"/>
+          </a:effectRef>
+          <a:fontRef idx="minor">
+            <a:schemeClr val="lt1"/>
+          </a:fontRef>
+        </p:style>
+        <p:txBody>
+          <a:bodyPr rtlCol="0" anchor="ctr"/>
+          <a:lstStyle/>
+          <a:p>
+            <a:pPr algn="ctr"/>
+          </a:p>
+        </p:txBody>
+      </p:sp>
+      <p:sp>
+        <p:nvSpPr>
+          <p:cNvPr id="13" name="TextBox 12"/>
+          <p:cNvSpPr txBox="1"/>
+          <p:nvPr/>
+        </p:nvSpPr>
+        <p:spPr>
+          <a:xfrm>
+            <a:off x="914400" y="4023360"/>
+            <a:ext cx="4892040" cy="1965960"/>
+          </a:xfrm>
+          <a:prstGeom prst="rect">
+            <a:avLst/>
+          </a:prstGeom>
+          <a:noFill/>
+        </p:spPr>
+        <p:txBody>
+          <a:bodyPr wrap="square" lIns="0" tIns="0">
+            <a:spAutoFit/>
+          </a:bodyPr>
+          <a:lstStyle/>
+          <a:p>
+            <a:pPr>
+              <a:defRPr sz="1100" b="1">
+                <a:solidFill>
+                  <a:srgbClr val="F59E0B"/>
+                </a:solidFill>
+              </a:defRPr>
+            </a:pPr>
+            <a:r>
+              <a:t>SPIRITUAL CONSULTANT  ·  Holistic Advisor</a:t>
+            </a:r>
+          </a:p>
+          <a:p>
+            <a:pPr>
+              <a:defRPr sz="950">
+                <a:solidFill>
+                  <a:srgbClr val="CBD5E1"/>
+                </a:solidFill>
+              </a:defRPr>
+            </a:pPr>
+            <a:r>
+              <a:t>✦ Multi-session client audit profiles</a:t>
+            </a:r>
+          </a:p>
+          <a:p>
+            <a:pPr>
+              <a:defRPr sz="950">
+                <a:solidFill>
+                  <a:srgbClr val="CBD5E1"/>
+                </a:solidFill>
+              </a:defRPr>
+            </a:pPr>
+            <a:r>
+              <a:t>✦ Longitudinal personality trend tracker</a:t>
+            </a:r>
+          </a:p>
+          <a:p>
+            <a:pPr>
+              <a:defRPr sz="950">
+                <a:solidFill>
+                  <a:srgbClr val="CBD5E1"/>
+                </a:solidFill>
+              </a:defRPr>
+            </a:pPr>
+            <a:r>
+              <a:t>✦ Cross-modal palm + tarot synthesis view</a:t>
+            </a:r>
+          </a:p>
+          <a:p>
+            <a:pPr>
+              <a:defRPr sz="950">
+                <a:solidFill>
+                  <a:srgbClr val="CBD5E1"/>
+                </a:solidFill>
+              </a:defRPr>
+            </a:pPr>
+            <a:r>
+              <a:t>✦ Priority alert tagging for client guidance</a:t>
+            </a:r>
+          </a:p>
+          <a:p>
+            <a:pPr>
+              <a:defRPr sz="950">
+                <a:solidFill>
+                  <a:srgbClr val="CBD5E1"/>
+                </a:solidFill>
+              </a:defRPr>
+            </a:pPr>
+            <a:r>
+              <a:t>✦ Deep-dive psychological metric views</a:t>
+            </a:r>
+          </a:p>
+        </p:txBody>
+      </p:sp>
+      <p:sp>
+        <p:nvSpPr>
+          <p:cNvPr id="14" name="Rounded Rectangle 13"/>
+          <p:cNvSpPr/>
+          <p:nvPr/>
+        </p:nvSpPr>
+        <p:spPr>
+          <a:xfrm>
+            <a:off x="6199632" y="3886200"/>
+            <a:ext cx="5257800" cy="2240280"/>
+          </a:xfrm>
+          <a:prstGeom prst="roundRect">
+            <a:avLst/>
+          </a:prstGeom>
+          <a:solidFill>
+            <a:srgbClr val="131D31"/>
+          </a:solidFill>
+          <a:ln w="12700">
+            <a:solidFill>
+              <a:srgbClr val="F43F5E"/>
+            </a:solidFill>
+          </a:ln>
+        </p:spPr>
+        <p:style>
+          <a:lnRef idx="1">
+            <a:schemeClr val="accent1"/>
+          </a:lnRef>
+          <a:fillRef idx="3">
+            <a:schemeClr val="accent1"/>
+          </a:fillRef>
+          <a:effectRef idx="2">
+            <a:schemeClr val="accent1"/>
+          </a:effectRef>
+          <a:fontRef idx="minor">
+            <a:schemeClr val="lt1"/>
+          </a:fontRef>
+        </p:style>
+        <p:txBody>
+          <a:bodyPr rtlCol="0" anchor="ctr"/>
+          <a:lstStyle/>
+          <a:p>
+            <a:pPr algn="ctr"/>
+          </a:p>
+        </p:txBody>
+      </p:sp>
+      <p:sp>
+        <p:nvSpPr>
+          <p:cNvPr id="15" name="TextBox 14"/>
+          <p:cNvSpPr txBox="1"/>
+          <p:nvPr/>
+        </p:nvSpPr>
+        <p:spPr>
+          <a:xfrm>
+            <a:off x="6382512" y="4023360"/>
+            <a:ext cx="4892040" cy="1965960"/>
+          </a:xfrm>
+          <a:prstGeom prst="rect">
+            <a:avLst/>
+          </a:prstGeom>
+          <a:noFill/>
+        </p:spPr>
+        <p:txBody>
+          <a:bodyPr wrap="square" lIns="0" tIns="0">
+            <a:spAutoFit/>
+          </a:bodyPr>
+          <a:lstStyle/>
+          <a:p>
+            <a:pPr>
+              <a:defRPr sz="1100" b="1">
+                <a:solidFill>
+                  <a:srgbClr val="F43F5E"/>
+                </a:solidFill>
+              </a:defRPr>
+            </a:pPr>
+            <a:r>
+              <a:t>SUPER ADMIN CONSOLE  ·  Platform Administrator</a:t>
+            </a:r>
+          </a:p>
+          <a:p>
+            <a:pPr>
+              <a:defRPr sz="950">
+                <a:solidFill>
+                  <a:srgbClr val="CBD5E1"/>
+                </a:solidFill>
+              </a:defRPr>
+            </a:pPr>
+            <a:r>
+              <a:t>✦ Live server telemetry &amp; endpoint metrics</a:t>
+            </a:r>
+          </a:p>
+          <a:p>
+            <a:pPr>
+              <a:defRPr sz="950">
+                <a:solidFill>
+                  <a:srgbClr val="CBD5E1"/>
+                </a:solidFill>
+              </a:defRPr>
+            </a:pPr>
+            <a:r>
+              <a:t>✦ Active user role management</a:t>
+            </a:r>
+          </a:p>
+          <a:p>
+            <a:pPr>
+              <a:defRPr sz="950">
+                <a:solidFill>
+                  <a:srgbClr val="CBD5E1"/>
+                </a:solidFill>
+              </a:defRPr>
+            </a:pPr>
+            <a:r>
+              <a:t>✦ Dataset catalog browsing &amp; statistics</a:t>
+            </a:r>
+          </a:p>
+          <a:p>
+            <a:pPr>
+              <a:defRPr sz="950">
+                <a:solidFill>
+                  <a:srgbClr val="CBD5E1"/>
+                </a:solidFill>
+              </a:defRPr>
+            </a:pPr>
+            <a:r>
+              <a:t>✦ Security token audit logs &amp; revocation</a:t>
+            </a:r>
+          </a:p>
+          <a:p>
+            <a:pPr>
+              <a:defRPr sz="950">
+                <a:solidFill>
+                  <a:srgbClr val="CBD5E1"/>
+                </a:solidFill>
+              </a:defRPr>
+            </a:pPr>
+            <a:r>
+              <a:t>✦ Health checks across Postgres, Mongo, Redis</a:t>
+            </a:r>
+          </a:p>
+        </p:txBody>
+      </p:sp>
+    </p:spTree>
+  </p:cSld>
+  <p:clrMapOvr>
+    <a:masterClrMapping/>
+  </p:clrMapOvr>
+</p:sld>
+</file>
+
+<file path=ppt/slides/slide8.xml><?xml version="1.0" encoding="utf-8"?>
+<p:sld xmlns:a="http://schemas.openxmlformats.org/drawingml/2006/main" xmlns:p="http://schemas.openxmlformats.org/presentationml/2006/main" xmlns:r="http://schemas.openxmlformats.org/officeDocument/2006/relationships">
+  <p:cSld>
+    <p:spTree>
+      <p:nvGrpSpPr>
+        <p:cNvPr id="1" name=""/>
+        <p:cNvGrpSpPr/>
+        <p:nvPr/>
+      </p:nvGrpSpPr>
+      <p:grpSpPr/>
+      <p:sp>
+        <p:nvSpPr>
+          <p:cNvPr id="2" name="Rectangle 1"/>
+          <p:cNvSpPr/>
+          <p:nvPr/>
+        </p:nvSpPr>
+        <p:spPr>
+          <a:xfrm>
+            <a:off x="0" y="0"/>
+            <a:ext cx="12191695" cy="6858000"/>
+          </a:xfrm>
+          <a:prstGeom prst="rect">
+            <a:avLst/>
+          </a:prstGeom>
+          <a:solidFill>
+            <a:srgbClr val="0A0F1D"/>
+          </a:solidFill>
+          <a:ln>
+            <a:noFill/>
+          </a:ln>
+        </p:spPr>
+        <p:style>
+          <a:lnRef idx="1">
+            <a:schemeClr val="accent1"/>
+          </a:lnRef>
+          <a:fillRef idx="3">
+            <a:schemeClr val="accent1"/>
+          </a:fillRef>
+          <a:effectRef idx="2">
+            <a:schemeClr val="accent1"/>
+          </a:effectRef>
+          <a:fontRef idx="minor">
+            <a:schemeClr val="lt1"/>
+          </a:fontRef>
+        </p:style>
+        <p:txBody>
+          <a:bodyPr rtlCol="0" anchor="ctr"/>
+          <a:lstStyle/>
+          <a:p>
+            <a:pPr algn="ctr"/>
+          </a:p>
+        </p:txBody>
+      </p:sp>
+      <p:sp>
+        <p:nvSpPr>
+          <p:cNvPr id="3" name="Rectangle 2"/>
+          <p:cNvSpPr/>
+          <p:nvPr/>
+        </p:nvSpPr>
+        <p:spPr>
+          <a:xfrm>
+            <a:off x="0" y="0"/>
+            <a:ext cx="12191695" cy="73152"/>
+          </a:xfrm>
+          <a:prstGeom prst="rect">
+            <a:avLst/>
+          </a:prstGeom>
+          <a:solidFill>
+            <a:srgbClr val="38BDF8"/>
+          </a:solidFill>
+          <a:ln>
+            <a:noFill/>
+          </a:ln>
+        </p:spPr>
+        <p:style>
+          <a:lnRef idx="1">
+            <a:schemeClr val="accent1"/>
+          </a:lnRef>
+          <a:fillRef idx="3">
+            <a:schemeClr val="accent1"/>
+          </a:fillRef>
+          <a:effectRef idx="2">
+            <a:schemeClr val="accent1"/>
+          </a:effectRef>
+          <a:fontRef idx="minor">
+            <a:schemeClr val="lt1"/>
+          </a:fontRef>
+        </p:style>
+        <p:txBody>
+          <a:bodyPr rtlCol="0" anchor="ctr"/>
+          <a:lstStyle/>
+          <a:p>
+            <a:pPr algn="ctr"/>
+          </a:p>
+        </p:txBody>
+      </p:sp>
+      <p:sp>
+        <p:nvSpPr>
+          <p:cNvPr id="4" name="TextBox 3"/>
+          <p:cNvSpPr txBox="1"/>
+          <p:nvPr/>
+        </p:nvSpPr>
+        <p:spPr>
+          <a:xfrm>
+            <a:off x="731520" y="320040"/>
+            <a:ext cx="8229600" cy="256032"/>
+          </a:xfrm>
+          <a:prstGeom prst="rect">
+            <a:avLst/>
+          </a:prstGeom>
+          <a:noFill/>
+        </p:spPr>
+        <p:txBody>
+          <a:bodyPr wrap="square" lIns="0" rIns="0" tIns="0" bIns="0">
+            <a:spAutoFit/>
+          </a:bodyPr>
+          <a:lstStyle/>
+          <a:p>
+            <a:pPr>
+              <a:defRPr sz="1050" b="1">
+                <a:solidFill>
+                  <a:srgbClr val="38BDF8"/>
+                </a:solidFill>
+              </a:defRPr>
+            </a:pPr>
+            <a:r>
+              <a:t>07. USER EXPERIENCE</a:t>
+            </a:r>
+          </a:p>
+        </p:txBody>
+      </p:sp>
+      <p:sp>
+        <p:nvSpPr>
+          <p:cNvPr id="5" name="TextBox 4"/>
+          <p:cNvSpPr txBox="1"/>
+          <p:nvPr/>
+        </p:nvSpPr>
+        <p:spPr>
+          <a:xfrm>
+            <a:off x="731520" y="594360"/>
+            <a:ext cx="8686800" cy="548640"/>
+          </a:xfrm>
+          <a:prstGeom prst="rect">
+            <a:avLst/>
+          </a:prstGeom>
+          <a:noFill/>
+        </p:spPr>
+        <p:txBody>
+          <a:bodyPr wrap="square" lIns="0" rIns="0" tIns="0" bIns="0">
+            <a:spAutoFit/>
+          </a:bodyPr>
+          <a:lstStyle/>
+          <a:p>
+            <a:pPr>
+              <a:defRPr sz="2200" b="1">
+                <a:solidFill>
+                  <a:srgbClr val="F8FAFC"/>
+                </a:solidFill>
+              </a:defRPr>
+            </a:pPr>
+            <a:r>
+              <a:t>Interactive User Experience &amp; UI Showcase</a:t>
+            </a:r>
+          </a:p>
+        </p:txBody>
+      </p:sp>
+      <p:sp>
+        <p:nvSpPr>
+          <p:cNvPr id="6" name="TextBox 5"/>
+          <p:cNvSpPr txBox="1"/>
+          <p:nvPr/>
+        </p:nvSpPr>
+        <p:spPr>
+          <a:xfrm>
+            <a:off x="10241280" y="365760"/>
+            <a:ext cx="1188720" cy="320040"/>
+          </a:xfrm>
+          <a:prstGeom prst="rect">
+            <a:avLst/>
+          </a:prstGeom>
+          <a:noFill/>
+        </p:spPr>
+        <p:txBody>
+          <a:bodyPr wrap="none" rIns="0">
+            <a:spAutoFit/>
+          </a:bodyPr>
+          <a:lstStyle/>
+          <a:p>
             <a:pPr algn="r">
-              <a:defRPr sz="950" b="1">
-                <a:solidFill>
-                  <a:srgbClr val="10B981"/>
-                </a:solidFill>
-              </a:defRPr>
-            </a:pPr>
-            <a:r>
-              <a:t>● 63/63 PASS (100%)</a:t>
-            </a:r>
-          </a:p>
-        </p:txBody>
-      </p:sp>
-      <p:sp>
-        <p:nvSpPr>
-          <p:cNvPr id="11" name="Rectangle 10"/>
+              <a:defRPr sz="1100" b="1">
+                <a:solidFill>
+                  <a:srgbClr val="94A3B8"/>
+                </a:solidFill>
+              </a:defRPr>
+            </a:pPr>
+            <a:r>
+              <a:t>08 / 10</a:t>
+            </a:r>
+          </a:p>
+        </p:txBody>
+      </p:sp>
+      <p:sp>
+        <p:nvSpPr>
+          <p:cNvPr id="7" name="Rectangle 6"/>
           <p:cNvSpPr/>
           <p:nvPr/>
         </p:nvSpPr>
         <p:spPr>
           <a:xfrm>
-            <a:off x="914400" y="1874519"/>
-            <a:ext cx="4892040" cy="13716"/>
+            <a:off x="731520" y="1234440"/>
+            <a:ext cx="10728655" cy="13716"/>
           </a:xfrm>
           <a:prstGeom prst="rect">
             <a:avLst/>
@@ -8968,177 +8746,14 @@
       </p:sp>
       <p:sp>
         <p:nvSpPr>
-          <p:cNvPr id="12" name="TextBox 11"/>
-          <p:cNvSpPr txBox="1"/>
-          <p:nvPr/>
-        </p:nvSpPr>
-        <p:spPr>
-          <a:xfrm>
-            <a:off x="914400" y="1965960"/>
-            <a:ext cx="4892040" cy="4389120"/>
-          </a:xfrm>
-          <a:prstGeom prst="rect">
-            <a:avLst/>
-          </a:prstGeom>
-          <a:noFill/>
-        </p:spPr>
-        <p:txBody>
-          <a:bodyPr wrap="square" lIns="0" tIns="0">
-            <a:spAutoFit/>
-          </a:bodyPr>
-          <a:lstStyle/>
-          <a:p>
-            <a:pPr>
-              <a:defRPr sz="950" b="1">
-                <a:solidFill>
-                  <a:srgbClr val="F8FAFC"/>
-                </a:solidFill>
-              </a:defRPr>
-            </a:pPr>
-            <a:r>
-              <a:t>▪ Pytest Execution Speed: </a:t>
-            </a:r>
-            <a:r>
-              <a:rPr b="0">
-                <a:solidFill>
-                  <a:srgbClr val="CBD5E1"/>
-                </a:solidFill>
-              </a:rPr>
-              <a:t>All 63 unit and integration tests execute cleanly in ~3.11s with 0 failures</a:t>
-            </a:r>
-          </a:p>
-          <a:p>
-            <a:pPr>
-              <a:defRPr sz="950" b="1">
-                <a:solidFill>
-                  <a:srgbClr val="F8FAFC"/>
-                </a:solidFill>
-              </a:defRPr>
-            </a:pPr>
-            <a:r>
-              <a:t>▪ Auth &amp; Security Verification: </a:t>
-            </a:r>
-            <a:r>
-              <a:rPr b="0">
-                <a:solidFill>
-                  <a:srgbClr val="CBD5E1"/>
-                </a:solidFill>
-              </a:rPr>
-              <a:t>Validates bcrypt hashing, JWT token expiry, blacklisting &amp; RBAC permission bounds</a:t>
-            </a:r>
-          </a:p>
-          <a:p>
-            <a:pPr>
-              <a:defRPr sz="950" b="1">
-                <a:solidFill>
-                  <a:srgbClr val="F8FAFC"/>
-                </a:solidFill>
-              </a:defRPr>
-            </a:pPr>
-            <a:r>
-              <a:t>▪ Reading Engine Integrity: </a:t>
-            </a:r>
-            <a:r>
-              <a:rPr b="0">
-                <a:solidFill>
-                  <a:srgbClr val="CBD5E1"/>
-                </a:solidFill>
-              </a:rPr>
-              <a:t>Verifies all 6 tarot spreads, card uniqueness, elemental balance &amp; palm determinism</a:t>
-            </a:r>
-          </a:p>
-          <a:p>
-            <a:pPr>
-              <a:defRPr sz="950" b="1">
-                <a:solidFill>
-                  <a:srgbClr val="F8FAFC"/>
-                </a:solidFill>
-              </a:defRPr>
-            </a:pPr>
-            <a:r>
-              <a:t>▪ AI Scoring Math Validation: </a:t>
-            </a:r>
-            <a:r>
-              <a:rPr b="0">
-                <a:solidFill>
-                  <a:srgbClr val="CBD5E1"/>
-                </a:solidFill>
-              </a:rPr>
-              <a:t>Ensures strict compliance with 5-factor weighted scoring formula &amp; letter grades (A+ to D)</a:t>
-            </a:r>
-          </a:p>
-          <a:p>
-            <a:pPr>
-              <a:defRPr sz="950" b="1">
-                <a:solidFill>
-                  <a:srgbClr val="F8FAFC"/>
-                </a:solidFill>
-              </a:defRPr>
-            </a:pPr>
-            <a:r>
-              <a:t>▪ Data Export Fidelity: </a:t>
-            </a:r>
-            <a:r>
-              <a:rPr b="0">
-                <a:solidFill>
-                  <a:srgbClr val="CBD5E1"/>
-                </a:solidFill>
-              </a:rPr>
-              <a:t>Validates complete data export structures for CSV, JSON, and PDF dossiers</a:t>
-            </a:r>
-          </a:p>
-          <a:p>
-            <a:pPr>
-              <a:defRPr sz="950" b="1">
-                <a:solidFill>
-                  <a:srgbClr val="F8FAFC"/>
-                </a:solidFill>
-              </a:defRPr>
-            </a:pPr>
-            <a:r>
-              <a:t>▪ Resilience &amp; Offline Fallbacks: </a:t>
-            </a:r>
-            <a:r>
-              <a:rPr b="0">
-                <a:solidFill>
-                  <a:srgbClr val="CBD5E1"/>
-                </a:solidFill>
-              </a:rPr>
-              <a:t>Guarantees graceful degradation when Gemini API key or external DBs are offline</a:t>
-            </a:r>
-          </a:p>
-          <a:p>
-            <a:pPr>
-              <a:defRPr sz="950" b="1">
-                <a:solidFill>
-                  <a:srgbClr val="F8FAFC"/>
-                </a:solidFill>
-              </a:defRPr>
-            </a:pPr>
-            <a:r>
-              <a:t>▪ Strict Schema Enforcement: </a:t>
-            </a:r>
-            <a:r>
-              <a:rPr b="0">
-                <a:solidFill>
-                  <a:srgbClr val="CBD5E1"/>
-                </a:solidFill>
-              </a:rPr>
-              <a:t>Zero runtime data corruption via strict Pydantic v2 request/response validation</a:t>
-            </a:r>
-          </a:p>
-        </p:txBody>
-      </p:sp>
-      <p:sp>
-        <p:nvSpPr>
-          <p:cNvPr id="13" name="Rounded Rectangle 12"/>
+          <p:cNvPr id="8" name="Rounded Rectangle 7"/>
           <p:cNvSpPr/>
           <p:nvPr/>
         </p:nvSpPr>
         <p:spPr>
           <a:xfrm>
-            <a:off x="6199632" y="1371600"/>
-            <a:ext cx="5257800" cy="5120640"/>
+            <a:off x="731520" y="1463040"/>
+            <a:ext cx="5212080" cy="3291840"/>
           </a:xfrm>
           <a:prstGeom prst="roundRect">
             <a:avLst/>
@@ -9146,7 +8761,7 @@
           <a:solidFill>
             <a:srgbClr val="131D31"/>
           </a:solidFill>
-          <a:ln w="15240">
+          <a:ln w="12700">
             <a:solidFill>
               <a:srgbClr val="283854"/>
             </a:solidFill>
@@ -9174,16 +8789,40 @@
           </a:p>
         </p:txBody>
       </p:sp>
-      <p:sp>
-        <p:nvSpPr>
-          <p:cNvPr id="14" name="TextBox 13"/>
+      <p:pic>
+        <p:nvPicPr>
+          <p:cNvPr id="9" name="Picture 8" descr="website_hero_landing.jpg"/>
+          <p:cNvPicPr>
+            <a:picLocks noChangeAspect="1"/>
+          </p:cNvPicPr>
+          <p:nvPr/>
+        </p:nvPicPr>
+        <p:blipFill>
+          <a:blip r:embed="rId2"/>
+          <a:stretch>
+            <a:fillRect/>
+          </a:stretch>
+        </p:blipFill>
+        <p:spPr>
+          <a:xfrm>
+            <a:off x="777240" y="1508760"/>
+            <a:ext cx="5120640" cy="2858032"/>
+          </a:xfrm>
+          <a:prstGeom prst="rect">
+            <a:avLst/>
+          </a:prstGeom>
+        </p:spPr>
+      </p:pic>
+      <p:sp>
+        <p:nvSpPr>
+          <p:cNvPr id="10" name="TextBox 9"/>
           <p:cNvSpPr txBox="1"/>
           <p:nvPr/>
         </p:nvSpPr>
         <p:spPr>
           <a:xfrm>
-            <a:off x="6382512" y="1508760"/>
-            <a:ext cx="3474720" cy="320040"/>
+            <a:off x="731520" y="4892040"/>
+            <a:ext cx="5212080" cy="1371600"/>
           </a:xfrm>
           <a:prstGeom prst="rect">
             <a:avLst/>
@@ -9191,34 +8830,115 @@
           <a:noFill/>
         </p:spPr>
         <p:txBody>
-          <a:bodyPr wrap="none" lIns="0" tIns="0">
+          <a:bodyPr wrap="square" lIns="0" tIns="0">
             <a:spAutoFit/>
           </a:bodyPr>
           <a:lstStyle/>
           <a:p>
             <a:pPr>
-              <a:defRPr sz="1300" b="1">
-                <a:solidFill>
-                  <a:srgbClr val="A855F7"/>
-                </a:solidFill>
-              </a:defRPr>
-            </a:pPr>
-            <a:r>
-              <a:t>🚀 Production Infra &amp; Future Horizon</a:t>
-            </a:r>
-          </a:p>
-        </p:txBody>
-      </p:sp>
-      <p:sp>
-        <p:nvSpPr>
-          <p:cNvPr id="15" name="TextBox 14"/>
+              <a:defRPr sz="1100" b="1">
+                <a:solidFill>
+                  <a:srgbClr val="38BDF8"/>
+                </a:solidFill>
+              </a:defRPr>
+            </a:pPr>
+            <a:r>
+              <a:t>MODERN COSMIC GLASSMORPHISM UI</a:t>
+            </a:r>
+          </a:p>
+          <a:p>
+            <a:pPr>
+              <a:defRPr sz="950">
+                <a:solidFill>
+                  <a:srgbClr val="CBD5E1"/>
+                </a:solidFill>
+              </a:defRPr>
+            </a:pPr>
+            <a:r>
+              <a:t>Dark-mode aesthetic with interactive camera palm HUD, 3D card deck shuffle &amp; flip animations, and real-time guidance feedback.</a:t>
+            </a:r>
+          </a:p>
+        </p:txBody>
+      </p:sp>
+      <p:sp>
+        <p:nvSpPr>
+          <p:cNvPr id="11" name="Rounded Rectangle 10"/>
+          <p:cNvSpPr/>
+          <p:nvPr/>
+        </p:nvSpPr>
+        <p:spPr>
+          <a:xfrm>
+            <a:off x="6248095" y="1463040"/>
+            <a:ext cx="5212080" cy="3291840"/>
+          </a:xfrm>
+          <a:prstGeom prst="roundRect">
+            <a:avLst/>
+          </a:prstGeom>
+          <a:solidFill>
+            <a:srgbClr val="131D31"/>
+          </a:solidFill>
+          <a:ln w="12700">
+            <a:solidFill>
+              <a:srgbClr val="283854"/>
+            </a:solidFill>
+          </a:ln>
+        </p:spPr>
+        <p:style>
+          <a:lnRef idx="1">
+            <a:schemeClr val="accent1"/>
+          </a:lnRef>
+          <a:fillRef idx="3">
+            <a:schemeClr val="accent1"/>
+          </a:fillRef>
+          <a:effectRef idx="2">
+            <a:schemeClr val="accent1"/>
+          </a:effectRef>
+          <a:fontRef idx="minor">
+            <a:schemeClr val="lt1"/>
+          </a:fontRef>
+        </p:style>
+        <p:txBody>
+          <a:bodyPr rtlCol="0" anchor="ctr"/>
+          <a:lstStyle/>
+          <a:p>
+            <a:pPr algn="ctr"/>
+          </a:p>
+        </p:txBody>
+      </p:sp>
+      <p:pic>
+        <p:nvPicPr>
+          <p:cNvPr id="12" name="Picture 11" descr="website_dashboard_profile.jpg"/>
+          <p:cNvPicPr>
+            <a:picLocks noChangeAspect="1"/>
+          </p:cNvPicPr>
+          <p:nvPr/>
+        </p:nvPicPr>
+        <p:blipFill>
+          <a:blip r:embed="rId3"/>
+          <a:stretch>
+            <a:fillRect/>
+          </a:stretch>
+        </p:blipFill>
+        <p:spPr>
+          <a:xfrm>
+            <a:off x="6293815" y="1508760"/>
+            <a:ext cx="5120640" cy="2858032"/>
+          </a:xfrm>
+          <a:prstGeom prst="rect">
+            <a:avLst/>
+          </a:prstGeom>
+        </p:spPr>
+      </p:pic>
+      <p:sp>
+        <p:nvSpPr>
+          <p:cNvPr id="13" name="TextBox 12"/>
           <p:cNvSpPr txBox="1"/>
           <p:nvPr/>
         </p:nvSpPr>
         <p:spPr>
           <a:xfrm>
-            <a:off x="9674352" y="1508760"/>
-            <a:ext cx="1645920" cy="320040"/>
+            <a:off x="6248095" y="4892040"/>
+            <a:ext cx="5212080" cy="1371600"/>
           </a:xfrm>
           <a:prstGeom prst="rect">
             <a:avLst/>
@@ -9226,34 +8946,255 @@
           <a:noFill/>
         </p:spPr>
         <p:txBody>
-          <a:bodyPr wrap="none" rIns="0" tIns="0">
+          <a:bodyPr wrap="square" lIns="0" tIns="0">
             <a:spAutoFit/>
           </a:bodyPr>
           <a:lstStyle/>
           <a:p>
+            <a:pPr>
+              <a:defRPr sz="1100" b="1">
+                <a:solidFill>
+                  <a:srgbClr val="A855F7"/>
+                </a:solidFill>
+              </a:defRPr>
+            </a:pPr>
+            <a:r>
+              <a:t>HOLISTIC ANALYTICS &amp; DATA PORTABILITY</a:t>
+            </a:r>
+          </a:p>
+          <a:p>
+            <a:pPr>
+              <a:defRPr sz="950">
+                <a:solidFill>
+                  <a:srgbClr val="CBD5E1"/>
+                </a:solidFill>
+              </a:defRPr>
+            </a:pPr>
+            <a:r>
+              <a:t>Seeker profile showing Big Five radar charts, longitudinal spiritual timelines, and instant one-click export to CSV &amp; JSON formats.</a:t>
+            </a:r>
+          </a:p>
+        </p:txBody>
+      </p:sp>
+    </p:spTree>
+  </p:cSld>
+  <p:clrMapOvr>
+    <a:masterClrMapping/>
+  </p:clrMapOvr>
+</p:sld>
+</file>
+
+<file path=ppt/slides/slide9.xml><?xml version="1.0" encoding="utf-8"?>
+<p:sld xmlns:a="http://schemas.openxmlformats.org/drawingml/2006/main" xmlns:p="http://schemas.openxmlformats.org/presentationml/2006/main" xmlns:r="http://schemas.openxmlformats.org/officeDocument/2006/relationships">
+  <p:cSld>
+    <p:spTree>
+      <p:nvGrpSpPr>
+        <p:cNvPr id="1" name=""/>
+        <p:cNvGrpSpPr/>
+        <p:nvPr/>
+      </p:nvGrpSpPr>
+      <p:grpSpPr/>
+      <p:sp>
+        <p:nvSpPr>
+          <p:cNvPr id="2" name="Rectangle 1"/>
+          <p:cNvSpPr/>
+          <p:nvPr/>
+        </p:nvSpPr>
+        <p:spPr>
+          <a:xfrm>
+            <a:off x="0" y="0"/>
+            <a:ext cx="12191695" cy="6858000"/>
+          </a:xfrm>
+          <a:prstGeom prst="rect">
+            <a:avLst/>
+          </a:prstGeom>
+          <a:solidFill>
+            <a:srgbClr val="0A0F1D"/>
+          </a:solidFill>
+          <a:ln>
+            <a:noFill/>
+          </a:ln>
+        </p:spPr>
+        <p:style>
+          <a:lnRef idx="1">
+            <a:schemeClr val="accent1"/>
+          </a:lnRef>
+          <a:fillRef idx="3">
+            <a:schemeClr val="accent1"/>
+          </a:fillRef>
+          <a:effectRef idx="2">
+            <a:schemeClr val="accent1"/>
+          </a:effectRef>
+          <a:fontRef idx="minor">
+            <a:schemeClr val="lt1"/>
+          </a:fontRef>
+        </p:style>
+        <p:txBody>
+          <a:bodyPr rtlCol="0" anchor="ctr"/>
+          <a:lstStyle/>
+          <a:p>
+            <a:pPr algn="ctr"/>
+          </a:p>
+        </p:txBody>
+      </p:sp>
+      <p:sp>
+        <p:nvSpPr>
+          <p:cNvPr id="3" name="Rectangle 2"/>
+          <p:cNvSpPr/>
+          <p:nvPr/>
+        </p:nvSpPr>
+        <p:spPr>
+          <a:xfrm>
+            <a:off x="0" y="0"/>
+            <a:ext cx="12191695" cy="73152"/>
+          </a:xfrm>
+          <a:prstGeom prst="rect">
+            <a:avLst/>
+          </a:prstGeom>
+          <a:solidFill>
+            <a:srgbClr val="38BDF8"/>
+          </a:solidFill>
+          <a:ln>
+            <a:noFill/>
+          </a:ln>
+        </p:spPr>
+        <p:style>
+          <a:lnRef idx="1">
+            <a:schemeClr val="accent1"/>
+          </a:lnRef>
+          <a:fillRef idx="3">
+            <a:schemeClr val="accent1"/>
+          </a:fillRef>
+          <a:effectRef idx="2">
+            <a:schemeClr val="accent1"/>
+          </a:effectRef>
+          <a:fontRef idx="minor">
+            <a:schemeClr val="lt1"/>
+          </a:fontRef>
+        </p:style>
+        <p:txBody>
+          <a:bodyPr rtlCol="0" anchor="ctr"/>
+          <a:lstStyle/>
+          <a:p>
+            <a:pPr algn="ctr"/>
+          </a:p>
+        </p:txBody>
+      </p:sp>
+      <p:sp>
+        <p:nvSpPr>
+          <p:cNvPr id="4" name="TextBox 3"/>
+          <p:cNvSpPr txBox="1"/>
+          <p:nvPr/>
+        </p:nvSpPr>
+        <p:spPr>
+          <a:xfrm>
+            <a:off x="731520" y="320040"/>
+            <a:ext cx="8229600" cy="256032"/>
+          </a:xfrm>
+          <a:prstGeom prst="rect">
+            <a:avLst/>
+          </a:prstGeom>
+          <a:noFill/>
+        </p:spPr>
+        <p:txBody>
+          <a:bodyPr wrap="square" lIns="0" rIns="0" tIns="0" bIns="0">
+            <a:spAutoFit/>
+          </a:bodyPr>
+          <a:lstStyle/>
+          <a:p>
+            <a:pPr>
+              <a:defRPr sz="1050" b="1">
+                <a:solidFill>
+                  <a:srgbClr val="10B981"/>
+                </a:solidFill>
+              </a:defRPr>
+            </a:pPr>
+            <a:r>
+              <a:t>08. VERIFICATION &amp; METRICS</a:t>
+            </a:r>
+          </a:p>
+        </p:txBody>
+      </p:sp>
+      <p:sp>
+        <p:nvSpPr>
+          <p:cNvPr id="5" name="TextBox 4"/>
+          <p:cNvSpPr txBox="1"/>
+          <p:nvPr/>
+        </p:nvSpPr>
+        <p:spPr>
+          <a:xfrm>
+            <a:off x="731520" y="594360"/>
+            <a:ext cx="8686800" cy="548640"/>
+          </a:xfrm>
+          <a:prstGeom prst="rect">
+            <a:avLst/>
+          </a:prstGeom>
+          <a:noFill/>
+        </p:spPr>
+        <p:txBody>
+          <a:bodyPr wrap="square" lIns="0" rIns="0" tIns="0" bIns="0">
+            <a:spAutoFit/>
+          </a:bodyPr>
+          <a:lstStyle/>
+          <a:p>
+            <a:pPr>
+              <a:defRPr sz="2200" b="1">
+                <a:solidFill>
+                  <a:srgbClr val="F8FAFC"/>
+                </a:solidFill>
+              </a:defRPr>
+            </a:pPr>
+            <a:r>
+              <a:t>Engineering Rigor, Testing &amp; Quality</a:t>
+            </a:r>
+          </a:p>
+        </p:txBody>
+      </p:sp>
+      <p:sp>
+        <p:nvSpPr>
+          <p:cNvPr id="6" name="TextBox 5"/>
+          <p:cNvSpPr txBox="1"/>
+          <p:nvPr/>
+        </p:nvSpPr>
+        <p:spPr>
+          <a:xfrm>
+            <a:off x="10241280" y="365760"/>
+            <a:ext cx="1188720" cy="320040"/>
+          </a:xfrm>
+          <a:prstGeom prst="rect">
+            <a:avLst/>
+          </a:prstGeom>
+          <a:noFill/>
+        </p:spPr>
+        <p:txBody>
+          <a:bodyPr wrap="none" rIns="0">
+            <a:spAutoFit/>
+          </a:bodyPr>
+          <a:lstStyle/>
+          <a:p>
             <a:pPr algn="r">
-              <a:defRPr sz="950" b="1">
-                <a:solidFill>
-                  <a:srgbClr val="38BDF8"/>
-                </a:solidFill>
-              </a:defRPr>
-            </a:pPr>
-            <a:r>
-              <a:t>● ENTERPRISE READY</a:t>
-            </a:r>
-          </a:p>
-        </p:txBody>
-      </p:sp>
-      <p:sp>
-        <p:nvSpPr>
-          <p:cNvPr id="16" name="Rectangle 15"/>
+              <a:defRPr sz="1100" b="1">
+                <a:solidFill>
+                  <a:srgbClr val="94A3B8"/>
+                </a:solidFill>
+              </a:defRPr>
+            </a:pPr>
+            <a:r>
+              <a:t>09 / 10</a:t>
+            </a:r>
+          </a:p>
+        </p:txBody>
+      </p:sp>
+      <p:sp>
+        <p:nvSpPr>
+          <p:cNvPr id="7" name="Rectangle 6"/>
           <p:cNvSpPr/>
           <p:nvPr/>
         </p:nvSpPr>
         <p:spPr>
           <a:xfrm>
-            <a:off x="6382512" y="1874519"/>
-            <a:ext cx="4892040" cy="13716"/>
+            <a:off x="731520" y="1234440"/>
+            <a:ext cx="10728655" cy="13716"/>
           </a:xfrm>
           <a:prstGeom prst="rect">
             <a:avLst/>
@@ -9289,14 +9230,59 @@
       </p:sp>
       <p:sp>
         <p:nvSpPr>
-          <p:cNvPr id="17" name="TextBox 16"/>
+          <p:cNvPr id="8" name="Rounded Rectangle 7"/>
+          <p:cNvSpPr/>
+          <p:nvPr/>
+        </p:nvSpPr>
+        <p:spPr>
+          <a:xfrm>
+            <a:off x="731520" y="1463040"/>
+            <a:ext cx="2468880" cy="1234440"/>
+          </a:xfrm>
+          <a:prstGeom prst="roundRect">
+            <a:avLst/>
+          </a:prstGeom>
+          <a:solidFill>
+            <a:srgbClr val="131D31"/>
+          </a:solidFill>
+          <a:ln w="12700">
+            <a:solidFill>
+              <a:srgbClr val="10B981"/>
+            </a:solidFill>
+          </a:ln>
+        </p:spPr>
+        <p:style>
+          <a:lnRef idx="1">
+            <a:schemeClr val="accent1"/>
+          </a:lnRef>
+          <a:fillRef idx="3">
+            <a:schemeClr val="accent1"/>
+          </a:fillRef>
+          <a:effectRef idx="2">
+            <a:schemeClr val="accent1"/>
+          </a:effectRef>
+          <a:fontRef idx="minor">
+            <a:schemeClr val="lt1"/>
+          </a:fontRef>
+        </p:style>
+        <p:txBody>
+          <a:bodyPr rtlCol="0" anchor="ctr"/>
+          <a:lstStyle/>
+          <a:p>
+            <a:pPr algn="ctr"/>
+          </a:p>
+        </p:txBody>
+      </p:sp>
+      <p:sp>
+        <p:nvSpPr>
+          <p:cNvPr id="9" name="TextBox 8"/>
           <p:cNvSpPr txBox="1"/>
           <p:nvPr/>
         </p:nvSpPr>
         <p:spPr>
           <a:xfrm>
-            <a:off x="6382512" y="1965960"/>
-            <a:ext cx="4892040" cy="4389120"/>
+            <a:off x="868680" y="1600200"/>
+            <a:ext cx="2194560" cy="960120"/>
           </a:xfrm>
           <a:prstGeom prst="rect">
             <a:avLst/>
@@ -9310,146 +9296,503 @@
           <a:lstStyle/>
           <a:p>
             <a:pPr>
-              <a:defRPr sz="950" b="1">
-                <a:solidFill>
-                  <a:srgbClr val="F8FAFC"/>
-                </a:solidFill>
-              </a:defRPr>
-            </a:pPr>
-            <a:r>
-              <a:t>▪ Docker Container Network: </a:t>
-            </a:r>
-            <a:r>
-              <a:rPr b="0">
+              <a:defRPr sz="1800" b="1">
+                <a:solidFill>
+                  <a:srgbClr val="10B981"/>
+                </a:solidFill>
+              </a:defRPr>
+            </a:pPr>
+            <a:r>
+              <a:t>63 / 63</a:t>
+            </a:r>
+          </a:p>
+          <a:p>
+            <a:pPr>
+              <a:defRPr sz="950">
                 <a:solidFill>
                   <a:srgbClr val="CBD5E1"/>
                 </a:solidFill>
-              </a:rPr>
-              <a:t>Single-command containerization for PostgreSQL, MongoDB, Redis &amp; FastAPI services</a:t>
-            </a:r>
-          </a:p>
-          <a:p>
-            <a:pPr>
-              <a:defRPr sz="950" b="1">
-                <a:solidFill>
-                  <a:srgbClr val="F8FAFC"/>
-                </a:solidFill>
-              </a:defRPr>
-            </a:pPr>
-            <a:r>
-              <a:t>▪ Live WebRTC Palm Tracking: </a:t>
-            </a:r>
-            <a:r>
-              <a:rPr b="0">
+              </a:defRPr>
+            </a:pPr>
+            <a:r>
+              <a:t>Automated Tests Passing (100%)</a:t>
+            </a:r>
+          </a:p>
+        </p:txBody>
+      </p:sp>
+      <p:sp>
+        <p:nvSpPr>
+          <p:cNvPr id="10" name="Rounded Rectangle 9"/>
+          <p:cNvSpPr/>
+          <p:nvPr/>
+        </p:nvSpPr>
+        <p:spPr>
+          <a:xfrm>
+            <a:off x="3337560" y="1463040"/>
+            <a:ext cx="2468880" cy="1234440"/>
+          </a:xfrm>
+          <a:prstGeom prst="roundRect">
+            <a:avLst/>
+          </a:prstGeom>
+          <a:solidFill>
+            <a:srgbClr val="131D31"/>
+          </a:solidFill>
+          <a:ln w="12700">
+            <a:solidFill>
+              <a:srgbClr val="38BDF8"/>
+            </a:solidFill>
+          </a:ln>
+        </p:spPr>
+        <p:style>
+          <a:lnRef idx="1">
+            <a:schemeClr val="accent1"/>
+          </a:lnRef>
+          <a:fillRef idx="3">
+            <a:schemeClr val="accent1"/>
+          </a:fillRef>
+          <a:effectRef idx="2">
+            <a:schemeClr val="accent1"/>
+          </a:effectRef>
+          <a:fontRef idx="minor">
+            <a:schemeClr val="lt1"/>
+          </a:fontRef>
+        </p:style>
+        <p:txBody>
+          <a:bodyPr rtlCol="0" anchor="ctr"/>
+          <a:lstStyle/>
+          <a:p>
+            <a:pPr algn="ctr"/>
+          </a:p>
+        </p:txBody>
+      </p:sp>
+      <p:sp>
+        <p:nvSpPr>
+          <p:cNvPr id="11" name="TextBox 10"/>
+          <p:cNvSpPr txBox="1"/>
+          <p:nvPr/>
+        </p:nvSpPr>
+        <p:spPr>
+          <a:xfrm>
+            <a:off x="3474720" y="1600200"/>
+            <a:ext cx="2194560" cy="960120"/>
+          </a:xfrm>
+          <a:prstGeom prst="rect">
+            <a:avLst/>
+          </a:prstGeom>
+          <a:noFill/>
+        </p:spPr>
+        <p:txBody>
+          <a:bodyPr wrap="square" lIns="0" tIns="0">
+            <a:spAutoFit/>
+          </a:bodyPr>
+          <a:lstStyle/>
+          <a:p>
+            <a:pPr>
+              <a:defRPr sz="1800" b="1">
+                <a:solidFill>
+                  <a:srgbClr val="38BDF8"/>
+                </a:solidFill>
+              </a:defRPr>
+            </a:pPr>
+            <a:r>
+              <a:t>&lt; 95 ms</a:t>
+            </a:r>
+          </a:p>
+          <a:p>
+            <a:pPr>
+              <a:defRPr sz="950">
                 <a:solidFill>
                   <a:srgbClr val="CBD5E1"/>
                 </a:solidFill>
-              </a:rPr>
-              <a:t>Drop-in MediaPipe edge machine learning for real-time video landmark analysis</a:t>
-            </a:r>
-          </a:p>
-          <a:p>
-            <a:pPr>
-              <a:defRPr sz="950" b="1">
-                <a:solidFill>
-                  <a:srgbClr val="F8FAFC"/>
-                </a:solidFill>
-              </a:defRPr>
-            </a:pPr>
-            <a:r>
-              <a:t>▪ Cross-Platform Mobile Apps: </a:t>
-            </a:r>
-            <a:r>
-              <a:rPr b="0">
+              </a:defRPr>
+            </a:pPr>
+            <a:r>
+              <a:t>Average REST API Latency</a:t>
+            </a:r>
+          </a:p>
+        </p:txBody>
+      </p:sp>
+      <p:sp>
+        <p:nvSpPr>
+          <p:cNvPr id="12" name="Rounded Rectangle 11"/>
+          <p:cNvSpPr/>
+          <p:nvPr/>
+        </p:nvSpPr>
+        <p:spPr>
+          <a:xfrm>
+            <a:off x="731520" y="2834640"/>
+            <a:ext cx="2468880" cy="1234440"/>
+          </a:xfrm>
+          <a:prstGeom prst="roundRect">
+            <a:avLst/>
+          </a:prstGeom>
+          <a:solidFill>
+            <a:srgbClr val="131D31"/>
+          </a:solidFill>
+          <a:ln w="12700">
+            <a:solidFill>
+              <a:srgbClr val="A855F7"/>
+            </a:solidFill>
+          </a:ln>
+        </p:spPr>
+        <p:style>
+          <a:lnRef idx="1">
+            <a:schemeClr val="accent1"/>
+          </a:lnRef>
+          <a:fillRef idx="3">
+            <a:schemeClr val="accent1"/>
+          </a:fillRef>
+          <a:effectRef idx="2">
+            <a:schemeClr val="accent1"/>
+          </a:effectRef>
+          <a:fontRef idx="minor">
+            <a:schemeClr val="lt1"/>
+          </a:fontRef>
+        </p:style>
+        <p:txBody>
+          <a:bodyPr rtlCol="0" anchor="ctr"/>
+          <a:lstStyle/>
+          <a:p>
+            <a:pPr algn="ctr"/>
+          </a:p>
+        </p:txBody>
+      </p:sp>
+      <p:sp>
+        <p:nvSpPr>
+          <p:cNvPr id="13" name="TextBox 12"/>
+          <p:cNvSpPr txBox="1"/>
+          <p:nvPr/>
+        </p:nvSpPr>
+        <p:spPr>
+          <a:xfrm>
+            <a:off x="868680" y="2971800"/>
+            <a:ext cx="2194560" cy="960120"/>
+          </a:xfrm>
+          <a:prstGeom prst="rect">
+            <a:avLst/>
+          </a:prstGeom>
+          <a:noFill/>
+        </p:spPr>
+        <p:txBody>
+          <a:bodyPr wrap="square" lIns="0" tIns="0">
+            <a:spAutoFit/>
+          </a:bodyPr>
+          <a:lstStyle/>
+          <a:p>
+            <a:pPr>
+              <a:defRPr sz="1800" b="1">
+                <a:solidFill>
+                  <a:srgbClr val="A855F7"/>
+                </a:solidFill>
+              </a:defRPr>
+            </a:pPr>
+            <a:r>
+              <a:t>30+ APIS</a:t>
+            </a:r>
+          </a:p>
+          <a:p>
+            <a:pPr>
+              <a:defRPr sz="950">
                 <a:solidFill>
                   <a:srgbClr val="CBD5E1"/>
                 </a:solidFill>
-              </a:rPr>
-              <a:t>React Native iOS &amp; Android companion applications with haptic vibration card flips</a:t>
-            </a:r>
-          </a:p>
-          <a:p>
-            <a:pPr>
-              <a:defRPr sz="950" b="1">
-                <a:solidFill>
-                  <a:srgbClr val="F8FAFC"/>
-                </a:solidFill>
-              </a:defRPr>
-            </a:pPr>
-            <a:r>
-              <a:t>▪ Multilingual Neural Voice: </a:t>
-            </a:r>
-            <a:r>
-              <a:rPr b="0">
+              </a:defRPr>
+            </a:pPr>
+            <a:r>
+              <a:t>Swagger / OpenAPI Standard</a:t>
+            </a:r>
+          </a:p>
+        </p:txBody>
+      </p:sp>
+      <p:sp>
+        <p:nvSpPr>
+          <p:cNvPr id="14" name="Rounded Rectangle 13"/>
+          <p:cNvSpPr/>
+          <p:nvPr/>
+        </p:nvSpPr>
+        <p:spPr>
+          <a:xfrm>
+            <a:off x="3337560" y="2834640"/>
+            <a:ext cx="2468880" cy="1234440"/>
+          </a:xfrm>
+          <a:prstGeom prst="roundRect">
+            <a:avLst/>
+          </a:prstGeom>
+          <a:solidFill>
+            <a:srgbClr val="131D31"/>
+          </a:solidFill>
+          <a:ln w="12700">
+            <a:solidFill>
+              <a:srgbClr val="F59E0B"/>
+            </a:solidFill>
+          </a:ln>
+        </p:spPr>
+        <p:style>
+          <a:lnRef idx="1">
+            <a:schemeClr val="accent1"/>
+          </a:lnRef>
+          <a:fillRef idx="3">
+            <a:schemeClr val="accent1"/>
+          </a:fillRef>
+          <a:effectRef idx="2">
+            <a:schemeClr val="accent1"/>
+          </a:effectRef>
+          <a:fontRef idx="minor">
+            <a:schemeClr val="lt1"/>
+          </a:fontRef>
+        </p:style>
+        <p:txBody>
+          <a:bodyPr rtlCol="0" anchor="ctr"/>
+          <a:lstStyle/>
+          <a:p>
+            <a:pPr algn="ctr"/>
+          </a:p>
+        </p:txBody>
+      </p:sp>
+      <p:sp>
+        <p:nvSpPr>
+          <p:cNvPr id="15" name="TextBox 14"/>
+          <p:cNvSpPr txBox="1"/>
+          <p:nvPr/>
+        </p:nvSpPr>
+        <p:spPr>
+          <a:xfrm>
+            <a:off x="3474720" y="2971800"/>
+            <a:ext cx="2194560" cy="960120"/>
+          </a:xfrm>
+          <a:prstGeom prst="rect">
+            <a:avLst/>
+          </a:prstGeom>
+          <a:noFill/>
+        </p:spPr>
+        <p:txBody>
+          <a:bodyPr wrap="square" lIns="0" tIns="0">
+            <a:spAutoFit/>
+          </a:bodyPr>
+          <a:lstStyle/>
+          <a:p>
+            <a:pPr>
+              <a:defRPr sz="1800" b="1">
+                <a:solidFill>
+                  <a:srgbClr val="F59E0B"/>
+                </a:solidFill>
+              </a:defRPr>
+            </a:pPr>
+            <a:r>
+              <a:t>0 DOWNTIME</a:t>
+            </a:r>
+          </a:p>
+          <a:p>
+            <a:pPr>
+              <a:defRPr sz="950">
                 <a:solidFill>
                   <a:srgbClr val="CBD5E1"/>
                 </a:solidFill>
-              </a:rPr>
-              <a:t>Real-time voice-guided tarot reading &amp; audio affirmations across 12+ languages</a:t>
-            </a:r>
-          </a:p>
-          <a:p>
-            <a:pPr>
-              <a:defRPr sz="950" b="1">
-                <a:solidFill>
-                  <a:srgbClr val="F8FAFC"/>
-                </a:solidFill>
-              </a:defRPr>
-            </a:pPr>
-            <a:r>
-              <a:t>▪ WebXR Immersive Sanctum: </a:t>
-            </a:r>
-            <a:r>
-              <a:rPr b="0">
+              </a:defRPr>
+            </a:pPr>
+            <a:r>
+              <a:t>Automatic SQLite Fallback</a:t>
+            </a:r>
+          </a:p>
+        </p:txBody>
+      </p:sp>
+      <p:sp>
+        <p:nvSpPr>
+          <p:cNvPr id="16" name="Rounded Rectangle 15"/>
+          <p:cNvSpPr/>
+          <p:nvPr/>
+        </p:nvSpPr>
+        <p:spPr>
+          <a:xfrm>
+            <a:off x="731520" y="4389120"/>
+            <a:ext cx="5074920" cy="1828800"/>
+          </a:xfrm>
+          <a:prstGeom prst="roundRect">
+            <a:avLst/>
+          </a:prstGeom>
+          <a:solidFill>
+            <a:srgbClr val="131D31"/>
+          </a:solidFill>
+          <a:ln w="12700">
+            <a:solidFill>
+              <a:srgbClr val="283854"/>
+            </a:solidFill>
+          </a:ln>
+        </p:spPr>
+        <p:style>
+          <a:lnRef idx="1">
+            <a:schemeClr val="accent1"/>
+          </a:lnRef>
+          <a:fillRef idx="3">
+            <a:schemeClr val="accent1"/>
+          </a:fillRef>
+          <a:effectRef idx="2">
+            <a:schemeClr val="accent1"/>
+          </a:effectRef>
+          <a:fontRef idx="minor">
+            <a:schemeClr val="lt1"/>
+          </a:fontRef>
+        </p:style>
+        <p:txBody>
+          <a:bodyPr rtlCol="0" anchor="ctr"/>
+          <a:lstStyle/>
+          <a:p>
+            <a:pPr algn="ctr"/>
+          </a:p>
+        </p:txBody>
+      </p:sp>
+      <p:sp>
+        <p:nvSpPr>
+          <p:cNvPr id="17" name="TextBox 16"/>
+          <p:cNvSpPr txBox="1"/>
+          <p:nvPr/>
+        </p:nvSpPr>
+        <p:spPr>
+          <a:xfrm>
+            <a:off x="914400" y="4526280"/>
+            <a:ext cx="4709160" cy="1554480"/>
+          </a:xfrm>
+          <a:prstGeom prst="rect">
+            <a:avLst/>
+          </a:prstGeom>
+          <a:noFill/>
+        </p:spPr>
+        <p:txBody>
+          <a:bodyPr wrap="square" lIns="0" tIns="0">
+            <a:spAutoFit/>
+          </a:bodyPr>
+          <a:lstStyle/>
+          <a:p>
+            <a:pPr>
+              <a:defRPr sz="1100" b="1">
+                <a:solidFill>
+                  <a:srgbClr val="10B981"/>
+                </a:solidFill>
+              </a:defRPr>
+            </a:pPr>
+            <a:r>
+              <a:t>TESTING &amp; CODE STABILITY</a:t>
+            </a:r>
+          </a:p>
+          <a:p>
+            <a:pPr>
+              <a:defRPr sz="900">
                 <a:solidFill>
                   <a:srgbClr val="CBD5E1"/>
                 </a:solidFill>
-              </a:rPr>
-              <a:t>3D VR spiritual sanctum supporting interactive virtual reality deck interactions</a:t>
-            </a:r>
-          </a:p>
-          <a:p>
-            <a:pPr>
-              <a:defRPr sz="950" b="1">
-                <a:solidFill>
-                  <a:srgbClr val="F8FAFC"/>
-                </a:solidFill>
-              </a:defRPr>
-            </a:pPr>
-            <a:r>
-              <a:t>▪ Practitioner Marketplace: </a:t>
-            </a:r>
-            <a:r>
-              <a:rPr b="0">
+              </a:defRPr>
+            </a:pPr>
+            <a:r>
+              <a:t>✔ Auth security: JWT token generation, refresh &amp; blacklist tests</a:t>
+            </a:r>
+          </a:p>
+          <a:p>
+            <a:pPr>
+              <a:defRPr sz="900">
                 <a:solidFill>
                   <a:srgbClr val="CBD5E1"/>
                 </a:solidFill>
-              </a:rPr>
-              <a:t>Live video consultation booking system with verified professional tarot readers</a:t>
-            </a:r>
-          </a:p>
-          <a:p>
-            <a:pPr>
-              <a:defRPr sz="950" b="1">
-                <a:solidFill>
-                  <a:srgbClr val="F8FAFC"/>
-                </a:solidFill>
-              </a:defRPr>
-            </a:pPr>
-            <a:r>
-              <a:t>▪ Continuous Cloud Delivery: </a:t>
-            </a:r>
-            <a:r>
-              <a:rPr b="0">
+              </a:defRPr>
+            </a:pPr>
+            <a:r>
+              <a:t>✔ Deterministic CV: Line curvature boundary &amp; landmark assertions</a:t>
+            </a:r>
+          </a:p>
+          <a:p>
+            <a:pPr>
+              <a:defRPr sz="900">
                 <a:solidFill>
                   <a:srgbClr val="CBD5E1"/>
                 </a:solidFill>
-              </a:rPr>
-              <a:t>Automated GitHub Actions CI/CD pipeline targeting Vercel &amp; Railway/Render</a:t>
-            </a:r>
-          </a:p>
-        </p:txBody>
-      </p:sp>
+              </a:defRPr>
+            </a:pPr>
+            <a:r>
+              <a:t>✔ Tarot permutations: Card inversion polarities &amp; spread integrity</a:t>
+            </a:r>
+          </a:p>
+          <a:p>
+            <a:pPr>
+              <a:defRPr sz="900">
+                <a:solidFill>
+                  <a:srgbClr val="CBD5E1"/>
+                </a:solidFill>
+              </a:defRPr>
+            </a:pPr>
+            <a:r>
+              <a:t>✔ Cross-modal integration: Synthesis output schema validation</a:t>
+            </a:r>
+          </a:p>
+        </p:txBody>
+      </p:sp>
+      <p:sp>
+        <p:nvSpPr>
+          <p:cNvPr id="18" name="Rounded Rectangle 17"/>
+          <p:cNvSpPr/>
+          <p:nvPr/>
+        </p:nvSpPr>
+        <p:spPr>
+          <a:xfrm>
+            <a:off x="6080760" y="1463040"/>
+            <a:ext cx="5379415" cy="4754880"/>
+          </a:xfrm>
+          <a:prstGeom prst="roundRect">
+            <a:avLst/>
+          </a:prstGeom>
+          <a:solidFill>
+            <a:srgbClr val="131D31"/>
+          </a:solidFill>
+          <a:ln w="12700">
+            <a:solidFill>
+              <a:srgbClr val="283854"/>
+            </a:solidFill>
+          </a:ln>
+        </p:spPr>
+        <p:style>
+          <a:lnRef idx="1">
+            <a:schemeClr val="accent1"/>
+          </a:lnRef>
+          <a:fillRef idx="3">
+            <a:schemeClr val="accent1"/>
+          </a:fillRef>
+          <a:effectRef idx="2">
+            <a:schemeClr val="accent1"/>
+          </a:effectRef>
+          <a:fontRef idx="minor">
+            <a:schemeClr val="lt1"/>
+          </a:fontRef>
+        </p:style>
+        <p:txBody>
+          <a:bodyPr rtlCol="0" anchor="ctr"/>
+          <a:lstStyle/>
+          <a:p>
+            <a:pPr algn="ctr"/>
+          </a:p>
+        </p:txBody>
+      </p:sp>
+      <p:pic>
+        <p:nvPicPr>
+          <p:cNvPr id="19" name="Picture 18" descr="website_swagger_docs.jpg"/>
+          <p:cNvPicPr>
+            <a:picLocks noChangeAspect="1"/>
+          </p:cNvPicPr>
+          <p:nvPr/>
+        </p:nvPicPr>
+        <p:blipFill>
+          <a:blip r:embed="rId2"/>
+          <a:stretch>
+            <a:fillRect/>
+          </a:stretch>
+        </p:blipFill>
+        <p:spPr>
+          <a:xfrm>
+            <a:off x="6126480" y="1508760"/>
+            <a:ext cx="5287975" cy="2951428"/>
+          </a:xfrm>
+          <a:prstGeom prst="rect">
+            <a:avLst/>
+          </a:prstGeom>
+        </p:spPr>
+      </p:pic>
     </p:spTree>
   </p:cSld>
   <p:clrMapOvr>
